--- a/static/ppts/G6_Sci_Earthquakes_Volcanoes.pptx
+++ b/static/ppts/G6_Sci_Earthquakes_Volcanoes.pptx
@@ -9,9 +9,10 @@
     <p:sldId id="257" r:id="rId3"/>
     <p:sldId id="258" r:id="rId4"/>
     <p:sldId id="259" r:id="rId5"/>
+    <p:sldId id="260" r:id="rId6"/>
   </p:sldIdLst>
   <p:notesMasterIdLst>
-    <p:notesMasterId r:id="rId6"/>
+    <p:notesMasterId r:id="rId7"/>
   </p:notesMasterIdLst>
   <p:sldSz cx="9144000" cy="5143500"/>
   <p:notesSz cx="5143500" cy="9144000"/>
@@ -811,6 +812,94 @@
 </p:notes>
 </file>
 
+<file path=ppt/notesSlides/notesSlide5.xml><?xml version="1.0" encoding="utf-8"?>
+<p:notes xmlns:a="http://schemas.openxmlformats.org/drawingml/2006/main" xmlns:r="http://schemas.openxmlformats.org/officeDocument/2006/relationships" xmlns:p="http://schemas.openxmlformats.org/presentationml/2006/main">
+  <p:cSld>
+    <p:spTree>
+      <p:nvGrpSpPr>
+        <p:cNvPr id="1" name=""/>
+        <p:cNvGrpSpPr/>
+        <p:nvPr/>
+      </p:nvGrpSpPr>
+      <p:grpSpPr>
+        <a:xfrm>
+          <a:off x="0" y="0"/>
+          <a:ext cx="0" cy="0"/>
+          <a:chOff x="0" y="0"/>
+          <a:chExt cx="0" cy="0"/>
+        </a:xfrm>
+      </p:grpSpPr>
+      <p:sp>
+        <p:nvSpPr>
+          <p:cNvPr id="2" name="Slide Image Placeholder 1"/>
+          <p:cNvSpPr>
+            <a:spLocks noGrp="1" noRot="1" noChangeAspect="1"/>
+          </p:cNvSpPr>
+          <p:nvPr>
+            <p:ph type="sldImg"/>
+          </p:nvPr>
+        </p:nvSpPr>
+        <p:spPr/>
+      </p:sp>
+      <p:sp>
+        <p:nvSpPr>
+          <p:cNvPr id="3" name="Notes Placeholder 2"/>
+          <p:cNvSpPr>
+            <a:spLocks noGrp="1"/>
+          </p:cNvSpPr>
+          <p:nvPr>
+            <p:ph type="body" idx="1"/>
+          </p:nvPr>
+        </p:nvSpPr>
+        <p:spPr/>
+        <p:txBody>
+          <a:bodyPr/>
+          <a:lstStyle/>
+          <a:p>
+            <a:r>
+              <a:rPr lang="en-US" dirty="0"/>
+              <a:t/>
+            </a:r>
+            <a:endParaRPr lang="en-US" dirty="0"/>
+          </a:p>
+        </p:txBody>
+      </p:sp>
+      <p:sp>
+        <p:nvSpPr>
+          <p:cNvPr id="4" name="Slide Number Placeholder 3"/>
+          <p:cNvSpPr>
+            <a:spLocks noGrp="1"/>
+          </p:cNvSpPr>
+          <p:nvPr>
+            <p:ph type="sldNum" sz="quarter" idx="10"/>
+          </p:nvPr>
+        </p:nvSpPr>
+        <p:spPr/>
+        <p:txBody>
+          <a:bodyPr/>
+          <a:lstStyle/>
+          <a:p>
+            <a:fld id="{F7021451-1387-4CA6-816F-3879F97B5CBC}" type="slidenum">
+              <a:rPr lang="en-US"/>
+              <a:t>5</a:t>
+            </a:fld>
+            <a:endParaRPr lang="en-US"/>
+          </a:p>
+        </p:txBody>
+      </p:sp>
+    </p:spTree>
+    <p:extLst>
+      <p:ext uri="{BB962C8B-B14F-4D97-AF65-F5344CB8AC3E}">
+        <p14:creationId xmlns:p14="http://schemas.microsoft.com/office/powerpoint/2010/main" val="1024086991"/>
+      </p:ext>
+    </p:extLst>
+  </p:cSld>
+  <p:clrMapOvr>
+    <a:masterClrMapping/>
+  </p:clrMapOvr>
+</p:notes>
+</file>
+
 <file path=ppt/slideLayouts/slideLayout1.xml><?xml version="1.0" encoding="utf-8"?>
 <p:sldLayout xmlns:a="http://schemas.openxmlformats.org/drawingml/2006/main" xmlns:r="http://schemas.openxmlformats.org/officeDocument/2006/relationships" xmlns:p="http://schemas.openxmlformats.org/presentationml/2006/main" preserve="1">
   <p:cSld name="DEFAULT">
@@ -1170,7 +1259,7 @@
         </p:nvSpPr>
         <p:spPr>
           <a:xfrm>
-            <a:off x="731520" y="1280160"/>
+            <a:off x="731520" y="1097280"/>
             <a:ext cx="7772400" cy="1371600"/>
           </a:xfrm>
           <a:prstGeom prst="rect">
@@ -1187,7 +1276,7 @@
               <a:buNone/>
             </a:pPr>
             <a:r>
-              <a:rPr lang="en-US" sz="3600" b="1" dirty="0">
+              <a:rPr lang="en-US" sz="4000" b="1" dirty="0">
                 <a:solidFill>
                   <a:srgbClr val="FFFFFF"/>
                 </a:solidFill>
@@ -1197,7 +1286,7 @@
               </a:rPr>
               <a:t>Earthquakes &amp; Volcanoes</a:t>
             </a:r>
-            <a:endParaRPr lang="en-US" sz="3600" dirty="0"/>
+            <a:endParaRPr lang="en-US" sz="4000" dirty="0"/>
           </a:p>
         </p:txBody>
       </p:sp>
@@ -1209,7 +1298,7 @@
         </p:nvSpPr>
         <p:spPr>
           <a:xfrm>
-            <a:off x="731520" y="2743200"/>
+            <a:off x="731520" y="2560320"/>
             <a:ext cx="7772400" cy="548640"/>
           </a:xfrm>
           <a:prstGeom prst="rect">
@@ -1228,13 +1317,13 @@
             <a:r>
               <a:rPr lang="en-US" sz="1600" dirty="0">
                 <a:solidFill>
-                  <a:srgbClr val="9B9690"/>
+                  <a:srgbClr val="E9C46A"/>
                 </a:solidFill>
                 <a:latin typeface="Calibri" pitchFamily="34" charset="0"/>
                 <a:ea typeface="Calibri" pitchFamily="34" charset="-122"/>
                 <a:cs typeface="Calibri" pitchFamily="34" charset="-120"/>
               </a:rPr>
-              <a:t>G6 Science · Earth Science</a:t>
+              <a:t>Grade 6 Science · Mr Zocchi</a:t>
             </a:r>
             <a:endParaRPr lang="en-US" sz="1600" dirty="0"/>
           </a:p>
@@ -1242,14 +1331,36 @@
       </p:sp>
       <p:sp>
         <p:nvSpPr>
-          <p:cNvPr id="5" name="Text 3"/>
-          <p:cNvSpPr/>
-          <p:nvPr/>
-        </p:nvSpPr>
-        <p:spPr>
-          <a:xfrm>
-            <a:off x="731520" y="4389120"/>
-            <a:ext cx="7772400" cy="457200"/>
+          <p:cNvPr id="5" name="Shape 3"/>
+          <p:cNvSpPr/>
+          <p:nvPr/>
+        </p:nvSpPr>
+        <p:spPr>
+          <a:xfrm>
+            <a:off x="731520" y="3474720"/>
+            <a:ext cx="2011680" cy="411480"/>
+          </a:xfrm>
+          <a:prstGeom prst="roundRect">
+            <a:avLst>
+              <a:gd name="adj" fmla="val 17778"/>
+            </a:avLst>
+          </a:prstGeom>
+          <a:solidFill>
+            <a:srgbClr val="2A9D8F"/>
+          </a:solidFill>
+          <a:ln/>
+        </p:spPr>
+      </p:sp>
+      <p:sp>
+        <p:nvSpPr>
+          <p:cNvPr id="6" name="Text 4"/>
+          <p:cNvSpPr/>
+          <p:nvPr/>
+        </p:nvSpPr>
+        <p:spPr>
+          <a:xfrm>
+            <a:off x="731520" y="3474720"/>
+            <a:ext cx="2011680" cy="411480"/>
           </a:xfrm>
           <a:prstGeom prst="rect">
             <a:avLst/>
@@ -1261,21 +1372,21 @@
           <a:bodyPr wrap="square" rtlCol="0" anchor="ctr"/>
           <a:lstStyle/>
           <a:p>
-            <a:pPr indent="0" marL="0">
+            <a:pPr algn="ctr" indent="0" marL="0">
               <a:buNone/>
             </a:pPr>
             <a:r>
-              <a:rPr lang="en-US" sz="1000" dirty="0">
+              <a:rPr lang="en-US" sz="1200" b="1" dirty="0">
                 <a:solidFill>
-                  <a:srgbClr val="6B6660"/>
+                  <a:srgbClr val="FFFFFF"/>
                 </a:solidFill>
                 <a:latin typeface="Calibri" pitchFamily="34" charset="0"/>
                 <a:ea typeface="Calibri" pitchFamily="34" charset="-122"/>
                 <a:cs typeface="Calibri" pitchFamily="34" charset="-120"/>
               </a:rPr>
-              <a:t>Mr Zocchi · mrzocchi.com</a:t>
-            </a:r>
-            <a:endParaRPr lang="en-US" sz="1000" dirty="0"/>
+              <a:t>Term 3 · Earth Science</a:t>
+            </a:r>
+            <a:endParaRPr lang="en-US" sz="1200" dirty="0"/>
           </a:p>
         </p:txBody>
       </p:sp>
@@ -1293,7 +1404,7 @@
     <p:bg>
       <p:bgPr>
         <a:solidFill>
-          <a:srgbClr val="FFFFFF"/>
+          <a:srgbClr val="FAF8F5"/>
         </a:solidFill>
       </p:bgPr>
     </p:bg>
@@ -1339,8 +1450,8 @@
         </p:nvSpPr>
         <p:spPr>
           <a:xfrm>
-            <a:off x="548640" y="274320"/>
-            <a:ext cx="8046720" cy="640080"/>
+            <a:off x="7772400" y="4709160"/>
+            <a:ext cx="1097280" cy="320040"/>
           </a:xfrm>
           <a:prstGeom prst="rect">
             <a:avLst/>
@@ -1349,14 +1460,105 @@
           <a:ln/>
         </p:spPr>
         <p:txBody>
-          <a:bodyPr wrap="square" lIns="0" tIns="0" rIns="0" bIns="0" rtlCol="0" anchor="ctr"/>
+          <a:bodyPr wrap="square" rtlCol="0" anchor="ctr"/>
+          <a:lstStyle/>
+          <a:p>
+            <a:pPr algn="r" indent="0" marL="0">
+              <a:buNone/>
+            </a:pPr>
+            <a:r>
+              <a:rPr lang="en-US" sz="900" dirty="0">
+                <a:solidFill>
+                  <a:srgbClr val="6B6660"/>
+                </a:solidFill>
+                <a:latin typeface="Calibri" pitchFamily="34" charset="0"/>
+                <a:ea typeface="Calibri" pitchFamily="34" charset="-122"/>
+                <a:cs typeface="Calibri" pitchFamily="34" charset="-120"/>
+              </a:rPr>
+              <a:t>2 / 5</a:t>
+            </a:r>
+            <a:endParaRPr lang="en-US" sz="900" dirty="0"/>
+          </a:p>
+        </p:txBody>
+      </p:sp>
+      <p:sp>
+        <p:nvSpPr>
+          <p:cNvPr id="4" name="Shape 2"/>
+          <p:cNvSpPr/>
+          <p:nvPr/>
+        </p:nvSpPr>
+        <p:spPr>
+          <a:xfrm>
+            <a:off x="1371600" y="914400"/>
+            <a:ext cx="6400800" cy="3200400"/>
+          </a:xfrm>
+          <a:prstGeom prst="rect">
+            <a:avLst/>
+          </a:prstGeom>
+          <a:solidFill>
+            <a:srgbClr val="FFFFFF"/>
+          </a:solidFill>
+          <a:ln w="12700">
+            <a:solidFill>
+              <a:srgbClr val="E5E2DC"/>
+            </a:solidFill>
+            <a:prstDash val="solid"/>
+          </a:ln>
+          <a:effectLst>
+            <a:outerShdw sx="100000" sy="100000" kx="0" ky="0" algn="bl" rotWithShape="0" blurRad="50800" dist="25400" dir="8100000">
+              <a:srgbClr val="000000">
+                <a:alpha val="10000"/>
+              </a:srgbClr>
+            </a:outerShdw>
+          </a:effectLst>
+        </p:spPr>
+      </p:sp>
+      <p:sp>
+        <p:nvSpPr>
+          <p:cNvPr id="5" name="Shape 3"/>
+          <p:cNvSpPr/>
+          <p:nvPr/>
+        </p:nvSpPr>
+        <p:spPr>
+          <a:xfrm>
+            <a:off x="1371600" y="914400"/>
+            <a:ext cx="91440" cy="3200400"/>
+          </a:xfrm>
+          <a:prstGeom prst="rect">
+            <a:avLst/>
+          </a:prstGeom>
+          <a:solidFill>
+            <a:srgbClr val="2A9D8F"/>
+          </a:solidFill>
+          <a:ln/>
+        </p:spPr>
+      </p:sp>
+      <p:sp>
+        <p:nvSpPr>
+          <p:cNvPr id="6" name="Text 4"/>
+          <p:cNvSpPr/>
+          <p:nvPr/>
+        </p:nvSpPr>
+        <p:spPr>
+          <a:xfrm>
+            <a:off x="1828800" y="1097280"/>
+            <a:ext cx="5669280" cy="640080"/>
+          </a:xfrm>
+          <a:prstGeom prst="rect">
+            <a:avLst/>
+          </a:prstGeom>
+          <a:noFill/>
+          <a:ln/>
+        </p:spPr>
+        <p:txBody>
+          <a:bodyPr wrap="square" rtlCol="0" anchor="ctr"/>
           <a:lstStyle/>
           <a:p>
             <a:pPr indent="0" marL="0">
               <a:buNone/>
             </a:pPr>
             <a:r>
-              <a:rPr lang="en-US" sz="2600" b="1" dirty="0">
+              <a:rPr lang="en-US" sz="2400" b="1" dirty="0">
                 <a:solidFill>
                   <a:srgbClr val="1B2A4A"/>
                 </a:solidFill>
@@ -1364,22 +1566,22 @@
                 <a:ea typeface="Georgia" pitchFamily="34" charset="-122"/>
                 <a:cs typeface="Georgia" pitchFamily="34" charset="-120"/>
               </a:rPr>
-              <a:t>Earthquakes</a:t>
-            </a:r>
-            <a:endParaRPr lang="en-US" sz="2600" dirty="0"/>
-          </a:p>
-        </p:txBody>
-      </p:sp>
-      <p:sp>
-        <p:nvSpPr>
-          <p:cNvPr id="4" name="Text 2"/>
-          <p:cNvSpPr/>
-          <p:nvPr/>
-        </p:nvSpPr>
-        <p:spPr>
-          <a:xfrm>
-            <a:off x="548640" y="1097280"/>
-            <a:ext cx="8046720" cy="3474720"/>
+              <a:t>Why Do Earthquakes and Volcanoes Happen?</a:t>
+            </a:r>
+            <a:endParaRPr lang="en-US" sz="2400" dirty="0"/>
+          </a:p>
+        </p:txBody>
+      </p:sp>
+      <p:sp>
+        <p:nvSpPr>
+          <p:cNvPr id="7" name="Text 5"/>
+          <p:cNvSpPr/>
+          <p:nvPr/>
+        </p:nvSpPr>
+        <p:spPr>
+          <a:xfrm>
+            <a:off x="1828800" y="1828800"/>
+            <a:ext cx="5669280" cy="2011680"/>
           </a:xfrm>
           <a:prstGeom prst="rect">
             <a:avLst/>
@@ -1391,12 +1593,11 @@
           <a:bodyPr wrap="square" rtlCol="0" anchor="t"/>
           <a:lstStyle/>
           <a:p>
-            <a:pPr marL="342900" indent="-342900">
-              <a:spcAft>
-                <a:spcPts val="800"/>
-              </a:spcAft>
-              <a:buSzPct val="100000"/>
-              <a:buChar char="•"/>
+            <a:pPr indent="0" marL="0">
+              <a:lnSpc>
+                <a:spcPct val="130000"/>
+              </a:lnSpc>
+              <a:buNone/>
             </a:pPr>
             <a:r>
               <a:rPr lang="en-US" sz="1500" dirty="0">
@@ -1407,150 +1608,9 @@
                 <a:ea typeface="Calibri" pitchFamily="34" charset="-122"/>
                 <a:cs typeface="Calibri" pitchFamily="34" charset="-120"/>
               </a:rPr>
-              <a:t>Caused by sudden release of energy when plates move</a:t>
+              <a:t>Both are caused by tectonic plate movement. Earthquakes occur when plates get stuck then suddenly release energy. Volcanoes occur where magma from the mantle reaches the surface. Most occur at plate boundaries, especially around the Ring of Fire.</a:t>
             </a:r>
             <a:endParaRPr lang="en-US" sz="1500" dirty="0"/>
-          </a:p>
-          <a:p>
-            <a:pPr marL="342900" indent="-342900">
-              <a:spcAft>
-                <a:spcPts val="800"/>
-              </a:spcAft>
-              <a:buSzPct val="100000"/>
-              <a:buChar char="•"/>
-            </a:pPr>
-            <a:r>
-              <a:rPr lang="en-US" sz="1500" dirty="0">
-                <a:solidFill>
-                  <a:srgbClr val="3D3A36"/>
-                </a:solidFill>
-                <a:latin typeface="Calibri" pitchFamily="34" charset="0"/>
-                <a:ea typeface="Calibri" pitchFamily="34" charset="-122"/>
-                <a:cs typeface="Calibri" pitchFamily="34" charset="-120"/>
-              </a:rPr>
-              <a:t>Energy travels as seismic waves through the Earth</a:t>
-            </a:r>
-            <a:endParaRPr lang="en-US" sz="1500" dirty="0"/>
-          </a:p>
-          <a:p>
-            <a:pPr marL="342900" indent="-342900">
-              <a:spcAft>
-                <a:spcPts val="800"/>
-              </a:spcAft>
-              <a:buSzPct val="100000"/>
-              <a:buChar char="•"/>
-            </a:pPr>
-            <a:r>
-              <a:rPr lang="en-US" sz="1500" dirty="0">
-                <a:solidFill>
-                  <a:srgbClr val="3D3A36"/>
-                </a:solidFill>
-                <a:latin typeface="Calibri" pitchFamily="34" charset="0"/>
-                <a:ea typeface="Calibri" pitchFamily="34" charset="-122"/>
-                <a:cs typeface="Calibri" pitchFamily="34" charset="-120"/>
-              </a:rPr>
-              <a:t>Epicentre: point on the surface directly above the earthquake</a:t>
-            </a:r>
-            <a:endParaRPr lang="en-US" sz="1500" dirty="0"/>
-          </a:p>
-          <a:p>
-            <a:pPr marL="342900" indent="-342900">
-              <a:spcAft>
-                <a:spcPts val="800"/>
-              </a:spcAft>
-              <a:buSzPct val="100000"/>
-              <a:buChar char="•"/>
-            </a:pPr>
-            <a:r>
-              <a:rPr lang="en-US" sz="1500" dirty="0">
-                <a:solidFill>
-                  <a:srgbClr val="3D3A36"/>
-                </a:solidFill>
-                <a:latin typeface="Calibri" pitchFamily="34" charset="0"/>
-                <a:ea typeface="Calibri" pitchFamily="34" charset="-122"/>
-                <a:cs typeface="Calibri" pitchFamily="34" charset="-120"/>
-              </a:rPr>
-              <a:t>Focus: the point underground where the earthquake starts</a:t>
-            </a:r>
-            <a:endParaRPr lang="en-US" sz="1500" dirty="0"/>
-          </a:p>
-          <a:p>
-            <a:pPr marL="342900" indent="-342900">
-              <a:spcAft>
-                <a:spcPts val="800"/>
-              </a:spcAft>
-              <a:buSzPct val="100000"/>
-              <a:buChar char="•"/>
-            </a:pPr>
-            <a:r>
-              <a:rPr lang="en-US" sz="1500" dirty="0">
-                <a:solidFill>
-                  <a:srgbClr val="3D3A36"/>
-                </a:solidFill>
-                <a:latin typeface="Calibri" pitchFamily="34" charset="0"/>
-                <a:ea typeface="Calibri" pitchFamily="34" charset="-122"/>
-                <a:cs typeface="Calibri" pitchFamily="34" charset="-120"/>
-              </a:rPr>
-              <a:t>Measured on the Richter scale (1–10)</a:t>
-            </a:r>
-            <a:endParaRPr lang="en-US" sz="1500" dirty="0"/>
-          </a:p>
-          <a:p>
-            <a:pPr marL="342900" indent="-342900">
-              <a:spcAft>
-                <a:spcPts val="800"/>
-              </a:spcAft>
-              <a:buSzPct val="100000"/>
-              <a:buChar char="•"/>
-            </a:pPr>
-            <a:r>
-              <a:rPr lang="en-US" sz="1500" dirty="0">
-                <a:solidFill>
-                  <a:srgbClr val="3D3A36"/>
-                </a:solidFill>
-                <a:latin typeface="Calibri" pitchFamily="34" charset="0"/>
-                <a:ea typeface="Calibri" pitchFamily="34" charset="-122"/>
-                <a:cs typeface="Calibri" pitchFamily="34" charset="-120"/>
-              </a:rPr>
-              <a:t>Most happen at plate boundaries, especially transform and convergent</a:t>
-            </a:r>
-            <a:endParaRPr lang="en-US" sz="1500" dirty="0"/>
-          </a:p>
-        </p:txBody>
-      </p:sp>
-      <p:sp>
-        <p:nvSpPr>
-          <p:cNvPr id="5" name="Text 3"/>
-          <p:cNvSpPr/>
-          <p:nvPr/>
-        </p:nvSpPr>
-        <p:spPr>
-          <a:xfrm>
-            <a:off x="548640" y="4800600"/>
-            <a:ext cx="3657600" cy="274320"/>
-          </a:xfrm>
-          <a:prstGeom prst="rect">
-            <a:avLst/>
-          </a:prstGeom>
-          <a:noFill/>
-          <a:ln/>
-        </p:spPr>
-        <p:txBody>
-          <a:bodyPr wrap="square" rtlCol="0" anchor="ctr"/>
-          <a:lstStyle/>
-          <a:p>
-            <a:pPr indent="0" marL="0">
-              <a:buNone/>
-            </a:pPr>
-            <a:r>
-              <a:rPr lang="en-US" sz="800" dirty="0">
-                <a:solidFill>
-                  <a:srgbClr val="9B9690"/>
-                </a:solidFill>
-              </a:rPr>
-              <a:t>mrzocchi.com</a:t>
-            </a:r>
-            <a:endParaRPr lang="en-US" sz="800" dirty="0"/>
           </a:p>
         </p:txBody>
       </p:sp>
@@ -1568,7 +1628,7 @@
     <p:bg>
       <p:bgPr>
         <a:solidFill>
-          <a:srgbClr val="FFFFFF"/>
+          <a:srgbClr val="FAF8F5"/>
         </a:solidFill>
       </p:bgPr>
     </p:bg>
@@ -1614,8 +1674,8 @@
         </p:nvSpPr>
         <p:spPr>
           <a:xfrm>
-            <a:off x="548640" y="274320"/>
-            <a:ext cx="8046720" cy="640080"/>
+            <a:off x="7772400" y="4709160"/>
+            <a:ext cx="1097280" cy="320040"/>
           </a:xfrm>
           <a:prstGeom prst="rect">
             <a:avLst/>
@@ -1624,7 +1684,46 @@
           <a:ln/>
         </p:spPr>
         <p:txBody>
-          <a:bodyPr wrap="square" lIns="0" tIns="0" rIns="0" bIns="0" rtlCol="0" anchor="ctr"/>
+          <a:bodyPr wrap="square" rtlCol="0" anchor="ctr"/>
+          <a:lstStyle/>
+          <a:p>
+            <a:pPr algn="r" indent="0" marL="0">
+              <a:buNone/>
+            </a:pPr>
+            <a:r>
+              <a:rPr lang="en-US" sz="900" dirty="0">
+                <a:solidFill>
+                  <a:srgbClr val="6B6660"/>
+                </a:solidFill>
+                <a:latin typeface="Calibri" pitchFamily="34" charset="0"/>
+                <a:ea typeface="Calibri" pitchFamily="34" charset="-122"/>
+                <a:cs typeface="Calibri" pitchFamily="34" charset="-120"/>
+              </a:rPr>
+              <a:t>3 / 5</a:t>
+            </a:r>
+            <a:endParaRPr lang="en-US" sz="900" dirty="0"/>
+          </a:p>
+        </p:txBody>
+      </p:sp>
+      <p:sp>
+        <p:nvSpPr>
+          <p:cNvPr id="4" name="Text 2"/>
+          <p:cNvSpPr/>
+          <p:nvPr/>
+        </p:nvSpPr>
+        <p:spPr>
+          <a:xfrm>
+            <a:off x="457200" y="274320"/>
+            <a:ext cx="8229600" cy="640080"/>
+          </a:xfrm>
+          <a:prstGeom prst="rect">
+            <a:avLst/>
+          </a:prstGeom>
+          <a:noFill/>
+          <a:ln/>
+        </p:spPr>
+        <p:txBody>
+          <a:bodyPr wrap="square" rtlCol="0" anchor="ctr"/>
           <a:lstStyle/>
           <a:p>
             <a:pPr indent="0" marL="0">
@@ -1639,7 +1738,7 @@
                 <a:ea typeface="Georgia" pitchFamily="34" charset="-122"/>
                 <a:cs typeface="Georgia" pitchFamily="34" charset="-120"/>
               </a:rPr>
-              <a:t>Volcanoes</a:t>
+              <a:t>Earthquakes</a:t>
             </a:r>
             <a:endParaRPr lang="en-US" sz="2600" dirty="0"/>
           </a:p>
@@ -1647,14 +1746,66 @@
       </p:sp>
       <p:sp>
         <p:nvSpPr>
-          <p:cNvPr id="4" name="Text 2"/>
-          <p:cNvSpPr/>
-          <p:nvPr/>
-        </p:nvSpPr>
-        <p:spPr>
-          <a:xfrm>
-            <a:off x="548640" y="1097280"/>
-            <a:ext cx="8046720" cy="3474720"/>
+          <p:cNvPr id="5" name="Shape 3"/>
+          <p:cNvSpPr/>
+          <p:nvPr/>
+        </p:nvSpPr>
+        <p:spPr>
+          <a:xfrm>
+            <a:off x="457200" y="1188720"/>
+            <a:ext cx="2560320" cy="1828800"/>
+          </a:xfrm>
+          <a:prstGeom prst="rect">
+            <a:avLst/>
+          </a:prstGeom>
+          <a:solidFill>
+            <a:srgbClr val="FFFFFF"/>
+          </a:solidFill>
+          <a:ln w="12700">
+            <a:solidFill>
+              <a:srgbClr val="E5E2DC"/>
+            </a:solidFill>
+            <a:prstDash val="solid"/>
+          </a:ln>
+          <a:effectLst>
+            <a:outerShdw sx="100000" sy="100000" kx="0" ky="0" algn="bl" rotWithShape="0" blurRad="50800" dist="25400" dir="8100000">
+              <a:srgbClr val="000000">
+                <a:alpha val="10000"/>
+              </a:srgbClr>
+            </a:outerShdw>
+          </a:effectLst>
+        </p:spPr>
+      </p:sp>
+      <p:sp>
+        <p:nvSpPr>
+          <p:cNvPr id="6" name="Shape 4"/>
+          <p:cNvSpPr/>
+          <p:nvPr/>
+        </p:nvSpPr>
+        <p:spPr>
+          <a:xfrm>
+            <a:off x="457200" y="1188720"/>
+            <a:ext cx="2560320" cy="54864"/>
+          </a:xfrm>
+          <a:prstGeom prst="rect">
+            <a:avLst/>
+          </a:prstGeom>
+          <a:solidFill>
+            <a:srgbClr val="2A9D8F"/>
+          </a:solidFill>
+          <a:ln/>
+        </p:spPr>
+      </p:sp>
+      <p:sp>
+        <p:nvSpPr>
+          <p:cNvPr id="7" name="Text 5"/>
+          <p:cNvSpPr/>
+          <p:nvPr/>
+        </p:nvSpPr>
+        <p:spPr>
+          <a:xfrm>
+            <a:off x="594360" y="1325880"/>
+            <a:ext cx="2286000" cy="365760"/>
           </a:xfrm>
           <a:prstGeom prst="rect">
             <a:avLst/>
@@ -1663,18 +1814,53 @@
           <a:ln/>
         </p:spPr>
         <p:txBody>
+          <a:bodyPr wrap="square" rtlCol="0" anchor="ctr"/>
+          <a:lstStyle/>
+          <a:p>
+            <a:pPr indent="0" marL="0">
+              <a:buNone/>
+            </a:pPr>
+            <a:r>
+              <a:rPr lang="en-US" sz="1400" b="1" dirty="0">
+                <a:solidFill>
+                  <a:srgbClr val="1B2A4A"/>
+                </a:solidFill>
+                <a:latin typeface="Calibri" pitchFamily="34" charset="0"/>
+                <a:ea typeface="Calibri" pitchFamily="34" charset="-122"/>
+                <a:cs typeface="Calibri" pitchFamily="34" charset="-120"/>
+              </a:rPr>
+              <a:t>How They Happen</a:t>
+            </a:r>
+            <a:endParaRPr lang="en-US" sz="1400" dirty="0"/>
+          </a:p>
+        </p:txBody>
+      </p:sp>
+      <p:sp>
+        <p:nvSpPr>
+          <p:cNvPr id="8" name="Text 6"/>
+          <p:cNvSpPr/>
+          <p:nvPr/>
+        </p:nvSpPr>
+        <p:spPr>
+          <a:xfrm>
+            <a:off x="594360" y="1737360"/>
+            <a:ext cx="2286000" cy="1097280"/>
+          </a:xfrm>
+          <a:prstGeom prst="rect">
+            <a:avLst/>
+          </a:prstGeom>
+          <a:noFill/>
+          <a:ln/>
+        </p:spPr>
+        <p:txBody>
           <a:bodyPr wrap="square" rtlCol="0" anchor="t"/>
           <a:lstStyle/>
           <a:p>
-            <a:pPr marL="342900" indent="-342900">
-              <a:spcAft>
-                <a:spcPts val="800"/>
-              </a:spcAft>
-              <a:buSzPct val="100000"/>
-              <a:buChar char="•"/>
+            <a:pPr indent="0" marL="0">
+              <a:buNone/>
             </a:pPr>
             <a:r>
-              <a:rPr lang="en-US" sz="1500" dirty="0">
+              <a:rPr lang="en-US" sz="1100" dirty="0">
                 <a:solidFill>
                   <a:srgbClr val="3D3A36"/>
                 </a:solidFill>
@@ -1682,20 +1868,129 @@
                 <a:ea typeface="Calibri" pitchFamily="34" charset="-122"/>
                 <a:cs typeface="Calibri" pitchFamily="34" charset="-120"/>
               </a:rPr>
-              <a:t>Openings in the crust where magma escapes to the surface</a:t>
-            </a:r>
-            <a:endParaRPr lang="en-US" sz="1500" dirty="0"/>
-          </a:p>
-          <a:p>
-            <a:pPr marL="342900" indent="-342900">
-              <a:spcAft>
-                <a:spcPts val="800"/>
-              </a:spcAft>
-              <a:buSzPct val="100000"/>
-              <a:buChar char="•"/>
+              <a:t>Plates moving create friction. Pressure builds up. When plates suddenly slip, energy is released as seismic waves. The focus is where it starts underground; the epicentre is directly above on the surface.</a:t>
+            </a:r>
+            <a:endParaRPr lang="en-US" sz="1100" dirty="0"/>
+          </a:p>
+        </p:txBody>
+      </p:sp>
+      <p:sp>
+        <p:nvSpPr>
+          <p:cNvPr id="9" name="Shape 7"/>
+          <p:cNvSpPr/>
+          <p:nvPr/>
+        </p:nvSpPr>
+        <p:spPr>
+          <a:xfrm>
+            <a:off x="3291840" y="1188720"/>
+            <a:ext cx="2560320" cy="1828800"/>
+          </a:xfrm>
+          <a:prstGeom prst="rect">
+            <a:avLst/>
+          </a:prstGeom>
+          <a:solidFill>
+            <a:srgbClr val="FFFFFF"/>
+          </a:solidFill>
+          <a:ln w="12700">
+            <a:solidFill>
+              <a:srgbClr val="E5E2DC"/>
+            </a:solidFill>
+            <a:prstDash val="solid"/>
+          </a:ln>
+          <a:effectLst>
+            <a:outerShdw sx="100000" sy="100000" kx="0" ky="0" algn="bl" rotWithShape="0" blurRad="50800" dist="25400" dir="8100000">
+              <a:srgbClr val="000000">
+                <a:alpha val="10000"/>
+              </a:srgbClr>
+            </a:outerShdw>
+          </a:effectLst>
+        </p:spPr>
+      </p:sp>
+      <p:sp>
+        <p:nvSpPr>
+          <p:cNvPr id="10" name="Shape 8"/>
+          <p:cNvSpPr/>
+          <p:nvPr/>
+        </p:nvSpPr>
+        <p:spPr>
+          <a:xfrm>
+            <a:off x="3291840" y="1188720"/>
+            <a:ext cx="2560320" cy="54864"/>
+          </a:xfrm>
+          <a:prstGeom prst="rect">
+            <a:avLst/>
+          </a:prstGeom>
+          <a:solidFill>
+            <a:srgbClr val="2A9D8F"/>
+          </a:solidFill>
+          <a:ln/>
+        </p:spPr>
+      </p:sp>
+      <p:sp>
+        <p:nvSpPr>
+          <p:cNvPr id="11" name="Text 9"/>
+          <p:cNvSpPr/>
+          <p:nvPr/>
+        </p:nvSpPr>
+        <p:spPr>
+          <a:xfrm>
+            <a:off x="3429000" y="1325880"/>
+            <a:ext cx="2286000" cy="365760"/>
+          </a:xfrm>
+          <a:prstGeom prst="rect">
+            <a:avLst/>
+          </a:prstGeom>
+          <a:noFill/>
+          <a:ln/>
+        </p:spPr>
+        <p:txBody>
+          <a:bodyPr wrap="square" rtlCol="0" anchor="ctr"/>
+          <a:lstStyle/>
+          <a:p>
+            <a:pPr indent="0" marL="0">
+              <a:buNone/>
             </a:pPr>
             <a:r>
-              <a:rPr lang="en-US" sz="1500" dirty="0">
+              <a:rPr lang="en-US" sz="1400" b="1" dirty="0">
+                <a:solidFill>
+                  <a:srgbClr val="1B2A4A"/>
+                </a:solidFill>
+                <a:latin typeface="Calibri" pitchFamily="34" charset="0"/>
+                <a:ea typeface="Calibri" pitchFamily="34" charset="-122"/>
+                <a:cs typeface="Calibri" pitchFamily="34" charset="-120"/>
+              </a:rPr>
+              <a:t>Measuring Earthquakes</a:t>
+            </a:r>
+            <a:endParaRPr lang="en-US" sz="1400" dirty="0"/>
+          </a:p>
+        </p:txBody>
+      </p:sp>
+      <p:sp>
+        <p:nvSpPr>
+          <p:cNvPr id="12" name="Text 10"/>
+          <p:cNvSpPr/>
+          <p:nvPr/>
+        </p:nvSpPr>
+        <p:spPr>
+          <a:xfrm>
+            <a:off x="3429000" y="1737360"/>
+            <a:ext cx="2286000" cy="1097280"/>
+          </a:xfrm>
+          <a:prstGeom prst="rect">
+            <a:avLst/>
+          </a:prstGeom>
+          <a:noFill/>
+          <a:ln/>
+        </p:spPr>
+        <p:txBody>
+          <a:bodyPr wrap="square" rtlCol="0" anchor="t"/>
+          <a:lstStyle/>
+          <a:p>
+            <a:pPr indent="0" marL="0">
+              <a:buNone/>
+            </a:pPr>
+            <a:r>
+              <a:rPr lang="en-US" sz="1100" dirty="0">
                 <a:solidFill>
                   <a:srgbClr val="3D3A36"/>
                 </a:solidFill>
@@ -1703,20 +1998,129 @@
                 <a:ea typeface="Calibri" pitchFamily="34" charset="-122"/>
                 <a:cs typeface="Calibri" pitchFamily="34" charset="-120"/>
               </a:rPr>
-              <a:t>Form at convergent boundaries (subduction) and divergent boundaries</a:t>
-            </a:r>
-            <a:endParaRPr lang="en-US" sz="1500" dirty="0"/>
-          </a:p>
-          <a:p>
-            <a:pPr marL="342900" indent="-342900">
-              <a:spcAft>
-                <a:spcPts val="800"/>
-              </a:spcAft>
-              <a:buSzPct val="100000"/>
-              <a:buChar char="•"/>
+              <a:t>The Richter Scale measures magnitude (energy released). Each whole number is ~30× more energy. The Mercalli Scale measures intensity (damage caused). Seismographs detect seismic waves.</a:t>
+            </a:r>
+            <a:endParaRPr lang="en-US" sz="1100" dirty="0"/>
+          </a:p>
+        </p:txBody>
+      </p:sp>
+      <p:sp>
+        <p:nvSpPr>
+          <p:cNvPr id="13" name="Shape 11"/>
+          <p:cNvSpPr/>
+          <p:nvPr/>
+        </p:nvSpPr>
+        <p:spPr>
+          <a:xfrm>
+            <a:off x="6126480" y="1188720"/>
+            <a:ext cx="2560320" cy="1828800"/>
+          </a:xfrm>
+          <a:prstGeom prst="rect">
+            <a:avLst/>
+          </a:prstGeom>
+          <a:solidFill>
+            <a:srgbClr val="FFFFFF"/>
+          </a:solidFill>
+          <a:ln w="12700">
+            <a:solidFill>
+              <a:srgbClr val="E5E2DC"/>
+            </a:solidFill>
+            <a:prstDash val="solid"/>
+          </a:ln>
+          <a:effectLst>
+            <a:outerShdw sx="100000" sy="100000" kx="0" ky="0" algn="bl" rotWithShape="0" blurRad="50800" dist="25400" dir="8100000">
+              <a:srgbClr val="000000">
+                <a:alpha val="10000"/>
+              </a:srgbClr>
+            </a:outerShdw>
+          </a:effectLst>
+        </p:spPr>
+      </p:sp>
+      <p:sp>
+        <p:nvSpPr>
+          <p:cNvPr id="14" name="Shape 12"/>
+          <p:cNvSpPr/>
+          <p:nvPr/>
+        </p:nvSpPr>
+        <p:spPr>
+          <a:xfrm>
+            <a:off x="6126480" y="1188720"/>
+            <a:ext cx="2560320" cy="54864"/>
+          </a:xfrm>
+          <a:prstGeom prst="rect">
+            <a:avLst/>
+          </a:prstGeom>
+          <a:solidFill>
+            <a:srgbClr val="2A9D8F"/>
+          </a:solidFill>
+          <a:ln/>
+        </p:spPr>
+      </p:sp>
+      <p:sp>
+        <p:nvSpPr>
+          <p:cNvPr id="15" name="Text 13"/>
+          <p:cNvSpPr/>
+          <p:nvPr/>
+        </p:nvSpPr>
+        <p:spPr>
+          <a:xfrm>
+            <a:off x="6263640" y="1325880"/>
+            <a:ext cx="2286000" cy="365760"/>
+          </a:xfrm>
+          <a:prstGeom prst="rect">
+            <a:avLst/>
+          </a:prstGeom>
+          <a:noFill/>
+          <a:ln/>
+        </p:spPr>
+        <p:txBody>
+          <a:bodyPr wrap="square" rtlCol="0" anchor="ctr"/>
+          <a:lstStyle/>
+          <a:p>
+            <a:pPr indent="0" marL="0">
+              <a:buNone/>
             </a:pPr>
             <a:r>
-              <a:rPr lang="en-US" sz="1500" dirty="0">
+              <a:rPr lang="en-US" sz="1400" b="1" dirty="0">
+                <a:solidFill>
+                  <a:srgbClr val="1B2A4A"/>
+                </a:solidFill>
+                <a:latin typeface="Calibri" pitchFamily="34" charset="0"/>
+                <a:ea typeface="Calibri" pitchFamily="34" charset="-122"/>
+                <a:cs typeface="Calibri" pitchFamily="34" charset="-120"/>
+              </a:rPr>
+              <a:t>Effects</a:t>
+            </a:r>
+            <a:endParaRPr lang="en-US" sz="1400" dirty="0"/>
+          </a:p>
+        </p:txBody>
+      </p:sp>
+      <p:sp>
+        <p:nvSpPr>
+          <p:cNvPr id="16" name="Text 14"/>
+          <p:cNvSpPr/>
+          <p:nvPr/>
+        </p:nvSpPr>
+        <p:spPr>
+          <a:xfrm>
+            <a:off x="6263640" y="1737360"/>
+            <a:ext cx="2286000" cy="1097280"/>
+          </a:xfrm>
+          <a:prstGeom prst="rect">
+            <a:avLst/>
+          </a:prstGeom>
+          <a:noFill/>
+          <a:ln/>
+        </p:spPr>
+        <p:txBody>
+          <a:bodyPr wrap="square" rtlCol="0" anchor="t"/>
+          <a:lstStyle/>
+          <a:p>
+            <a:pPr indent="0" marL="0">
+              <a:buNone/>
+            </a:pPr>
+            <a:r>
+              <a:rPr lang="en-US" sz="1100" dirty="0">
                 <a:solidFill>
                   <a:srgbClr val="3D3A36"/>
                 </a:solidFill>
@@ -1724,108 +2128,9 @@
                 <a:ea typeface="Calibri" pitchFamily="34" charset="-122"/>
                 <a:cs typeface="Calibri" pitchFamily="34" charset="-120"/>
               </a:rPr>
-              <a:t>Magma becomes lava when it reaches the surface</a:t>
-            </a:r>
-            <a:endParaRPr lang="en-US" sz="1500" dirty="0"/>
-          </a:p>
-          <a:p>
-            <a:pPr marL="342900" indent="-342900">
-              <a:spcAft>
-                <a:spcPts val="800"/>
-              </a:spcAft>
-              <a:buSzPct val="100000"/>
-              <a:buChar char="•"/>
-            </a:pPr>
-            <a:r>
-              <a:rPr lang="en-US" sz="1500" dirty="0">
-                <a:solidFill>
-                  <a:srgbClr val="3D3A36"/>
-                </a:solidFill>
-                <a:latin typeface="Calibri" pitchFamily="34" charset="0"/>
-                <a:ea typeface="Calibri" pitchFamily="34" charset="-122"/>
-                <a:cs typeface="Calibri" pitchFamily="34" charset="-120"/>
-              </a:rPr>
-              <a:t>Ring of Fire: 75% of world's volcanoes circle the Pacific Ocean</a:t>
-            </a:r>
-            <a:endParaRPr lang="en-US" sz="1500" dirty="0"/>
-          </a:p>
-          <a:p>
-            <a:pPr marL="342900" indent="-342900">
-              <a:spcAft>
-                <a:spcPts val="800"/>
-              </a:spcAft>
-              <a:buSzPct val="100000"/>
-              <a:buChar char="•"/>
-            </a:pPr>
-            <a:r>
-              <a:rPr lang="en-US" sz="1500" dirty="0">
-                <a:solidFill>
-                  <a:srgbClr val="3D3A36"/>
-                </a:solidFill>
-                <a:latin typeface="Calibri" pitchFamily="34" charset="0"/>
-                <a:ea typeface="Calibri" pitchFamily="34" charset="-122"/>
-                <a:cs typeface="Calibri" pitchFamily="34" charset="-120"/>
-              </a:rPr>
-              <a:t>Shield volcanoes: gentle slopes, runny lava, less explosive</a:t>
-            </a:r>
-            <a:endParaRPr lang="en-US" sz="1500" dirty="0"/>
-          </a:p>
-          <a:p>
-            <a:pPr marL="342900" indent="-342900">
-              <a:spcAft>
-                <a:spcPts val="800"/>
-              </a:spcAft>
-              <a:buSzPct val="100000"/>
-              <a:buChar char="•"/>
-            </a:pPr>
-            <a:r>
-              <a:rPr lang="en-US" sz="1500" dirty="0">
-                <a:solidFill>
-                  <a:srgbClr val="3D3A36"/>
-                </a:solidFill>
-                <a:latin typeface="Calibri" pitchFamily="34" charset="0"/>
-                <a:ea typeface="Calibri" pitchFamily="34" charset="-122"/>
-                <a:cs typeface="Calibri" pitchFamily="34" charset="-120"/>
-              </a:rPr>
-              <a:t>Composite volcanoes: steep sides, thick lava, very explosive</a:t>
-            </a:r>
-            <a:endParaRPr lang="en-US" sz="1500" dirty="0"/>
-          </a:p>
-        </p:txBody>
-      </p:sp>
-      <p:sp>
-        <p:nvSpPr>
-          <p:cNvPr id="5" name="Text 3"/>
-          <p:cNvSpPr/>
-          <p:nvPr/>
-        </p:nvSpPr>
-        <p:spPr>
-          <a:xfrm>
-            <a:off x="548640" y="4800600"/>
-            <a:ext cx="3657600" cy="274320"/>
-          </a:xfrm>
-          <a:prstGeom prst="rect">
-            <a:avLst/>
-          </a:prstGeom>
-          <a:noFill/>
-          <a:ln/>
-        </p:spPr>
-        <p:txBody>
-          <a:bodyPr wrap="square" rtlCol="0" anchor="ctr"/>
-          <a:lstStyle/>
-          <a:p>
-            <a:pPr indent="0" marL="0">
-              <a:buNone/>
-            </a:pPr>
-            <a:r>
-              <a:rPr lang="en-US" sz="800" dirty="0">
-                <a:solidFill>
-                  <a:srgbClr val="9B9690"/>
-                </a:solidFill>
-              </a:rPr>
-              <a:t>mrzocchi.com</a:t>
-            </a:r>
-            <a:endParaRPr lang="en-US" sz="800" dirty="0"/>
+              <a:t>Shaking, building collapse, landslides, tsunamis, fires from broken gas pipes. More damage in poorer countries (weaker buildings). Aftershocks can follow for days or weeks.</a:t>
+            </a:r>
+            <a:endParaRPr lang="en-US" sz="1100" dirty="0"/>
           </a:p>
         </p:txBody>
       </p:sp>
@@ -1840,6 +2145,526 @@
 <file path=ppt/slides/slide4.xml><?xml version="1.0" encoding="utf-8"?>
 <p:sld xmlns:a="http://schemas.openxmlformats.org/drawingml/2006/main" xmlns:r="http://schemas.openxmlformats.org/officeDocument/2006/relationships" xmlns:p="http://schemas.openxmlformats.org/presentationml/2006/main">
   <p:cSld name="Slide 4">
+    <p:bg>
+      <p:bgPr>
+        <a:solidFill>
+          <a:srgbClr val="FAF8F5"/>
+        </a:solidFill>
+      </p:bgPr>
+    </p:bg>
+    <p:spTree>
+      <p:nvGrpSpPr>
+        <p:cNvPr id="1" name=""/>
+        <p:cNvGrpSpPr/>
+        <p:nvPr/>
+      </p:nvGrpSpPr>
+      <p:grpSpPr>
+        <a:xfrm>
+          <a:off x="0" y="0"/>
+          <a:ext cx="0" cy="0"/>
+          <a:chOff x="0" y="0"/>
+          <a:chExt cx="0" cy="0"/>
+        </a:xfrm>
+      </p:grpSpPr>
+      <p:sp>
+        <p:nvSpPr>
+          <p:cNvPr id="2" name="Shape 0"/>
+          <p:cNvSpPr/>
+          <p:nvPr/>
+        </p:nvSpPr>
+        <p:spPr>
+          <a:xfrm>
+            <a:off x="0" y="0"/>
+            <a:ext cx="9144000" cy="54864"/>
+          </a:xfrm>
+          <a:prstGeom prst="rect">
+            <a:avLst/>
+          </a:prstGeom>
+          <a:solidFill>
+            <a:srgbClr val="2A9D8F"/>
+          </a:solidFill>
+          <a:ln/>
+        </p:spPr>
+      </p:sp>
+      <p:sp>
+        <p:nvSpPr>
+          <p:cNvPr id="3" name="Text 1"/>
+          <p:cNvSpPr/>
+          <p:nvPr/>
+        </p:nvSpPr>
+        <p:spPr>
+          <a:xfrm>
+            <a:off x="7772400" y="4709160"/>
+            <a:ext cx="1097280" cy="320040"/>
+          </a:xfrm>
+          <a:prstGeom prst="rect">
+            <a:avLst/>
+          </a:prstGeom>
+          <a:noFill/>
+          <a:ln/>
+        </p:spPr>
+        <p:txBody>
+          <a:bodyPr wrap="square" rtlCol="0" anchor="ctr"/>
+          <a:lstStyle/>
+          <a:p>
+            <a:pPr algn="r" indent="0" marL="0">
+              <a:buNone/>
+            </a:pPr>
+            <a:r>
+              <a:rPr lang="en-US" sz="900" dirty="0">
+                <a:solidFill>
+                  <a:srgbClr val="6B6660"/>
+                </a:solidFill>
+                <a:latin typeface="Calibri" pitchFamily="34" charset="0"/>
+                <a:ea typeface="Calibri" pitchFamily="34" charset="-122"/>
+                <a:cs typeface="Calibri" pitchFamily="34" charset="-120"/>
+              </a:rPr>
+              <a:t>4 / 5</a:t>
+            </a:r>
+            <a:endParaRPr lang="en-US" sz="900" dirty="0"/>
+          </a:p>
+        </p:txBody>
+      </p:sp>
+      <p:sp>
+        <p:nvSpPr>
+          <p:cNvPr id="4" name="Text 2"/>
+          <p:cNvSpPr/>
+          <p:nvPr/>
+        </p:nvSpPr>
+        <p:spPr>
+          <a:xfrm>
+            <a:off x="457200" y="274320"/>
+            <a:ext cx="8229600" cy="640080"/>
+          </a:xfrm>
+          <a:prstGeom prst="rect">
+            <a:avLst/>
+          </a:prstGeom>
+          <a:noFill/>
+          <a:ln/>
+        </p:spPr>
+        <p:txBody>
+          <a:bodyPr wrap="square" rtlCol="0" anchor="ctr"/>
+          <a:lstStyle/>
+          <a:p>
+            <a:pPr indent="0" marL="0">
+              <a:buNone/>
+            </a:pPr>
+            <a:r>
+              <a:rPr lang="en-US" sz="2600" b="1" dirty="0">
+                <a:solidFill>
+                  <a:srgbClr val="1B2A4A"/>
+                </a:solidFill>
+                <a:latin typeface="Georgia" pitchFamily="34" charset="0"/>
+                <a:ea typeface="Georgia" pitchFamily="34" charset="-122"/>
+                <a:cs typeface="Georgia" pitchFamily="34" charset="-120"/>
+              </a:rPr>
+              <a:t>Volcanoes</a:t>
+            </a:r>
+            <a:endParaRPr lang="en-US" sz="2600" dirty="0"/>
+          </a:p>
+        </p:txBody>
+      </p:sp>
+      <p:sp>
+        <p:nvSpPr>
+          <p:cNvPr id="5" name="Shape 3"/>
+          <p:cNvSpPr/>
+          <p:nvPr/>
+        </p:nvSpPr>
+        <p:spPr>
+          <a:xfrm>
+            <a:off x="457200" y="1188720"/>
+            <a:ext cx="2560320" cy="1828800"/>
+          </a:xfrm>
+          <a:prstGeom prst="rect">
+            <a:avLst/>
+          </a:prstGeom>
+          <a:solidFill>
+            <a:srgbClr val="FFFFFF"/>
+          </a:solidFill>
+          <a:ln w="12700">
+            <a:solidFill>
+              <a:srgbClr val="E5E2DC"/>
+            </a:solidFill>
+            <a:prstDash val="solid"/>
+          </a:ln>
+          <a:effectLst>
+            <a:outerShdw sx="100000" sy="100000" kx="0" ky="0" algn="bl" rotWithShape="0" blurRad="50800" dist="25400" dir="8100000">
+              <a:srgbClr val="000000">
+                <a:alpha val="10000"/>
+              </a:srgbClr>
+            </a:outerShdw>
+          </a:effectLst>
+        </p:spPr>
+      </p:sp>
+      <p:sp>
+        <p:nvSpPr>
+          <p:cNvPr id="6" name="Shape 4"/>
+          <p:cNvSpPr/>
+          <p:nvPr/>
+        </p:nvSpPr>
+        <p:spPr>
+          <a:xfrm>
+            <a:off x="457200" y="1188720"/>
+            <a:ext cx="2560320" cy="54864"/>
+          </a:xfrm>
+          <a:prstGeom prst="rect">
+            <a:avLst/>
+          </a:prstGeom>
+          <a:solidFill>
+            <a:srgbClr val="2A9D8F"/>
+          </a:solidFill>
+          <a:ln/>
+        </p:spPr>
+      </p:sp>
+      <p:sp>
+        <p:nvSpPr>
+          <p:cNvPr id="7" name="Text 5"/>
+          <p:cNvSpPr/>
+          <p:nvPr/>
+        </p:nvSpPr>
+        <p:spPr>
+          <a:xfrm>
+            <a:off x="594360" y="1325880"/>
+            <a:ext cx="2286000" cy="365760"/>
+          </a:xfrm>
+          <a:prstGeom prst="rect">
+            <a:avLst/>
+          </a:prstGeom>
+          <a:noFill/>
+          <a:ln/>
+        </p:spPr>
+        <p:txBody>
+          <a:bodyPr wrap="square" rtlCol="0" anchor="ctr"/>
+          <a:lstStyle/>
+          <a:p>
+            <a:pPr indent="0" marL="0">
+              <a:buNone/>
+            </a:pPr>
+            <a:r>
+              <a:rPr lang="en-US" sz="1400" b="1" dirty="0">
+                <a:solidFill>
+                  <a:srgbClr val="1B2A4A"/>
+                </a:solidFill>
+                <a:latin typeface="Calibri" pitchFamily="34" charset="0"/>
+                <a:ea typeface="Calibri" pitchFamily="34" charset="-122"/>
+                <a:cs typeface="Calibri" pitchFamily="34" charset="-120"/>
+              </a:rPr>
+              <a:t>How They Form</a:t>
+            </a:r>
+            <a:endParaRPr lang="en-US" sz="1400" dirty="0"/>
+          </a:p>
+        </p:txBody>
+      </p:sp>
+      <p:sp>
+        <p:nvSpPr>
+          <p:cNvPr id="8" name="Text 6"/>
+          <p:cNvSpPr/>
+          <p:nvPr/>
+        </p:nvSpPr>
+        <p:spPr>
+          <a:xfrm>
+            <a:off x="594360" y="1737360"/>
+            <a:ext cx="2286000" cy="1097280"/>
+          </a:xfrm>
+          <a:prstGeom prst="rect">
+            <a:avLst/>
+          </a:prstGeom>
+          <a:noFill/>
+          <a:ln/>
+        </p:spPr>
+        <p:txBody>
+          <a:bodyPr wrap="square" rtlCol="0" anchor="t"/>
+          <a:lstStyle/>
+          <a:p>
+            <a:pPr indent="0" marL="0">
+              <a:buNone/>
+            </a:pPr>
+            <a:r>
+              <a:rPr lang="en-US" sz="1100" dirty="0">
+                <a:solidFill>
+                  <a:srgbClr val="3D3A36"/>
+                </a:solidFill>
+                <a:latin typeface="Calibri" pitchFamily="34" charset="0"/>
+                <a:ea typeface="Calibri" pitchFamily="34" charset="-122"/>
+                <a:cs typeface="Calibri" pitchFamily="34" charset="-120"/>
+              </a:rPr>
+              <a:t>At convergent boundaries: subducting plate melts → magma rises. At divergent boundaries: magma fills the gap. At hotspots: magma burns through the plate (e.g. Hawaii).</a:t>
+            </a:r>
+            <a:endParaRPr lang="en-US" sz="1100" dirty="0"/>
+          </a:p>
+        </p:txBody>
+      </p:sp>
+      <p:sp>
+        <p:nvSpPr>
+          <p:cNvPr id="9" name="Shape 7"/>
+          <p:cNvSpPr/>
+          <p:nvPr/>
+        </p:nvSpPr>
+        <p:spPr>
+          <a:xfrm>
+            <a:off x="3291840" y="1188720"/>
+            <a:ext cx="2560320" cy="1828800"/>
+          </a:xfrm>
+          <a:prstGeom prst="rect">
+            <a:avLst/>
+          </a:prstGeom>
+          <a:solidFill>
+            <a:srgbClr val="FFFFFF"/>
+          </a:solidFill>
+          <a:ln w="12700">
+            <a:solidFill>
+              <a:srgbClr val="E5E2DC"/>
+            </a:solidFill>
+            <a:prstDash val="solid"/>
+          </a:ln>
+          <a:effectLst>
+            <a:outerShdw sx="100000" sy="100000" kx="0" ky="0" algn="bl" rotWithShape="0" blurRad="50800" dist="25400" dir="8100000">
+              <a:srgbClr val="000000">
+                <a:alpha val="10000"/>
+              </a:srgbClr>
+            </a:outerShdw>
+          </a:effectLst>
+        </p:spPr>
+      </p:sp>
+      <p:sp>
+        <p:nvSpPr>
+          <p:cNvPr id="10" name="Shape 8"/>
+          <p:cNvSpPr/>
+          <p:nvPr/>
+        </p:nvSpPr>
+        <p:spPr>
+          <a:xfrm>
+            <a:off x="3291840" y="1188720"/>
+            <a:ext cx="2560320" cy="54864"/>
+          </a:xfrm>
+          <a:prstGeom prst="rect">
+            <a:avLst/>
+          </a:prstGeom>
+          <a:solidFill>
+            <a:srgbClr val="2A9D8F"/>
+          </a:solidFill>
+          <a:ln/>
+        </p:spPr>
+      </p:sp>
+      <p:sp>
+        <p:nvSpPr>
+          <p:cNvPr id="11" name="Text 9"/>
+          <p:cNvSpPr/>
+          <p:nvPr/>
+        </p:nvSpPr>
+        <p:spPr>
+          <a:xfrm>
+            <a:off x="3429000" y="1325880"/>
+            <a:ext cx="2286000" cy="365760"/>
+          </a:xfrm>
+          <a:prstGeom prst="rect">
+            <a:avLst/>
+          </a:prstGeom>
+          <a:noFill/>
+          <a:ln/>
+        </p:spPr>
+        <p:txBody>
+          <a:bodyPr wrap="square" rtlCol="0" anchor="ctr"/>
+          <a:lstStyle/>
+          <a:p>
+            <a:pPr indent="0" marL="0">
+              <a:buNone/>
+            </a:pPr>
+            <a:r>
+              <a:rPr lang="en-US" sz="1400" b="1" dirty="0">
+                <a:solidFill>
+                  <a:srgbClr val="1B2A4A"/>
+                </a:solidFill>
+                <a:latin typeface="Calibri" pitchFamily="34" charset="0"/>
+                <a:ea typeface="Calibri" pitchFamily="34" charset="-122"/>
+                <a:cs typeface="Calibri" pitchFamily="34" charset="-120"/>
+              </a:rPr>
+              <a:t>Types of Eruption</a:t>
+            </a:r>
+            <a:endParaRPr lang="en-US" sz="1400" dirty="0"/>
+          </a:p>
+        </p:txBody>
+      </p:sp>
+      <p:sp>
+        <p:nvSpPr>
+          <p:cNvPr id="12" name="Text 10"/>
+          <p:cNvSpPr/>
+          <p:nvPr/>
+        </p:nvSpPr>
+        <p:spPr>
+          <a:xfrm>
+            <a:off x="3429000" y="1737360"/>
+            <a:ext cx="2286000" cy="1097280"/>
+          </a:xfrm>
+          <a:prstGeom prst="rect">
+            <a:avLst/>
+          </a:prstGeom>
+          <a:noFill/>
+          <a:ln/>
+        </p:spPr>
+        <p:txBody>
+          <a:bodyPr wrap="square" rtlCol="0" anchor="t"/>
+          <a:lstStyle/>
+          <a:p>
+            <a:pPr indent="0" marL="0">
+              <a:buNone/>
+            </a:pPr>
+            <a:r>
+              <a:rPr lang="en-US" sz="1100" dirty="0">
+                <a:solidFill>
+                  <a:srgbClr val="3D3A36"/>
+                </a:solidFill>
+                <a:latin typeface="Calibri" pitchFamily="34" charset="0"/>
+                <a:ea typeface="Calibri" pitchFamily="34" charset="-122"/>
+                <a:cs typeface="Calibri" pitchFamily="34" charset="-120"/>
+              </a:rPr>
+              <a:t>Explosive: thick, sticky lava. Violent eruptions, ash clouds, pyroclastic flows. Example: Mount St. Helens. Effusive: thin, runny lava. Gentle lava flows. Example: Kilauea, Hawaii.</a:t>
+            </a:r>
+            <a:endParaRPr lang="en-US" sz="1100" dirty="0"/>
+          </a:p>
+        </p:txBody>
+      </p:sp>
+      <p:sp>
+        <p:nvSpPr>
+          <p:cNvPr id="13" name="Shape 11"/>
+          <p:cNvSpPr/>
+          <p:nvPr/>
+        </p:nvSpPr>
+        <p:spPr>
+          <a:xfrm>
+            <a:off x="6126480" y="1188720"/>
+            <a:ext cx="2560320" cy="1828800"/>
+          </a:xfrm>
+          <a:prstGeom prst="rect">
+            <a:avLst/>
+          </a:prstGeom>
+          <a:solidFill>
+            <a:srgbClr val="FFFFFF"/>
+          </a:solidFill>
+          <a:ln w="12700">
+            <a:solidFill>
+              <a:srgbClr val="E5E2DC"/>
+            </a:solidFill>
+            <a:prstDash val="solid"/>
+          </a:ln>
+          <a:effectLst>
+            <a:outerShdw sx="100000" sy="100000" kx="0" ky="0" algn="bl" rotWithShape="0" blurRad="50800" dist="25400" dir="8100000">
+              <a:srgbClr val="000000">
+                <a:alpha val="10000"/>
+              </a:srgbClr>
+            </a:outerShdw>
+          </a:effectLst>
+        </p:spPr>
+      </p:sp>
+      <p:sp>
+        <p:nvSpPr>
+          <p:cNvPr id="14" name="Shape 12"/>
+          <p:cNvSpPr/>
+          <p:nvPr/>
+        </p:nvSpPr>
+        <p:spPr>
+          <a:xfrm>
+            <a:off x="6126480" y="1188720"/>
+            <a:ext cx="2560320" cy="54864"/>
+          </a:xfrm>
+          <a:prstGeom prst="rect">
+            <a:avLst/>
+          </a:prstGeom>
+          <a:solidFill>
+            <a:srgbClr val="2A9D8F"/>
+          </a:solidFill>
+          <a:ln/>
+        </p:spPr>
+      </p:sp>
+      <p:sp>
+        <p:nvSpPr>
+          <p:cNvPr id="15" name="Text 13"/>
+          <p:cNvSpPr/>
+          <p:nvPr/>
+        </p:nvSpPr>
+        <p:spPr>
+          <a:xfrm>
+            <a:off x="6263640" y="1325880"/>
+            <a:ext cx="2286000" cy="365760"/>
+          </a:xfrm>
+          <a:prstGeom prst="rect">
+            <a:avLst/>
+          </a:prstGeom>
+          <a:noFill/>
+          <a:ln/>
+        </p:spPr>
+        <p:txBody>
+          <a:bodyPr wrap="square" rtlCol="0" anchor="ctr"/>
+          <a:lstStyle/>
+          <a:p>
+            <a:pPr indent="0" marL="0">
+              <a:buNone/>
+            </a:pPr>
+            <a:r>
+              <a:rPr lang="en-US" sz="1400" b="1" dirty="0">
+                <a:solidFill>
+                  <a:srgbClr val="1B2A4A"/>
+                </a:solidFill>
+                <a:latin typeface="Calibri" pitchFamily="34" charset="0"/>
+                <a:ea typeface="Calibri" pitchFamily="34" charset="-122"/>
+                <a:cs typeface="Calibri" pitchFamily="34" charset="-120"/>
+              </a:rPr>
+              <a:t>Benefits</a:t>
+            </a:r>
+            <a:endParaRPr lang="en-US" sz="1400" dirty="0"/>
+          </a:p>
+        </p:txBody>
+      </p:sp>
+      <p:sp>
+        <p:nvSpPr>
+          <p:cNvPr id="16" name="Text 14"/>
+          <p:cNvSpPr/>
+          <p:nvPr/>
+        </p:nvSpPr>
+        <p:spPr>
+          <a:xfrm>
+            <a:off x="6263640" y="1737360"/>
+            <a:ext cx="2286000" cy="1097280"/>
+          </a:xfrm>
+          <a:prstGeom prst="rect">
+            <a:avLst/>
+          </a:prstGeom>
+          <a:noFill/>
+          <a:ln/>
+        </p:spPr>
+        <p:txBody>
+          <a:bodyPr wrap="square" rtlCol="0" anchor="t"/>
+          <a:lstStyle/>
+          <a:p>
+            <a:pPr indent="0" marL="0">
+              <a:buNone/>
+            </a:pPr>
+            <a:r>
+              <a:rPr lang="en-US" sz="1100" dirty="0">
+                <a:solidFill>
+                  <a:srgbClr val="3D3A36"/>
+                </a:solidFill>
+                <a:latin typeface="Calibri" pitchFamily="34" charset="0"/>
+                <a:ea typeface="Calibri" pitchFamily="34" charset="-122"/>
+                <a:cs typeface="Calibri" pitchFamily="34" charset="-120"/>
+              </a:rPr>
+              <a:t>Fertile volcanic soil for farming. Geothermal energy. Minerals and gemstones. Tourism. New land formed.</a:t>
+            </a:r>
+            <a:endParaRPr lang="en-US" sz="1100" dirty="0"/>
+          </a:p>
+        </p:txBody>
+      </p:sp>
+    </p:spTree>
+  </p:cSld>
+  <p:clrMapOvr>
+    <a:masterClrMapping/>
+  </p:clrMapOvr>
+</p:sld>
+</file>
+
+<file path=ppt/slides/slide5.xml><?xml version="1.0" encoding="utf-8"?>
+<p:sld xmlns:a="http://schemas.openxmlformats.org/drawingml/2006/main" xmlns:r="http://schemas.openxmlformats.org/officeDocument/2006/relationships" xmlns:p="http://schemas.openxmlformats.org/presentationml/2006/main">
+  <p:cSld name="Slide 5">
     <p:bg>
       <p:bgPr>
         <a:solidFill>
@@ -1870,13 +2695,13 @@
         <p:spPr>
           <a:xfrm>
             <a:off x="0" y="0"/>
-            <a:ext cx="9144000" cy="54864"/>
-          </a:xfrm>
-          <a:prstGeom prst="rect">
-            <a:avLst/>
-          </a:prstGeom>
-          <a:solidFill>
-            <a:srgbClr val="2A9D8F"/>
+            <a:ext cx="109728" cy="5143500"/>
+          </a:xfrm>
+          <a:prstGeom prst="rect">
+            <a:avLst/>
+          </a:prstGeom>
+          <a:solidFill>
+            <a:srgbClr val="E9C46A"/>
           </a:solidFill>
           <a:ln/>
         </p:spPr>
@@ -1889,8 +2714,8 @@
         </p:nvSpPr>
         <p:spPr>
           <a:xfrm>
-            <a:off x="548640" y="457200"/>
-            <a:ext cx="8046720" cy="640080"/>
+            <a:off x="731520" y="457200"/>
+            <a:ext cx="7772400" cy="731520"/>
           </a:xfrm>
           <a:prstGeom prst="rect">
             <a:avLst/>
@@ -1906,7 +2731,7 @@
               <a:buNone/>
             </a:pPr>
             <a:r>
-              <a:rPr lang="en-US" sz="2800" b="1" dirty="0">
+              <a:rPr lang="en-US" sz="3200" b="1" dirty="0">
                 <a:solidFill>
                   <a:srgbClr val="FFFFFF"/>
                 </a:solidFill>
@@ -1916,7 +2741,7 @@
               </a:rPr>
               <a:t>Key Takeaways</a:t>
             </a:r>
-            <a:endParaRPr lang="en-US" sz="2800" dirty="0"/>
+            <a:endParaRPr lang="en-US" sz="3200" dirty="0"/>
           </a:p>
         </p:txBody>
       </p:sp>
@@ -1928,8 +2753,8 @@
         </p:nvSpPr>
         <p:spPr>
           <a:xfrm>
-            <a:off x="731520" y="1371600"/>
-            <a:ext cx="7680960" cy="3200400"/>
+            <a:off x="731520" y="1463040"/>
+            <a:ext cx="7772400" cy="3200400"/>
           </a:xfrm>
           <a:prstGeom prst="rect">
             <a:avLst/>
@@ -1949,7 +2774,7 @@
               <a:buChar char="•"/>
             </a:pPr>
             <a:r>
-              <a:rPr lang="en-US" sz="1600" dirty="0">
+              <a:rPr lang="en-US" sz="1500" dirty="0">
                 <a:solidFill>
                   <a:srgbClr val="CADCFC"/>
                 </a:solidFill>
@@ -1957,9 +2782,9 @@
                 <a:ea typeface="Calibri" pitchFamily="34" charset="-122"/>
                 <a:cs typeface="Calibri" pitchFamily="34" charset="-120"/>
               </a:rPr>
-              <a:t>Earthquakes: sudden energy release at plate boundaries → seismic waves</a:t>
-            </a:r>
-            <a:endParaRPr lang="en-US" sz="1600" dirty="0"/>
+              <a:t>Earthquakes: plates stick → pressure builds → sudden release of seismic waves</a:t>
+            </a:r>
+            <a:endParaRPr lang="en-US" sz="1500" dirty="0"/>
           </a:p>
           <a:p>
             <a:pPr marL="342900" indent="-342900">
@@ -1970,7 +2795,7 @@
               <a:buChar char="•"/>
             </a:pPr>
             <a:r>
-              <a:rPr lang="en-US" sz="1600" dirty="0">
+              <a:rPr lang="en-US" sz="1500" dirty="0">
                 <a:solidFill>
                   <a:srgbClr val="CADCFC"/>
                 </a:solidFill>
@@ -1978,9 +2803,9 @@
                 <a:ea typeface="Calibri" pitchFamily="34" charset="-122"/>
                 <a:cs typeface="Calibri" pitchFamily="34" charset="-120"/>
               </a:rPr>
-              <a:t>Volcanoes: magma escaping through crust at convergent/divergent boundaries</a:t>
-            </a:r>
-            <a:endParaRPr lang="en-US" sz="1600" dirty="0"/>
+              <a:t>Focus = underground origin; epicentre = surface point above</a:t>
+            </a:r>
+            <a:endParaRPr lang="en-US" sz="1500" dirty="0"/>
           </a:p>
           <a:p>
             <a:pPr marL="342900" indent="-342900">
@@ -1991,7 +2816,7 @@
               <a:buChar char="•"/>
             </a:pPr>
             <a:r>
-              <a:rPr lang="en-US" sz="1600" dirty="0">
+              <a:rPr lang="en-US" sz="1500" dirty="0">
                 <a:solidFill>
                   <a:srgbClr val="CADCFC"/>
                 </a:solidFill>
@@ -1999,9 +2824,9 @@
                 <a:ea typeface="Calibri" pitchFamily="34" charset="-122"/>
                 <a:cs typeface="Calibri" pitchFamily="34" charset="-120"/>
               </a:rPr>
-              <a:t>Most earthquakes + volcanoes occur along the Ring of Fire</a:t>
-            </a:r>
-            <a:endParaRPr lang="en-US" sz="1600" dirty="0"/>
+              <a:t>Richter scale: each number = ~30× more energy</a:t>
+            </a:r>
+            <a:endParaRPr lang="en-US" sz="1500" dirty="0"/>
           </a:p>
           <a:p>
             <a:pPr marL="342900" indent="-342900">
@@ -2012,7 +2837,7 @@
               <a:buChar char="•"/>
             </a:pPr>
             <a:r>
-              <a:rPr lang="en-US" sz="1600" dirty="0">
+              <a:rPr lang="en-US" sz="1500" dirty="0">
                 <a:solidFill>
                   <a:srgbClr val="CADCFC"/>
                 </a:solidFill>
@@ -2020,9 +2845,30 @@
                 <a:ea typeface="Calibri" pitchFamily="34" charset="-122"/>
                 <a:cs typeface="Calibri" pitchFamily="34" charset="-120"/>
               </a:rPr>
-              <a:t>Predicting these events is difficult — we can only prepare, not prevent</a:t>
-            </a:r>
-            <a:endParaRPr lang="en-US" sz="1600" dirty="0"/>
+              <a:t>Volcanoes form at convergent, divergent, and hotspot locations</a:t>
+            </a:r>
+            <a:endParaRPr lang="en-US" sz="1500" dirty="0"/>
+          </a:p>
+          <a:p>
+            <a:pPr marL="342900" indent="-342900">
+              <a:spcAft>
+                <a:spcPts val="1000"/>
+              </a:spcAft>
+              <a:buSzPct val="100000"/>
+              <a:buChar char="•"/>
+            </a:pPr>
+            <a:r>
+              <a:rPr lang="en-US" sz="1500" dirty="0">
+                <a:solidFill>
+                  <a:srgbClr val="CADCFC"/>
+                </a:solidFill>
+                <a:latin typeface="Calibri" pitchFamily="34" charset="0"/>
+                <a:ea typeface="Calibri" pitchFamily="34" charset="-122"/>
+                <a:cs typeface="Calibri" pitchFamily="34" charset="-120"/>
+              </a:rPr>
+              <a:t>Explosive (thick lava, violent) vs effusive (thin lava, gentle)</a:t>
+            </a:r>
+            <a:endParaRPr lang="en-US" sz="1500" dirty="0"/>
           </a:p>
         </p:txBody>
       </p:sp>
@@ -2034,8 +2880,8 @@
         </p:nvSpPr>
         <p:spPr>
           <a:xfrm>
-            <a:off x="548640" y="4572000"/>
-            <a:ext cx="3657600" cy="274320"/>
+            <a:off x="731520" y="4572000"/>
+            <a:ext cx="7772400" cy="365760"/>
           </a:xfrm>
           <a:prstGeom prst="rect">
             <a:avLst/>
@@ -2051,14 +2897,17 @@
               <a:buNone/>
             </a:pPr>
             <a:r>
-              <a:rPr lang="en-US" sz="1000" dirty="0">
+              <a:rPr lang="en-US" sz="1100" dirty="0">
                 <a:solidFill>
-                  <a:srgbClr val="6B6660"/>
+                  <a:srgbClr val="E9C46A"/>
                 </a:solidFill>
+                <a:latin typeface="Calibri" pitchFamily="34" charset="0"/>
+                <a:ea typeface="Calibri" pitchFamily="34" charset="-122"/>
+                <a:cs typeface="Calibri" pitchFamily="34" charset="-120"/>
               </a:rPr>
               <a:t>mrzocchi.com</a:t>
             </a:r>
-            <a:endParaRPr lang="en-US" sz="1000" dirty="0"/>
+            <a:endParaRPr lang="en-US" sz="1100" dirty="0"/>
           </a:p>
         </p:txBody>
       </p:sp>

--- a/static/ppts/G6_Sci_Earthquakes_Volcanoes.pptx
+++ b/static/ppts/G6_Sci_Earthquakes_Volcanoes.pptx
@@ -10,9 +10,14 @@
     <p:sldId id="258" r:id="rId4"/>
     <p:sldId id="259" r:id="rId5"/>
     <p:sldId id="260" r:id="rId6"/>
+    <p:sldId id="261" r:id="rId7"/>
+    <p:sldId id="262" r:id="rId8"/>
+    <p:sldId id="263" r:id="rId9"/>
+    <p:sldId id="264" r:id="rId10"/>
+    <p:sldId id="265" r:id="rId11"/>
   </p:sldIdLst>
   <p:notesMasterIdLst>
-    <p:notesMasterId r:id="rId7"/>
+    <p:notesMasterId r:id="rId12"/>
   </p:notesMasterIdLst>
   <p:sldSz cx="9144000" cy="5143500"/>
   <p:notesSz cx="5143500" cy="9144000"/>
@@ -548,6 +553,94 @@
 </p:notes>
 </file>
 
+<file path=ppt/notesSlides/notesSlide10.xml><?xml version="1.0" encoding="utf-8"?>
+<p:notes xmlns:a="http://schemas.openxmlformats.org/drawingml/2006/main" xmlns:r="http://schemas.openxmlformats.org/officeDocument/2006/relationships" xmlns:p="http://schemas.openxmlformats.org/presentationml/2006/main">
+  <p:cSld>
+    <p:spTree>
+      <p:nvGrpSpPr>
+        <p:cNvPr id="1" name=""/>
+        <p:cNvGrpSpPr/>
+        <p:nvPr/>
+      </p:nvGrpSpPr>
+      <p:grpSpPr>
+        <a:xfrm>
+          <a:off x="0" y="0"/>
+          <a:ext cx="0" cy="0"/>
+          <a:chOff x="0" y="0"/>
+          <a:chExt cx="0" cy="0"/>
+        </a:xfrm>
+      </p:grpSpPr>
+      <p:sp>
+        <p:nvSpPr>
+          <p:cNvPr id="2" name="Slide Image Placeholder 1"/>
+          <p:cNvSpPr>
+            <a:spLocks noGrp="1" noRot="1" noChangeAspect="1"/>
+          </p:cNvSpPr>
+          <p:nvPr>
+            <p:ph type="sldImg"/>
+          </p:nvPr>
+        </p:nvSpPr>
+        <p:spPr/>
+      </p:sp>
+      <p:sp>
+        <p:nvSpPr>
+          <p:cNvPr id="3" name="Notes Placeholder 2"/>
+          <p:cNvSpPr>
+            <a:spLocks noGrp="1"/>
+          </p:cNvSpPr>
+          <p:nvPr>
+            <p:ph type="body" idx="1"/>
+          </p:nvPr>
+        </p:nvSpPr>
+        <p:spPr/>
+        <p:txBody>
+          <a:bodyPr/>
+          <a:lstStyle/>
+          <a:p>
+            <a:r>
+              <a:rPr lang="en-US" dirty="0"/>
+              <a:t/>
+            </a:r>
+            <a:endParaRPr lang="en-US" dirty="0"/>
+          </a:p>
+        </p:txBody>
+      </p:sp>
+      <p:sp>
+        <p:nvSpPr>
+          <p:cNvPr id="4" name="Slide Number Placeholder 3"/>
+          <p:cNvSpPr>
+            <a:spLocks noGrp="1"/>
+          </p:cNvSpPr>
+          <p:nvPr>
+            <p:ph type="sldNum" sz="quarter" idx="10"/>
+          </p:nvPr>
+        </p:nvSpPr>
+        <p:spPr/>
+        <p:txBody>
+          <a:bodyPr/>
+          <a:lstStyle/>
+          <a:p>
+            <a:fld id="{F7021451-1387-4CA6-816F-3879F97B5CBC}" type="slidenum">
+              <a:rPr lang="en-US"/>
+              <a:t>10</a:t>
+            </a:fld>
+            <a:endParaRPr lang="en-US"/>
+          </a:p>
+        </p:txBody>
+      </p:sp>
+    </p:spTree>
+    <p:extLst>
+      <p:ext uri="{BB962C8B-B14F-4D97-AF65-F5344CB8AC3E}">
+        <p14:creationId xmlns:p14="http://schemas.microsoft.com/office/powerpoint/2010/main" val="1024086991"/>
+      </p:ext>
+    </p:extLst>
+  </p:cSld>
+  <p:clrMapOvr>
+    <a:masterClrMapping/>
+  </p:clrMapOvr>
+</p:notes>
+</file>
+
 <file path=ppt/notesSlides/notesSlide2.xml><?xml version="1.0" encoding="utf-8"?>
 <p:notes xmlns:a="http://schemas.openxmlformats.org/drawingml/2006/main" xmlns:r="http://schemas.openxmlformats.org/officeDocument/2006/relationships" xmlns:p="http://schemas.openxmlformats.org/presentationml/2006/main">
   <p:cSld>
@@ -882,6 +975,358 @@
             <a:fld id="{F7021451-1387-4CA6-816F-3879F97B5CBC}" type="slidenum">
               <a:rPr lang="en-US"/>
               <a:t>5</a:t>
+            </a:fld>
+            <a:endParaRPr lang="en-US"/>
+          </a:p>
+        </p:txBody>
+      </p:sp>
+    </p:spTree>
+    <p:extLst>
+      <p:ext uri="{BB962C8B-B14F-4D97-AF65-F5344CB8AC3E}">
+        <p14:creationId xmlns:p14="http://schemas.microsoft.com/office/powerpoint/2010/main" val="1024086991"/>
+      </p:ext>
+    </p:extLst>
+  </p:cSld>
+  <p:clrMapOvr>
+    <a:masterClrMapping/>
+  </p:clrMapOvr>
+</p:notes>
+</file>
+
+<file path=ppt/notesSlides/notesSlide6.xml><?xml version="1.0" encoding="utf-8"?>
+<p:notes xmlns:a="http://schemas.openxmlformats.org/drawingml/2006/main" xmlns:r="http://schemas.openxmlformats.org/officeDocument/2006/relationships" xmlns:p="http://schemas.openxmlformats.org/presentationml/2006/main">
+  <p:cSld>
+    <p:spTree>
+      <p:nvGrpSpPr>
+        <p:cNvPr id="1" name=""/>
+        <p:cNvGrpSpPr/>
+        <p:nvPr/>
+      </p:nvGrpSpPr>
+      <p:grpSpPr>
+        <a:xfrm>
+          <a:off x="0" y="0"/>
+          <a:ext cx="0" cy="0"/>
+          <a:chOff x="0" y="0"/>
+          <a:chExt cx="0" cy="0"/>
+        </a:xfrm>
+      </p:grpSpPr>
+      <p:sp>
+        <p:nvSpPr>
+          <p:cNvPr id="2" name="Slide Image Placeholder 1"/>
+          <p:cNvSpPr>
+            <a:spLocks noGrp="1" noRot="1" noChangeAspect="1"/>
+          </p:cNvSpPr>
+          <p:nvPr>
+            <p:ph type="sldImg"/>
+          </p:nvPr>
+        </p:nvSpPr>
+        <p:spPr/>
+      </p:sp>
+      <p:sp>
+        <p:nvSpPr>
+          <p:cNvPr id="3" name="Notes Placeholder 2"/>
+          <p:cNvSpPr>
+            <a:spLocks noGrp="1"/>
+          </p:cNvSpPr>
+          <p:nvPr>
+            <p:ph type="body" idx="1"/>
+          </p:nvPr>
+        </p:nvSpPr>
+        <p:spPr/>
+        <p:txBody>
+          <a:bodyPr/>
+          <a:lstStyle/>
+          <a:p>
+            <a:r>
+              <a:rPr lang="en-US" dirty="0"/>
+              <a:t/>
+            </a:r>
+            <a:endParaRPr lang="en-US" dirty="0"/>
+          </a:p>
+        </p:txBody>
+      </p:sp>
+      <p:sp>
+        <p:nvSpPr>
+          <p:cNvPr id="4" name="Slide Number Placeholder 3"/>
+          <p:cNvSpPr>
+            <a:spLocks noGrp="1"/>
+          </p:cNvSpPr>
+          <p:nvPr>
+            <p:ph type="sldNum" sz="quarter" idx="10"/>
+          </p:nvPr>
+        </p:nvSpPr>
+        <p:spPr/>
+        <p:txBody>
+          <a:bodyPr/>
+          <a:lstStyle/>
+          <a:p>
+            <a:fld id="{F7021451-1387-4CA6-816F-3879F97B5CBC}" type="slidenum">
+              <a:rPr lang="en-US"/>
+              <a:t>6</a:t>
+            </a:fld>
+            <a:endParaRPr lang="en-US"/>
+          </a:p>
+        </p:txBody>
+      </p:sp>
+    </p:spTree>
+    <p:extLst>
+      <p:ext uri="{BB962C8B-B14F-4D97-AF65-F5344CB8AC3E}">
+        <p14:creationId xmlns:p14="http://schemas.microsoft.com/office/powerpoint/2010/main" val="1024086991"/>
+      </p:ext>
+    </p:extLst>
+  </p:cSld>
+  <p:clrMapOvr>
+    <a:masterClrMapping/>
+  </p:clrMapOvr>
+</p:notes>
+</file>
+
+<file path=ppt/notesSlides/notesSlide7.xml><?xml version="1.0" encoding="utf-8"?>
+<p:notes xmlns:a="http://schemas.openxmlformats.org/drawingml/2006/main" xmlns:r="http://schemas.openxmlformats.org/officeDocument/2006/relationships" xmlns:p="http://schemas.openxmlformats.org/presentationml/2006/main">
+  <p:cSld>
+    <p:spTree>
+      <p:nvGrpSpPr>
+        <p:cNvPr id="1" name=""/>
+        <p:cNvGrpSpPr/>
+        <p:nvPr/>
+      </p:nvGrpSpPr>
+      <p:grpSpPr>
+        <a:xfrm>
+          <a:off x="0" y="0"/>
+          <a:ext cx="0" cy="0"/>
+          <a:chOff x="0" y="0"/>
+          <a:chExt cx="0" cy="0"/>
+        </a:xfrm>
+      </p:grpSpPr>
+      <p:sp>
+        <p:nvSpPr>
+          <p:cNvPr id="2" name="Slide Image Placeholder 1"/>
+          <p:cNvSpPr>
+            <a:spLocks noGrp="1" noRot="1" noChangeAspect="1"/>
+          </p:cNvSpPr>
+          <p:nvPr>
+            <p:ph type="sldImg"/>
+          </p:nvPr>
+        </p:nvSpPr>
+        <p:spPr/>
+      </p:sp>
+      <p:sp>
+        <p:nvSpPr>
+          <p:cNvPr id="3" name="Notes Placeholder 2"/>
+          <p:cNvSpPr>
+            <a:spLocks noGrp="1"/>
+          </p:cNvSpPr>
+          <p:nvPr>
+            <p:ph type="body" idx="1"/>
+          </p:nvPr>
+        </p:nvSpPr>
+        <p:spPr/>
+        <p:txBody>
+          <a:bodyPr/>
+          <a:lstStyle/>
+          <a:p>
+            <a:r>
+              <a:rPr lang="en-US" dirty="0"/>
+              <a:t/>
+            </a:r>
+            <a:endParaRPr lang="en-US" dirty="0"/>
+          </a:p>
+        </p:txBody>
+      </p:sp>
+      <p:sp>
+        <p:nvSpPr>
+          <p:cNvPr id="4" name="Slide Number Placeholder 3"/>
+          <p:cNvSpPr>
+            <a:spLocks noGrp="1"/>
+          </p:cNvSpPr>
+          <p:nvPr>
+            <p:ph type="sldNum" sz="quarter" idx="10"/>
+          </p:nvPr>
+        </p:nvSpPr>
+        <p:spPr/>
+        <p:txBody>
+          <a:bodyPr/>
+          <a:lstStyle/>
+          <a:p>
+            <a:fld id="{F7021451-1387-4CA6-816F-3879F97B5CBC}" type="slidenum">
+              <a:rPr lang="en-US"/>
+              <a:t>7</a:t>
+            </a:fld>
+            <a:endParaRPr lang="en-US"/>
+          </a:p>
+        </p:txBody>
+      </p:sp>
+    </p:spTree>
+    <p:extLst>
+      <p:ext uri="{BB962C8B-B14F-4D97-AF65-F5344CB8AC3E}">
+        <p14:creationId xmlns:p14="http://schemas.microsoft.com/office/powerpoint/2010/main" val="1024086991"/>
+      </p:ext>
+    </p:extLst>
+  </p:cSld>
+  <p:clrMapOvr>
+    <a:masterClrMapping/>
+  </p:clrMapOvr>
+</p:notes>
+</file>
+
+<file path=ppt/notesSlides/notesSlide8.xml><?xml version="1.0" encoding="utf-8"?>
+<p:notes xmlns:a="http://schemas.openxmlformats.org/drawingml/2006/main" xmlns:r="http://schemas.openxmlformats.org/officeDocument/2006/relationships" xmlns:p="http://schemas.openxmlformats.org/presentationml/2006/main">
+  <p:cSld>
+    <p:spTree>
+      <p:nvGrpSpPr>
+        <p:cNvPr id="1" name=""/>
+        <p:cNvGrpSpPr/>
+        <p:nvPr/>
+      </p:nvGrpSpPr>
+      <p:grpSpPr>
+        <a:xfrm>
+          <a:off x="0" y="0"/>
+          <a:ext cx="0" cy="0"/>
+          <a:chOff x="0" y="0"/>
+          <a:chExt cx="0" cy="0"/>
+        </a:xfrm>
+      </p:grpSpPr>
+      <p:sp>
+        <p:nvSpPr>
+          <p:cNvPr id="2" name="Slide Image Placeholder 1"/>
+          <p:cNvSpPr>
+            <a:spLocks noGrp="1" noRot="1" noChangeAspect="1"/>
+          </p:cNvSpPr>
+          <p:nvPr>
+            <p:ph type="sldImg"/>
+          </p:nvPr>
+        </p:nvSpPr>
+        <p:spPr/>
+      </p:sp>
+      <p:sp>
+        <p:nvSpPr>
+          <p:cNvPr id="3" name="Notes Placeholder 2"/>
+          <p:cNvSpPr>
+            <a:spLocks noGrp="1"/>
+          </p:cNvSpPr>
+          <p:nvPr>
+            <p:ph type="body" idx="1"/>
+          </p:nvPr>
+        </p:nvSpPr>
+        <p:spPr/>
+        <p:txBody>
+          <a:bodyPr/>
+          <a:lstStyle/>
+          <a:p>
+            <a:r>
+              <a:rPr lang="en-US" dirty="0"/>
+              <a:t/>
+            </a:r>
+            <a:endParaRPr lang="en-US" dirty="0"/>
+          </a:p>
+        </p:txBody>
+      </p:sp>
+      <p:sp>
+        <p:nvSpPr>
+          <p:cNvPr id="4" name="Slide Number Placeholder 3"/>
+          <p:cNvSpPr>
+            <a:spLocks noGrp="1"/>
+          </p:cNvSpPr>
+          <p:nvPr>
+            <p:ph type="sldNum" sz="quarter" idx="10"/>
+          </p:nvPr>
+        </p:nvSpPr>
+        <p:spPr/>
+        <p:txBody>
+          <a:bodyPr/>
+          <a:lstStyle/>
+          <a:p>
+            <a:fld id="{F7021451-1387-4CA6-816F-3879F97B5CBC}" type="slidenum">
+              <a:rPr lang="en-US"/>
+              <a:t>8</a:t>
+            </a:fld>
+            <a:endParaRPr lang="en-US"/>
+          </a:p>
+        </p:txBody>
+      </p:sp>
+    </p:spTree>
+    <p:extLst>
+      <p:ext uri="{BB962C8B-B14F-4D97-AF65-F5344CB8AC3E}">
+        <p14:creationId xmlns:p14="http://schemas.microsoft.com/office/powerpoint/2010/main" val="1024086991"/>
+      </p:ext>
+    </p:extLst>
+  </p:cSld>
+  <p:clrMapOvr>
+    <a:masterClrMapping/>
+  </p:clrMapOvr>
+</p:notes>
+</file>
+
+<file path=ppt/notesSlides/notesSlide9.xml><?xml version="1.0" encoding="utf-8"?>
+<p:notes xmlns:a="http://schemas.openxmlformats.org/drawingml/2006/main" xmlns:r="http://schemas.openxmlformats.org/officeDocument/2006/relationships" xmlns:p="http://schemas.openxmlformats.org/presentationml/2006/main">
+  <p:cSld>
+    <p:spTree>
+      <p:nvGrpSpPr>
+        <p:cNvPr id="1" name=""/>
+        <p:cNvGrpSpPr/>
+        <p:nvPr/>
+      </p:nvGrpSpPr>
+      <p:grpSpPr>
+        <a:xfrm>
+          <a:off x="0" y="0"/>
+          <a:ext cx="0" cy="0"/>
+          <a:chOff x="0" y="0"/>
+          <a:chExt cx="0" cy="0"/>
+        </a:xfrm>
+      </p:grpSpPr>
+      <p:sp>
+        <p:nvSpPr>
+          <p:cNvPr id="2" name="Slide Image Placeholder 1"/>
+          <p:cNvSpPr>
+            <a:spLocks noGrp="1" noRot="1" noChangeAspect="1"/>
+          </p:cNvSpPr>
+          <p:nvPr>
+            <p:ph type="sldImg"/>
+          </p:nvPr>
+        </p:nvSpPr>
+        <p:spPr/>
+      </p:sp>
+      <p:sp>
+        <p:nvSpPr>
+          <p:cNvPr id="3" name="Notes Placeholder 2"/>
+          <p:cNvSpPr>
+            <a:spLocks noGrp="1"/>
+          </p:cNvSpPr>
+          <p:nvPr>
+            <p:ph type="body" idx="1"/>
+          </p:nvPr>
+        </p:nvSpPr>
+        <p:spPr/>
+        <p:txBody>
+          <a:bodyPr/>
+          <a:lstStyle/>
+          <a:p>
+            <a:r>
+              <a:rPr lang="en-US" dirty="0"/>
+              <a:t/>
+            </a:r>
+            <a:endParaRPr lang="en-US" dirty="0"/>
+          </a:p>
+        </p:txBody>
+      </p:sp>
+      <p:sp>
+        <p:nvSpPr>
+          <p:cNvPr id="4" name="Slide Number Placeholder 3"/>
+          <p:cNvSpPr>
+            <a:spLocks noGrp="1"/>
+          </p:cNvSpPr>
+          <p:nvPr>
+            <p:ph type="sldNum" sz="quarter" idx="10"/>
+          </p:nvPr>
+        </p:nvSpPr>
+        <p:spPr/>
+        <p:txBody>
+          <a:bodyPr/>
+          <a:lstStyle/>
+          <a:p>
+            <a:fld id="{F7021451-1387-4CA6-816F-3879F97B5CBC}" type="slidenum">
+              <a:rPr lang="en-US"/>
+              <a:t>9</a:t>
             </a:fld>
             <a:endParaRPr lang="en-US"/>
           </a:p>
@@ -1210,13 +1655,6 @@
 <file path=ppt/slides/slide1.xml><?xml version="1.0" encoding="utf-8"?>
 <p:sld xmlns:a="http://schemas.openxmlformats.org/drawingml/2006/main" xmlns:r="http://schemas.openxmlformats.org/officeDocument/2006/relationships" xmlns:p="http://schemas.openxmlformats.org/presentationml/2006/main">
   <p:cSld name="Slide 1">
-    <p:bg>
-      <p:bgPr>
-        <a:solidFill>
-          <a:srgbClr val="1B2A4A"/>
-        </a:solidFill>
-      </p:bgPr>
-    </p:bg>
     <p:spTree>
       <p:nvGrpSpPr>
         <p:cNvPr id="1" name=""/>
@@ -1240,7 +1678,27 @@
         <p:spPr>
           <a:xfrm>
             <a:off x="0" y="0"/>
-            <a:ext cx="109728" cy="5143500"/>
+            <a:ext cx="9144000" cy="5143500"/>
+          </a:xfrm>
+          <a:prstGeom prst="rect">
+            <a:avLst/>
+          </a:prstGeom>
+          <a:solidFill>
+            <a:srgbClr val="1B2A4A"/>
+          </a:solidFill>
+          <a:ln/>
+        </p:spPr>
+      </p:sp>
+      <p:sp>
+        <p:nvSpPr>
+          <p:cNvPr id="3" name="Shape 1"/>
+          <p:cNvSpPr/>
+          <p:nvPr/>
+        </p:nvSpPr>
+        <p:spPr>
+          <a:xfrm>
+            <a:off x="0" y="4777740"/>
+            <a:ext cx="9144000" cy="365760"/>
           </a:xfrm>
           <a:prstGeom prst="rect">
             <a:avLst/>
@@ -1253,14 +1711,14 @@
       </p:sp>
       <p:sp>
         <p:nvSpPr>
-          <p:cNvPr id="3" name="Text 1"/>
+          <p:cNvPr id="4" name="Text 2"/>
           <p:cNvSpPr/>
           <p:nvPr/>
         </p:nvSpPr>
         <p:spPr>
           <a:xfrm>
             <a:off x="731520" y="1097280"/>
-            <a:ext cx="7772400" cy="1371600"/>
+            <a:ext cx="7680960" cy="457200"/>
           </a:xfrm>
           <a:prstGeom prst="rect">
             <a:avLst/>
@@ -1270,6 +1728,45 @@
         </p:spPr>
         <p:txBody>
           <a:bodyPr wrap="square" rtlCol="0" anchor="ctr"/>
+          <a:lstStyle/>
+          <a:p>
+            <a:pPr indent="0" marL="0">
+              <a:buNone/>
+            </a:pPr>
+            <a:r>
+              <a:rPr lang="en-US" sz="1400" b="1" spc="400" kern="0" dirty="0">
+                <a:solidFill>
+                  <a:srgbClr val="2A9D8F"/>
+                </a:solidFill>
+                <a:latin typeface="Calibri" pitchFamily="34" charset="0"/>
+                <a:ea typeface="Calibri" pitchFamily="34" charset="-122"/>
+                <a:cs typeface="Calibri" pitchFamily="34" charset="-120"/>
+              </a:rPr>
+              <a:t>GRADE 6 SCIENCE</a:t>
+            </a:r>
+            <a:endParaRPr lang="en-US" sz="1400" dirty="0"/>
+          </a:p>
+        </p:txBody>
+      </p:sp>
+      <p:sp>
+        <p:nvSpPr>
+          <p:cNvPr id="5" name="Text 3"/>
+          <p:cNvSpPr/>
+          <p:nvPr/>
+        </p:nvSpPr>
+        <p:spPr>
+          <a:xfrm>
+            <a:off x="731520" y="1645920"/>
+            <a:ext cx="7680960" cy="1463040"/>
+          </a:xfrm>
+          <a:prstGeom prst="rect">
+            <a:avLst/>
+          </a:prstGeom>
+          <a:noFill/>
+          <a:ln/>
+        </p:spPr>
+        <p:txBody>
+          <a:bodyPr wrap="square" rtlCol="0" anchor="t"/>
           <a:lstStyle/>
           <a:p>
             <a:pPr indent="0" marL="0">
@@ -1284,46 +1781,63 @@
                 <a:ea typeface="Georgia" pitchFamily="34" charset="-122"/>
                 <a:cs typeface="Georgia" pitchFamily="34" charset="-120"/>
               </a:rPr>
-              <a:t>Earthquakes &amp; Volcanoes</a:t>
+              <a:t>Earthquakes &amp;</a:t>
             </a:r>
             <a:endParaRPr lang="en-US" sz="4000" dirty="0"/>
           </a:p>
-        </p:txBody>
-      </p:sp>
-      <p:sp>
-        <p:nvSpPr>
-          <p:cNvPr id="4" name="Text 2"/>
-          <p:cNvSpPr/>
-          <p:nvPr/>
-        </p:nvSpPr>
-        <p:spPr>
-          <a:xfrm>
-            <a:off x="731520" y="2560320"/>
-            <a:ext cx="7772400" cy="548640"/>
-          </a:xfrm>
-          <a:prstGeom prst="rect">
-            <a:avLst/>
-          </a:prstGeom>
-          <a:noFill/>
-          <a:ln/>
-        </p:spPr>
-        <p:txBody>
-          <a:bodyPr wrap="square" rtlCol="0" anchor="ctr"/>
-          <a:lstStyle/>
           <a:p>
             <a:pPr indent="0" marL="0">
               <a:buNone/>
             </a:pPr>
             <a:r>
-              <a:rPr lang="en-US" sz="1600" dirty="0">
-                <a:solidFill>
-                  <a:srgbClr val="E9C46A"/>
+              <a:rPr lang="en-US" sz="4000" b="1" dirty="0">
+                <a:solidFill>
+                  <a:srgbClr val="FFFFFF"/>
+                </a:solidFill>
+                <a:latin typeface="Georgia" pitchFamily="34" charset="0"/>
+                <a:ea typeface="Georgia" pitchFamily="34" charset="-122"/>
+                <a:cs typeface="Georgia" pitchFamily="34" charset="-120"/>
+              </a:rPr>
+              <a:t>Volcanoes</a:t>
+            </a:r>
+            <a:endParaRPr lang="en-US" sz="4000" dirty="0"/>
+          </a:p>
+        </p:txBody>
+      </p:sp>
+      <p:sp>
+        <p:nvSpPr>
+          <p:cNvPr id="6" name="Text 4"/>
+          <p:cNvSpPr/>
+          <p:nvPr/>
+        </p:nvSpPr>
+        <p:spPr>
+          <a:xfrm>
+            <a:off x="731520" y="3200400"/>
+            <a:ext cx="7680960" cy="548640"/>
+          </a:xfrm>
+          <a:prstGeom prst="rect">
+            <a:avLst/>
+          </a:prstGeom>
+          <a:noFill/>
+          <a:ln/>
+        </p:spPr>
+        <p:txBody>
+          <a:bodyPr wrap="square" rtlCol="0" anchor="ctr"/>
+          <a:lstStyle/>
+          <a:p>
+            <a:pPr indent="0" marL="0">
+              <a:buNone/>
+            </a:pPr>
+            <a:r>
+              <a:rPr lang="en-US" sz="1600" i="1" dirty="0">
+                <a:solidFill>
+                  <a:srgbClr val="9B9690"/>
                 </a:solidFill>
                 <a:latin typeface="Calibri" pitchFamily="34" charset="0"/>
                 <a:ea typeface="Calibri" pitchFamily="34" charset="-122"/>
                 <a:cs typeface="Calibri" pitchFamily="34" charset="-120"/>
               </a:rPr>
-              <a:t>Grade 6 Science · Mr Zocchi</a:t>
+              <a:t>When the Earth shakes and erupts</a:t>
             </a:r>
             <a:endParaRPr lang="en-US" sz="1600" dirty="0"/>
           </a:p>
@@ -1331,36 +1845,14 @@
       </p:sp>
       <p:sp>
         <p:nvSpPr>
-          <p:cNvPr id="5" name="Shape 3"/>
-          <p:cNvSpPr/>
-          <p:nvPr/>
-        </p:nvSpPr>
-        <p:spPr>
-          <a:xfrm>
-            <a:off x="731520" y="3474720"/>
-            <a:ext cx="2011680" cy="411480"/>
-          </a:xfrm>
-          <a:prstGeom prst="roundRect">
-            <a:avLst>
-              <a:gd name="adj" fmla="val 17778"/>
-            </a:avLst>
-          </a:prstGeom>
-          <a:solidFill>
-            <a:srgbClr val="2A9D8F"/>
-          </a:solidFill>
-          <a:ln/>
-        </p:spPr>
-      </p:sp>
-      <p:sp>
-        <p:nvSpPr>
-          <p:cNvPr id="6" name="Text 4"/>
-          <p:cNvSpPr/>
-          <p:nvPr/>
-        </p:nvSpPr>
-        <p:spPr>
-          <a:xfrm>
-            <a:off x="731520" y="3474720"/>
-            <a:ext cx="2011680" cy="411480"/>
+          <p:cNvPr id="7" name="Text 5"/>
+          <p:cNvSpPr/>
+          <p:nvPr/>
+        </p:nvSpPr>
+        <p:spPr>
+          <a:xfrm>
+            <a:off x="731520" y="4206240"/>
+            <a:ext cx="3657600" cy="365760"/>
           </a:xfrm>
           <a:prstGeom prst="rect">
             <a:avLst/>
@@ -1372,19 +1864,19 @@
           <a:bodyPr wrap="square" rtlCol="0" anchor="ctr"/>
           <a:lstStyle/>
           <a:p>
-            <a:pPr algn="ctr" indent="0" marL="0">
+            <a:pPr indent="0" marL="0">
               <a:buNone/>
             </a:pPr>
             <a:r>
-              <a:rPr lang="en-US" sz="1200" b="1" dirty="0">
-                <a:solidFill>
-                  <a:srgbClr val="FFFFFF"/>
+              <a:rPr lang="en-US" sz="1200" dirty="0">
+                <a:solidFill>
+                  <a:srgbClr val="6B6660"/>
                 </a:solidFill>
                 <a:latin typeface="Calibri" pitchFamily="34" charset="0"/>
                 <a:ea typeface="Calibri" pitchFamily="34" charset="-122"/>
                 <a:cs typeface="Calibri" pitchFamily="34" charset="-120"/>
               </a:rPr>
-              <a:t>Term 3 · Earth Science</a:t>
+              <a:t>Mr Zocchi</a:t>
             </a:r>
             <a:endParaRPr lang="en-US" sz="1200" dirty="0"/>
           </a:p>
@@ -1398,16 +1890,9 @@
 </p:sld>
 </file>
 
-<file path=ppt/slides/slide2.xml><?xml version="1.0" encoding="utf-8"?>
+<file path=ppt/slides/slide10.xml><?xml version="1.0" encoding="utf-8"?>
 <p:sld xmlns:a="http://schemas.openxmlformats.org/drawingml/2006/main" xmlns:r="http://schemas.openxmlformats.org/officeDocument/2006/relationships" xmlns:p="http://schemas.openxmlformats.org/presentationml/2006/main">
-  <p:cSld name="Slide 2">
-    <p:bg>
-      <p:bgPr>
-        <a:solidFill>
-          <a:srgbClr val="FAF8F5"/>
-        </a:solidFill>
-      </p:bgPr>
-    </p:bg>
+  <p:cSld name="Slide 10">
     <p:spTree>
       <p:nvGrpSpPr>
         <p:cNvPr id="1" name=""/>
@@ -1431,7 +1916,27 @@
         <p:spPr>
           <a:xfrm>
             <a:off x="0" y="0"/>
-            <a:ext cx="9144000" cy="54864"/>
+            <a:ext cx="9144000" cy="5143500"/>
+          </a:xfrm>
+          <a:prstGeom prst="rect">
+            <a:avLst/>
+          </a:prstGeom>
+          <a:solidFill>
+            <a:srgbClr val="1B2A4A"/>
+          </a:solidFill>
+          <a:ln/>
+        </p:spPr>
+      </p:sp>
+      <p:sp>
+        <p:nvSpPr>
+          <p:cNvPr id="3" name="Shape 1"/>
+          <p:cNvSpPr/>
+          <p:nvPr/>
+        </p:nvSpPr>
+        <p:spPr>
+          <a:xfrm>
+            <a:off x="0" y="4777740"/>
+            <a:ext cx="9144000" cy="365760"/>
           </a:xfrm>
           <a:prstGeom prst="rect">
             <a:avLst/>
@@ -1444,14 +1949,14 @@
       </p:sp>
       <p:sp>
         <p:nvSpPr>
-          <p:cNvPr id="3" name="Text 1"/>
-          <p:cNvSpPr/>
-          <p:nvPr/>
-        </p:nvSpPr>
-        <p:spPr>
-          <a:xfrm>
-            <a:off x="7772400" y="4709160"/>
-            <a:ext cx="1097280" cy="320040"/>
+          <p:cNvPr id="4" name="Text 2"/>
+          <p:cNvSpPr/>
+          <p:nvPr/>
+        </p:nvSpPr>
+        <p:spPr>
+          <a:xfrm>
+            <a:off x="731520" y="1371600"/>
+            <a:ext cx="7680960" cy="914400"/>
           </a:xfrm>
           <a:prstGeom prst="rect">
             <a:avLst/>
@@ -1463,86 +1968,118 @@
           <a:bodyPr wrap="square" rtlCol="0" anchor="ctr"/>
           <a:lstStyle/>
           <a:p>
-            <a:pPr algn="r" indent="0" marL="0">
+            <a:pPr algn="ctr" indent="0" marL="0">
               <a:buNone/>
             </a:pPr>
             <a:r>
-              <a:rPr lang="en-US" sz="900" dirty="0">
-                <a:solidFill>
-                  <a:srgbClr val="6B6660"/>
+              <a:rPr lang="en-US" sz="3600" b="1" dirty="0">
+                <a:solidFill>
+                  <a:srgbClr val="FFFFFF"/>
+                </a:solidFill>
+                <a:latin typeface="Georgia" pitchFamily="34" charset="0"/>
+                <a:ea typeface="Georgia" pitchFamily="34" charset="-122"/>
+                <a:cs typeface="Georgia" pitchFamily="34" charset="-120"/>
+              </a:rPr>
+              <a:t>Review &amp; Practise</a:t>
+            </a:r>
+            <a:endParaRPr lang="en-US" sz="3600" dirty="0"/>
+          </a:p>
+        </p:txBody>
+      </p:sp>
+      <p:sp>
+        <p:nvSpPr>
+          <p:cNvPr id="5" name="Text 3"/>
+          <p:cNvSpPr/>
+          <p:nvPr/>
+        </p:nvSpPr>
+        <p:spPr>
+          <a:xfrm>
+            <a:off x="731520" y="2560320"/>
+            <a:ext cx="7680960" cy="548640"/>
+          </a:xfrm>
+          <a:prstGeom prst="rect">
+            <a:avLst/>
+          </a:prstGeom>
+          <a:noFill/>
+          <a:ln/>
+        </p:spPr>
+        <p:txBody>
+          <a:bodyPr wrap="square" rtlCol="0" anchor="ctr"/>
+          <a:lstStyle/>
+          <a:p>
+            <a:pPr algn="ctr" indent="0" marL="0">
+              <a:buNone/>
+            </a:pPr>
+            <a:r>
+              <a:rPr lang="en-US" sz="2000" dirty="0">
+                <a:solidFill>
+                  <a:srgbClr val="2A9D8F"/>
                 </a:solidFill>
                 <a:latin typeface="Calibri" pitchFamily="34" charset="0"/>
                 <a:ea typeface="Calibri" pitchFamily="34" charset="-122"/>
                 <a:cs typeface="Calibri" pitchFamily="34" charset="-120"/>
               </a:rPr>
-              <a:t>2 / 5</a:t>
-            </a:r>
-            <a:endParaRPr lang="en-US" sz="900" dirty="0"/>
-          </a:p>
-        </p:txBody>
-      </p:sp>
-      <p:sp>
-        <p:nvSpPr>
-          <p:cNvPr id="4" name="Shape 2"/>
-          <p:cNvSpPr/>
-          <p:nvPr/>
-        </p:nvSpPr>
-        <p:spPr>
-          <a:xfrm>
-            <a:off x="1371600" y="914400"/>
-            <a:ext cx="6400800" cy="3200400"/>
+              <a:t>mrzocchi.com</a:t>
+            </a:r>
+            <a:endParaRPr lang="en-US" sz="2000" dirty="0"/>
+          </a:p>
+        </p:txBody>
+      </p:sp>
+    </p:spTree>
+  </p:cSld>
+  <p:clrMapOvr>
+    <a:masterClrMapping/>
+  </p:clrMapOvr>
+</p:sld>
+</file>
+
+<file path=ppt/slides/slide2.xml><?xml version="1.0" encoding="utf-8"?>
+<p:sld xmlns:a="http://schemas.openxmlformats.org/drawingml/2006/main" xmlns:r="http://schemas.openxmlformats.org/officeDocument/2006/relationships" xmlns:p="http://schemas.openxmlformats.org/presentationml/2006/main">
+  <p:cSld name="Slide 2">
+    <p:spTree>
+      <p:nvGrpSpPr>
+        <p:cNvPr id="1" name=""/>
+        <p:cNvGrpSpPr/>
+        <p:nvPr/>
+      </p:nvGrpSpPr>
+      <p:grpSpPr>
+        <a:xfrm>
+          <a:off x="0" y="0"/>
+          <a:ext cx="0" cy="0"/>
+          <a:chOff x="0" y="0"/>
+          <a:chExt cx="0" cy="0"/>
+        </a:xfrm>
+      </p:grpSpPr>
+      <p:sp>
+        <p:nvSpPr>
+          <p:cNvPr id="2" name="Shape 0"/>
+          <p:cNvSpPr/>
+          <p:nvPr/>
+        </p:nvSpPr>
+        <p:spPr>
+          <a:xfrm>
+            <a:off x="0" y="0"/>
+            <a:ext cx="9144000" cy="5143500"/>
           </a:xfrm>
           <a:prstGeom prst="rect">
             <a:avLst/>
           </a:prstGeom>
           <a:solidFill>
-            <a:srgbClr val="FFFFFF"/>
+            <a:srgbClr val="111D35"/>
           </a:solidFill>
-          <a:ln w="12700">
-            <a:solidFill>
-              <a:srgbClr val="E5E2DC"/>
-            </a:solidFill>
-            <a:prstDash val="solid"/>
-          </a:ln>
-          <a:effectLst>
-            <a:outerShdw sx="100000" sy="100000" kx="0" ky="0" algn="bl" rotWithShape="0" blurRad="50800" dist="25400" dir="8100000">
-              <a:srgbClr val="000000">
-                <a:alpha val="10000"/>
-              </a:srgbClr>
-            </a:outerShdw>
-          </a:effectLst>
-        </p:spPr>
-      </p:sp>
-      <p:sp>
-        <p:nvSpPr>
-          <p:cNvPr id="5" name="Shape 3"/>
-          <p:cNvSpPr/>
-          <p:nvPr/>
-        </p:nvSpPr>
-        <p:spPr>
-          <a:xfrm>
-            <a:off x="1371600" y="914400"/>
-            <a:ext cx="91440" cy="3200400"/>
-          </a:xfrm>
-          <a:prstGeom prst="rect">
-            <a:avLst/>
-          </a:prstGeom>
-          <a:solidFill>
-            <a:srgbClr val="2A9D8F"/>
-          </a:solidFill>
-          <a:ln/>
-        </p:spPr>
-      </p:sp>
-      <p:sp>
-        <p:nvSpPr>
-          <p:cNvPr id="6" name="Text 4"/>
-          <p:cNvSpPr/>
-          <p:nvPr/>
-        </p:nvSpPr>
-        <p:spPr>
-          <a:xfrm>
-            <a:off x="1828800" y="1097280"/>
-            <a:ext cx="5669280" cy="640080"/>
+          <a:ln/>
+        </p:spPr>
+      </p:sp>
+      <p:sp>
+        <p:nvSpPr>
+          <p:cNvPr id="3" name="Text 1"/>
+          <p:cNvSpPr/>
+          <p:nvPr/>
+        </p:nvSpPr>
+        <p:spPr>
+          <a:xfrm>
+            <a:off x="6858000" y="182880"/>
+            <a:ext cx="2286000" cy="2743200"/>
           </a:xfrm>
           <a:prstGeom prst="rect">
             <a:avLst/>
@@ -1554,34 +2091,36 @@
           <a:bodyPr wrap="square" rtlCol="0" anchor="ctr"/>
           <a:lstStyle/>
           <a:p>
-            <a:pPr indent="0" marL="0">
+            <a:pPr algn="ctr" indent="0" marL="0">
               <a:buNone/>
             </a:pPr>
             <a:r>
-              <a:rPr lang="en-US" sz="2400" b="1" dirty="0">
-                <a:solidFill>
-                  <a:srgbClr val="1B2A4A"/>
+              <a:rPr lang="en-US" sz="16000" b="1" dirty="0">
+                <a:solidFill>
+                  <a:srgbClr val="2A9D8F">
+                    <a:alpha val="80000"/>
+                  </a:srgbClr>
                 </a:solidFill>
                 <a:latin typeface="Georgia" pitchFamily="34" charset="0"/>
                 <a:ea typeface="Georgia" pitchFamily="34" charset="-122"/>
                 <a:cs typeface="Georgia" pitchFamily="34" charset="-120"/>
               </a:rPr>
-              <a:t>Why Do Earthquakes and Volcanoes Happen?</a:t>
-            </a:r>
-            <a:endParaRPr lang="en-US" sz="2400" dirty="0"/>
-          </a:p>
-        </p:txBody>
-      </p:sp>
-      <p:sp>
-        <p:nvSpPr>
-          <p:cNvPr id="7" name="Text 5"/>
-          <p:cNvSpPr/>
-          <p:nvPr/>
-        </p:nvSpPr>
-        <p:spPr>
-          <a:xfrm>
-            <a:off x="1828800" y="1828800"/>
-            <a:ext cx="5669280" cy="2011680"/>
+              <a:t>?</a:t>
+            </a:r>
+            <a:endParaRPr lang="en-US" sz="16000" dirty="0"/>
+          </a:p>
+        </p:txBody>
+      </p:sp>
+      <p:sp>
+        <p:nvSpPr>
+          <p:cNvPr id="4" name="Text 2"/>
+          <p:cNvSpPr/>
+          <p:nvPr/>
+        </p:nvSpPr>
+        <p:spPr>
+          <a:xfrm>
+            <a:off x="731520" y="548640"/>
+            <a:ext cx="2743200" cy="365760"/>
           </a:xfrm>
           <a:prstGeom prst="rect">
             <a:avLst/>
@@ -1590,27 +2129,246 @@
           <a:ln/>
         </p:spPr>
         <p:txBody>
-          <a:bodyPr wrap="square" rtlCol="0" anchor="t"/>
+          <a:bodyPr wrap="square" rtlCol="0" anchor="ctr"/>
           <a:lstStyle/>
           <a:p>
             <a:pPr indent="0" marL="0">
-              <a:lnSpc>
-                <a:spcPct val="130000"/>
-              </a:lnSpc>
               <a:buNone/>
             </a:pPr>
             <a:r>
-              <a:rPr lang="en-US" sz="1500" dirty="0">
-                <a:solidFill>
-                  <a:srgbClr val="3D3A36"/>
+              <a:rPr lang="en-US" sz="1200" b="1" spc="400" kern="0" dirty="0">
+                <a:solidFill>
+                  <a:srgbClr val="2A9D8F"/>
                 </a:solidFill>
                 <a:latin typeface="Calibri" pitchFamily="34" charset="0"/>
                 <a:ea typeface="Calibri" pitchFamily="34" charset="-122"/>
                 <a:cs typeface="Calibri" pitchFamily="34" charset="-120"/>
               </a:rPr>
-              <a:t>Both are caused by tectonic plate movement. Earthquakes occur when plates get stuck then suddenly release energy. Volcanoes occur where magma from the mantle reaches the surface. Most occur at plate boundaries, especially around the Ring of Fire.</a:t>
-            </a:r>
-            <a:endParaRPr lang="en-US" sz="1500" dirty="0"/>
+              <a:t>INQUIRY</a:t>
+            </a:r>
+            <a:endParaRPr lang="en-US" sz="1200" dirty="0"/>
+          </a:p>
+        </p:txBody>
+      </p:sp>
+      <p:sp>
+        <p:nvSpPr>
+          <p:cNvPr id="5" name="Text 3"/>
+          <p:cNvSpPr/>
+          <p:nvPr/>
+        </p:nvSpPr>
+        <p:spPr>
+          <a:xfrm>
+            <a:off x="731520" y="1005840"/>
+            <a:ext cx="6858000" cy="1463040"/>
+          </a:xfrm>
+          <a:prstGeom prst="rect">
+            <a:avLst/>
+          </a:prstGeom>
+          <a:noFill/>
+          <a:ln/>
+        </p:spPr>
+        <p:txBody>
+          <a:bodyPr wrap="square" rtlCol="0" anchor="t"/>
+          <a:lstStyle/>
+          <a:p>
+            <a:pPr indent="0" marL="0">
+              <a:buNone/>
+            </a:pPr>
+            <a:r>
+              <a:rPr lang="en-US" sz="2800" b="1" dirty="0">
+                <a:solidFill>
+                  <a:srgbClr val="FFFFFF"/>
+                </a:solidFill>
+                <a:latin typeface="Georgia" pitchFamily="34" charset="0"/>
+                <a:ea typeface="Georgia" pitchFamily="34" charset="-122"/>
+                <a:cs typeface="Georgia" pitchFamily="34" charset="-120"/>
+              </a:rPr>
+              <a:t>In 2011, an earthquake in Japan triggered a tsunami that reached Korea. How can one event affect a whole region?</a:t>
+            </a:r>
+            <a:endParaRPr lang="en-US" sz="2800" dirty="0"/>
+          </a:p>
+        </p:txBody>
+      </p:sp>
+      <p:sp>
+        <p:nvSpPr>
+          <p:cNvPr id="6" name="Text 4"/>
+          <p:cNvSpPr/>
+          <p:nvPr/>
+        </p:nvSpPr>
+        <p:spPr>
+          <a:xfrm>
+            <a:off x="731520" y="2560320"/>
+            <a:ext cx="6858000" cy="548640"/>
+          </a:xfrm>
+          <a:prstGeom prst="rect">
+            <a:avLst/>
+          </a:prstGeom>
+          <a:noFill/>
+          <a:ln/>
+        </p:spPr>
+        <p:txBody>
+          <a:bodyPr wrap="square" rtlCol="0" anchor="ctr"/>
+          <a:lstStyle/>
+          <a:p>
+            <a:pPr indent="0" marL="0">
+              <a:buNone/>
+            </a:pPr>
+            <a:r>
+              <a:rPr lang="en-US" sz="1400" i="1" dirty="0">
+                <a:solidFill>
+                  <a:srgbClr val="9B9690"/>
+                </a:solidFill>
+                <a:latin typeface="Calibri" pitchFamily="34" charset="0"/>
+                <a:ea typeface="Calibri" pitchFamily="34" charset="-122"/>
+                <a:cs typeface="Calibri" pitchFamily="34" charset="-120"/>
+              </a:rPr>
+              <a:t>The Tōhoku earthquake (M 9.1) released energy equivalent to 600 million Hiroshima bombs.</a:t>
+            </a:r>
+            <a:endParaRPr lang="en-US" sz="1400" dirty="0"/>
+          </a:p>
+        </p:txBody>
+      </p:sp>
+      <p:sp>
+        <p:nvSpPr>
+          <p:cNvPr id="7" name="Shape 5"/>
+          <p:cNvSpPr/>
+          <p:nvPr/>
+        </p:nvSpPr>
+        <p:spPr>
+          <a:xfrm>
+            <a:off x="548640" y="3200400"/>
+            <a:ext cx="7315200" cy="1645920"/>
+          </a:xfrm>
+          <a:prstGeom prst="rect">
+            <a:avLst/>
+          </a:prstGeom>
+          <a:solidFill>
+            <a:srgbClr val="243660"/>
+          </a:solidFill>
+          <a:ln/>
+        </p:spPr>
+      </p:sp>
+      <p:sp>
+        <p:nvSpPr>
+          <p:cNvPr id="8" name="Text 6"/>
+          <p:cNvSpPr/>
+          <p:nvPr/>
+        </p:nvSpPr>
+        <p:spPr>
+          <a:xfrm>
+            <a:off x="731520" y="3246120"/>
+            <a:ext cx="3657600" cy="320040"/>
+          </a:xfrm>
+          <a:prstGeom prst="rect">
+            <a:avLst/>
+          </a:prstGeom>
+          <a:noFill/>
+          <a:ln/>
+        </p:spPr>
+        <p:txBody>
+          <a:bodyPr wrap="square" rtlCol="0" anchor="ctr"/>
+          <a:lstStyle/>
+          <a:p>
+            <a:pPr indent="0" marL="0">
+              <a:buNone/>
+            </a:pPr>
+            <a:r>
+              <a:rPr lang="en-US" sz="1100" b="1" spc="200" kern="0" dirty="0">
+                <a:solidFill>
+                  <a:srgbClr val="2A9D8F"/>
+                </a:solidFill>
+                <a:latin typeface="Calibri" pitchFamily="34" charset="0"/>
+                <a:ea typeface="Calibri" pitchFamily="34" charset="-122"/>
+                <a:cs typeface="Calibri" pitchFamily="34" charset="-120"/>
+              </a:rPr>
+              <a:t>Think — Pair — Share</a:t>
+            </a:r>
+            <a:endParaRPr lang="en-US" sz="1100" dirty="0"/>
+          </a:p>
+        </p:txBody>
+      </p:sp>
+      <p:sp>
+        <p:nvSpPr>
+          <p:cNvPr id="9" name="Text 7"/>
+          <p:cNvSpPr/>
+          <p:nvPr/>
+        </p:nvSpPr>
+        <p:spPr>
+          <a:xfrm>
+            <a:off x="731520" y="3566160"/>
+            <a:ext cx="6949440" cy="1188720"/>
+          </a:xfrm>
+          <a:prstGeom prst="rect">
+            <a:avLst/>
+          </a:prstGeom>
+          <a:noFill/>
+          <a:ln/>
+        </p:spPr>
+        <p:txBody>
+          <a:bodyPr wrap="square" rtlCol="0" anchor="ctr"/>
+          <a:lstStyle/>
+          <a:p>
+            <a:pPr marL="342900" indent="-342900">
+              <a:spcAft>
+                <a:spcPts val="600"/>
+              </a:spcAft>
+              <a:buSzPct val="100000"/>
+              <a:buChar char="•"/>
+            </a:pPr>
+            <a:r>
+              <a:rPr lang="en-US" sz="1400" dirty="0">
+                <a:solidFill>
+                  <a:srgbClr val="E5E2DC"/>
+                </a:solidFill>
+                <a:latin typeface="Calibri" pitchFamily="34" charset="0"/>
+                <a:ea typeface="Calibri" pitchFamily="34" charset="-122"/>
+                <a:cs typeface="Calibri" pitchFamily="34" charset="-120"/>
+              </a:rPr>
+              <a:t>How can an earthquake in one country affect another far away?</a:t>
+            </a:r>
+            <a:endParaRPr lang="en-US" sz="1400" dirty="0"/>
+          </a:p>
+          <a:p>
+            <a:pPr marL="342900" indent="-342900">
+              <a:spcAft>
+                <a:spcPts val="600"/>
+              </a:spcAft>
+              <a:buSzPct val="100000"/>
+              <a:buChar char="•"/>
+            </a:pPr>
+            <a:r>
+              <a:rPr lang="en-US" sz="1400" dirty="0">
+                <a:solidFill>
+                  <a:srgbClr val="E5E2DC"/>
+                </a:solidFill>
+                <a:latin typeface="Calibri" pitchFamily="34" charset="0"/>
+                <a:ea typeface="Calibri" pitchFamily="34" charset="-122"/>
+                <a:cs typeface="Calibri" pitchFamily="34" charset="-120"/>
+              </a:rPr>
+              <a:t>Why do some places have more earthquakes than others?</a:t>
+            </a:r>
+            <a:endParaRPr lang="en-US" sz="1400" dirty="0"/>
+          </a:p>
+          <a:p>
+            <a:pPr marL="342900" indent="-342900">
+              <a:spcAft>
+                <a:spcPts val="600"/>
+              </a:spcAft>
+              <a:buSzPct val="100000"/>
+              <a:buChar char="•"/>
+            </a:pPr>
+            <a:r>
+              <a:rPr lang="en-US" sz="1400" dirty="0">
+                <a:solidFill>
+                  <a:srgbClr val="E5E2DC"/>
+                </a:solidFill>
+                <a:latin typeface="Calibri" pitchFamily="34" charset="0"/>
+                <a:ea typeface="Calibri" pitchFamily="34" charset="-122"/>
+                <a:cs typeface="Calibri" pitchFamily="34" charset="-120"/>
+              </a:rPr>
+              <a:t>Has Nanjing ever experienced an earthquake?</a:t>
+            </a:r>
+            <a:endParaRPr lang="en-US" sz="1400" dirty="0"/>
           </a:p>
         </p:txBody>
       </p:sp>
@@ -1655,7 +2413,27 @@
         <p:spPr>
           <a:xfrm>
             <a:off x="0" y="0"/>
-            <a:ext cx="9144000" cy="54864"/>
+            <a:ext cx="9144000" cy="822960"/>
+          </a:xfrm>
+          <a:prstGeom prst="rect">
+            <a:avLst/>
+          </a:prstGeom>
+          <a:solidFill>
+            <a:srgbClr val="FFFFFF"/>
+          </a:solidFill>
+          <a:ln/>
+        </p:spPr>
+      </p:sp>
+      <p:sp>
+        <p:nvSpPr>
+          <p:cNvPr id="3" name="Shape 1"/>
+          <p:cNvSpPr/>
+          <p:nvPr/>
+        </p:nvSpPr>
+        <p:spPr>
+          <a:xfrm>
+            <a:off x="0" y="795528"/>
+            <a:ext cx="9144000" cy="27432"/>
           </a:xfrm>
           <a:prstGeom prst="rect">
             <a:avLst/>
@@ -1668,14 +2446,14 @@
       </p:sp>
       <p:sp>
         <p:nvSpPr>
-          <p:cNvPr id="3" name="Text 1"/>
-          <p:cNvSpPr/>
-          <p:nvPr/>
-        </p:nvSpPr>
-        <p:spPr>
-          <a:xfrm>
-            <a:off x="7772400" y="4709160"/>
-            <a:ext cx="1097280" cy="320040"/>
+          <p:cNvPr id="4" name="Text 2"/>
+          <p:cNvSpPr/>
+          <p:nvPr/>
+        </p:nvSpPr>
+        <p:spPr>
+          <a:xfrm>
+            <a:off x="640080" y="91440"/>
+            <a:ext cx="7863840" cy="640080"/>
           </a:xfrm>
           <a:prstGeom prst="rect">
             <a:avLst/>
@@ -1684,93 +2462,155 @@
           <a:ln/>
         </p:spPr>
         <p:txBody>
+          <a:bodyPr wrap="square" lIns="0" tIns="0" rIns="0" bIns="0" rtlCol="0" anchor="ctr"/>
+          <a:lstStyle/>
+          <a:p>
+            <a:pPr indent="0" marL="0">
+              <a:buNone/>
+            </a:pPr>
+            <a:r>
+              <a:rPr lang="en-US" sz="2200" b="1" dirty="0">
+                <a:solidFill>
+                  <a:srgbClr val="1B2A4A"/>
+                </a:solidFill>
+                <a:latin typeface="Georgia" pitchFamily="34" charset="0"/>
+                <a:ea typeface="Georgia" pitchFamily="34" charset="-122"/>
+                <a:cs typeface="Georgia" pitchFamily="34" charset="-120"/>
+              </a:rPr>
+              <a:t>What Causes Earthquakes?</a:t>
+            </a:r>
+            <a:endParaRPr lang="en-US" sz="2200" dirty="0"/>
+          </a:p>
+        </p:txBody>
+      </p:sp>
+      <p:sp>
+        <p:nvSpPr>
+          <p:cNvPr id="5" name="Text 3"/>
+          <p:cNvSpPr/>
+          <p:nvPr/>
+        </p:nvSpPr>
+        <p:spPr>
+          <a:xfrm>
+            <a:off x="640080" y="1005840"/>
+            <a:ext cx="7863840" cy="2926080"/>
+          </a:xfrm>
+          <a:prstGeom prst="rect">
+            <a:avLst/>
+          </a:prstGeom>
+          <a:noFill/>
+          <a:ln/>
+        </p:spPr>
+        <p:txBody>
           <a:bodyPr wrap="square" rtlCol="0" anchor="ctr"/>
           <a:lstStyle/>
           <a:p>
-            <a:pPr algn="r" indent="0" marL="0">
-              <a:buNone/>
-            </a:pPr>
-            <a:r>
-              <a:rPr lang="en-US" sz="900" dirty="0">
-                <a:solidFill>
-                  <a:srgbClr val="6B6660"/>
+            <a:pPr marL="342900" indent="-342900">
+              <a:spcAft>
+                <a:spcPts val="800"/>
+              </a:spcAft>
+              <a:buSzPct val="100000"/>
+              <a:buChar char="•"/>
+            </a:pPr>
+            <a:r>
+              <a:rPr lang="en-US" sz="1600" dirty="0">
+                <a:solidFill>
+                  <a:srgbClr val="3D3A36"/>
                 </a:solidFill>
                 <a:latin typeface="Calibri" pitchFamily="34" charset="0"/>
                 <a:ea typeface="Calibri" pitchFamily="34" charset="-122"/>
                 <a:cs typeface="Calibri" pitchFamily="34" charset="-120"/>
               </a:rPr>
-              <a:t>3 / 5</a:t>
-            </a:r>
-            <a:endParaRPr lang="en-US" sz="900" dirty="0"/>
-          </a:p>
-        </p:txBody>
-      </p:sp>
-      <p:sp>
-        <p:nvSpPr>
-          <p:cNvPr id="4" name="Text 2"/>
-          <p:cNvSpPr/>
-          <p:nvPr/>
-        </p:nvSpPr>
-        <p:spPr>
-          <a:xfrm>
-            <a:off x="457200" y="274320"/>
-            <a:ext cx="8229600" cy="640080"/>
-          </a:xfrm>
-          <a:prstGeom prst="rect">
-            <a:avLst/>
-          </a:prstGeom>
-          <a:noFill/>
-          <a:ln/>
-        </p:spPr>
-        <p:txBody>
-          <a:bodyPr wrap="square" rtlCol="0" anchor="ctr"/>
-          <a:lstStyle/>
-          <a:p>
-            <a:pPr indent="0" marL="0">
-              <a:buNone/>
-            </a:pPr>
-            <a:r>
-              <a:rPr lang="en-US" sz="2600" b="1" dirty="0">
-                <a:solidFill>
-                  <a:srgbClr val="1B2A4A"/>
-                </a:solidFill>
-                <a:latin typeface="Georgia" pitchFamily="34" charset="0"/>
-                <a:ea typeface="Georgia" pitchFamily="34" charset="-122"/>
-                <a:cs typeface="Georgia" pitchFamily="34" charset="-120"/>
-              </a:rPr>
-              <a:t>Earthquakes</a:t>
-            </a:r>
-            <a:endParaRPr lang="en-US" sz="2600" dirty="0"/>
-          </a:p>
-        </p:txBody>
-      </p:sp>
-      <p:sp>
-        <p:nvSpPr>
-          <p:cNvPr id="5" name="Shape 3"/>
-          <p:cNvSpPr/>
-          <p:nvPr/>
-        </p:nvSpPr>
-        <p:spPr>
-          <a:xfrm>
-            <a:off x="457200" y="1188720"/>
-            <a:ext cx="2560320" cy="1828800"/>
+              <a:t>Plates are always moving, but friction locks them together.</a:t>
+            </a:r>
+            <a:endParaRPr lang="en-US" sz="1600" dirty="0"/>
+          </a:p>
+          <a:p>
+            <a:pPr marL="342900" indent="-342900">
+              <a:spcAft>
+                <a:spcPts val="800"/>
+              </a:spcAft>
+              <a:buSzPct val="100000"/>
+              <a:buChar char="•"/>
+            </a:pPr>
+            <a:r>
+              <a:rPr lang="en-US" sz="1600" dirty="0">
+                <a:solidFill>
+                  <a:srgbClr val="3D3A36"/>
+                </a:solidFill>
+                <a:latin typeface="Calibri" pitchFamily="34" charset="0"/>
+                <a:ea typeface="Calibri" pitchFamily="34" charset="-122"/>
+                <a:cs typeface="Calibri" pitchFamily="34" charset="-120"/>
+              </a:rPr>
+              <a:t>Stress builds up over time at plate boundaries.</a:t>
+            </a:r>
+            <a:endParaRPr lang="en-US" sz="1600" dirty="0"/>
+          </a:p>
+          <a:p>
+            <a:pPr marL="342900" indent="-342900">
+              <a:spcAft>
+                <a:spcPts val="800"/>
+              </a:spcAft>
+              <a:buSzPct val="100000"/>
+              <a:buChar char="•"/>
+            </a:pPr>
+            <a:r>
+              <a:rPr lang="en-US" sz="1600" dirty="0">
+                <a:solidFill>
+                  <a:srgbClr val="3D3A36"/>
+                </a:solidFill>
+                <a:latin typeface="Calibri" pitchFamily="34" charset="0"/>
+                <a:ea typeface="Calibri" pitchFamily="34" charset="-122"/>
+                <a:cs typeface="Calibri" pitchFamily="34" charset="-120"/>
+              </a:rPr>
+              <a:t>When stress is too great, plates suddenly slip — an earthquake.</a:t>
+            </a:r>
+            <a:endParaRPr lang="en-US" sz="1600" dirty="0"/>
+          </a:p>
+          <a:p>
+            <a:pPr marL="342900" indent="-342900">
+              <a:spcAft>
+                <a:spcPts val="800"/>
+              </a:spcAft>
+              <a:buSzPct val="100000"/>
+              <a:buChar char="•"/>
+            </a:pPr>
+            <a:r>
+              <a:rPr lang="en-US" sz="1600" dirty="0">
+                <a:solidFill>
+                  <a:srgbClr val="3D3A36"/>
+                </a:solidFill>
+                <a:latin typeface="Calibri" pitchFamily="34" charset="0"/>
+                <a:ea typeface="Calibri" pitchFamily="34" charset="-122"/>
+                <a:cs typeface="Calibri" pitchFamily="34" charset="-120"/>
+              </a:rPr>
+              <a:t>Focus = underground start point. Epicentre = point above on surface.</a:t>
+            </a:r>
+            <a:endParaRPr lang="en-US" sz="1600" dirty="0"/>
+          </a:p>
+        </p:txBody>
+      </p:sp>
+      <p:sp>
+        <p:nvSpPr>
+          <p:cNvPr id="6" name="Shape 4"/>
+          <p:cNvSpPr/>
+          <p:nvPr/>
+        </p:nvSpPr>
+        <p:spPr>
+          <a:xfrm>
+            <a:off x="640080" y="4114800"/>
+            <a:ext cx="7863840" cy="731520"/>
           </a:xfrm>
           <a:prstGeom prst="rect">
             <a:avLst/>
           </a:prstGeom>
           <a:solidFill>
-            <a:srgbClr val="FFFFFF"/>
+            <a:srgbClr val="E8F5F3"/>
           </a:solidFill>
-          <a:ln w="12700">
-            <a:solidFill>
-              <a:srgbClr val="E5E2DC"/>
-            </a:solidFill>
-            <a:prstDash val="solid"/>
-          </a:ln>
+          <a:ln/>
           <a:effectLst>
-            <a:outerShdw sx="100000" sy="100000" kx="0" ky="0" algn="bl" rotWithShape="0" blurRad="50800" dist="25400" dir="8100000">
+            <a:outerShdw sx="100000" sy="100000" kx="0" ky="0" algn="bl" rotWithShape="0" blurRad="76200" dist="25400" dir="8100000">
               <a:srgbClr val="000000">
-                <a:alpha val="10000"/>
+                <a:alpha val="12000"/>
               </a:srgbClr>
             </a:outerShdw>
           </a:effectLst>
@@ -1778,14 +2618,14 @@
       </p:sp>
       <p:sp>
         <p:nvSpPr>
-          <p:cNvPr id="6" name="Shape 4"/>
-          <p:cNvSpPr/>
-          <p:nvPr/>
-        </p:nvSpPr>
-        <p:spPr>
-          <a:xfrm>
-            <a:off x="457200" y="1188720"/>
-            <a:ext cx="2560320" cy="54864"/>
+          <p:cNvPr id="7" name="Shape 5"/>
+          <p:cNvSpPr/>
+          <p:nvPr/>
+        </p:nvSpPr>
+        <p:spPr>
+          <a:xfrm>
+            <a:off x="640080" y="4114800"/>
+            <a:ext cx="64008" cy="731520"/>
           </a:xfrm>
           <a:prstGeom prst="rect">
             <a:avLst/>
@@ -1798,14 +2638,14 @@
       </p:sp>
       <p:sp>
         <p:nvSpPr>
-          <p:cNvPr id="7" name="Text 5"/>
-          <p:cNvSpPr/>
-          <p:nvPr/>
-        </p:nvSpPr>
-        <p:spPr>
-          <a:xfrm>
-            <a:off x="594360" y="1325880"/>
-            <a:ext cx="2286000" cy="365760"/>
+          <p:cNvPr id="8" name="Text 6"/>
+          <p:cNvSpPr/>
+          <p:nvPr/>
+        </p:nvSpPr>
+        <p:spPr>
+          <a:xfrm>
+            <a:off x="914400" y="4160520"/>
+            <a:ext cx="7406640" cy="640080"/>
           </a:xfrm>
           <a:prstGeom prst="rect">
             <a:avLst/>
@@ -1821,316 +2661,17 @@
               <a:buNone/>
             </a:pPr>
             <a:r>
-              <a:rPr lang="en-US" sz="1400" b="1" dirty="0">
-                <a:solidFill>
-                  <a:srgbClr val="1B2A4A"/>
+              <a:rPr lang="en-US" sz="1300" i="1" dirty="0">
+                <a:solidFill>
+                  <a:srgbClr val="3D3A36"/>
                 </a:solidFill>
                 <a:latin typeface="Calibri" pitchFamily="34" charset="0"/>
                 <a:ea typeface="Calibri" pitchFamily="34" charset="-122"/>
                 <a:cs typeface="Calibri" pitchFamily="34" charset="-120"/>
               </a:rPr>
-              <a:t>How They Happen</a:t>
-            </a:r>
-            <a:endParaRPr lang="en-US" sz="1400" dirty="0"/>
-          </a:p>
-        </p:txBody>
-      </p:sp>
-      <p:sp>
-        <p:nvSpPr>
-          <p:cNvPr id="8" name="Text 6"/>
-          <p:cNvSpPr/>
-          <p:nvPr/>
-        </p:nvSpPr>
-        <p:spPr>
-          <a:xfrm>
-            <a:off x="594360" y="1737360"/>
-            <a:ext cx="2286000" cy="1097280"/>
-          </a:xfrm>
-          <a:prstGeom prst="rect">
-            <a:avLst/>
-          </a:prstGeom>
-          <a:noFill/>
-          <a:ln/>
-        </p:spPr>
-        <p:txBody>
-          <a:bodyPr wrap="square" rtlCol="0" anchor="t"/>
-          <a:lstStyle/>
-          <a:p>
-            <a:pPr indent="0" marL="0">
-              <a:buNone/>
-            </a:pPr>
-            <a:r>
-              <a:rPr lang="en-US" sz="1100" dirty="0">
-                <a:solidFill>
-                  <a:srgbClr val="3D3A36"/>
-                </a:solidFill>
-                <a:latin typeface="Calibri" pitchFamily="34" charset="0"/>
-                <a:ea typeface="Calibri" pitchFamily="34" charset="-122"/>
-                <a:cs typeface="Calibri" pitchFamily="34" charset="-120"/>
-              </a:rPr>
-              <a:t>Plates moving create friction. Pressure builds up. When plates suddenly slip, energy is released as seismic waves. The focus is where it starts underground; the epicentre is directly above on the surface.</a:t>
-            </a:r>
-            <a:endParaRPr lang="en-US" sz="1100" dirty="0"/>
-          </a:p>
-        </p:txBody>
-      </p:sp>
-      <p:sp>
-        <p:nvSpPr>
-          <p:cNvPr id="9" name="Shape 7"/>
-          <p:cNvSpPr/>
-          <p:nvPr/>
-        </p:nvSpPr>
-        <p:spPr>
-          <a:xfrm>
-            <a:off x="3291840" y="1188720"/>
-            <a:ext cx="2560320" cy="1828800"/>
-          </a:xfrm>
-          <a:prstGeom prst="rect">
-            <a:avLst/>
-          </a:prstGeom>
-          <a:solidFill>
-            <a:srgbClr val="FFFFFF"/>
-          </a:solidFill>
-          <a:ln w="12700">
-            <a:solidFill>
-              <a:srgbClr val="E5E2DC"/>
-            </a:solidFill>
-            <a:prstDash val="solid"/>
-          </a:ln>
-          <a:effectLst>
-            <a:outerShdw sx="100000" sy="100000" kx="0" ky="0" algn="bl" rotWithShape="0" blurRad="50800" dist="25400" dir="8100000">
-              <a:srgbClr val="000000">
-                <a:alpha val="10000"/>
-              </a:srgbClr>
-            </a:outerShdw>
-          </a:effectLst>
-        </p:spPr>
-      </p:sp>
-      <p:sp>
-        <p:nvSpPr>
-          <p:cNvPr id="10" name="Shape 8"/>
-          <p:cNvSpPr/>
-          <p:nvPr/>
-        </p:nvSpPr>
-        <p:spPr>
-          <a:xfrm>
-            <a:off x="3291840" y="1188720"/>
-            <a:ext cx="2560320" cy="54864"/>
-          </a:xfrm>
-          <a:prstGeom prst="rect">
-            <a:avLst/>
-          </a:prstGeom>
-          <a:solidFill>
-            <a:srgbClr val="2A9D8F"/>
-          </a:solidFill>
-          <a:ln/>
-        </p:spPr>
-      </p:sp>
-      <p:sp>
-        <p:nvSpPr>
-          <p:cNvPr id="11" name="Text 9"/>
-          <p:cNvSpPr/>
-          <p:nvPr/>
-        </p:nvSpPr>
-        <p:spPr>
-          <a:xfrm>
-            <a:off x="3429000" y="1325880"/>
-            <a:ext cx="2286000" cy="365760"/>
-          </a:xfrm>
-          <a:prstGeom prst="rect">
-            <a:avLst/>
-          </a:prstGeom>
-          <a:noFill/>
-          <a:ln/>
-        </p:spPr>
-        <p:txBody>
-          <a:bodyPr wrap="square" rtlCol="0" anchor="ctr"/>
-          <a:lstStyle/>
-          <a:p>
-            <a:pPr indent="0" marL="0">
-              <a:buNone/>
-            </a:pPr>
-            <a:r>
-              <a:rPr lang="en-US" sz="1400" b="1" dirty="0">
-                <a:solidFill>
-                  <a:srgbClr val="1B2A4A"/>
-                </a:solidFill>
-                <a:latin typeface="Calibri" pitchFamily="34" charset="0"/>
-                <a:ea typeface="Calibri" pitchFamily="34" charset="-122"/>
-                <a:cs typeface="Calibri" pitchFamily="34" charset="-120"/>
-              </a:rPr>
-              <a:t>Measuring Earthquakes</a:t>
-            </a:r>
-            <a:endParaRPr lang="en-US" sz="1400" dirty="0"/>
-          </a:p>
-        </p:txBody>
-      </p:sp>
-      <p:sp>
-        <p:nvSpPr>
-          <p:cNvPr id="12" name="Text 10"/>
-          <p:cNvSpPr/>
-          <p:nvPr/>
-        </p:nvSpPr>
-        <p:spPr>
-          <a:xfrm>
-            <a:off x="3429000" y="1737360"/>
-            <a:ext cx="2286000" cy="1097280"/>
-          </a:xfrm>
-          <a:prstGeom prst="rect">
-            <a:avLst/>
-          </a:prstGeom>
-          <a:noFill/>
-          <a:ln/>
-        </p:spPr>
-        <p:txBody>
-          <a:bodyPr wrap="square" rtlCol="0" anchor="t"/>
-          <a:lstStyle/>
-          <a:p>
-            <a:pPr indent="0" marL="0">
-              <a:buNone/>
-            </a:pPr>
-            <a:r>
-              <a:rPr lang="en-US" sz="1100" dirty="0">
-                <a:solidFill>
-                  <a:srgbClr val="3D3A36"/>
-                </a:solidFill>
-                <a:latin typeface="Calibri" pitchFamily="34" charset="0"/>
-                <a:ea typeface="Calibri" pitchFamily="34" charset="-122"/>
-                <a:cs typeface="Calibri" pitchFamily="34" charset="-120"/>
-              </a:rPr>
-              <a:t>The Richter Scale measures magnitude (energy released). Each whole number is ~30× more energy. The Mercalli Scale measures intensity (damage caused). Seismographs detect seismic waves.</a:t>
-            </a:r>
-            <a:endParaRPr lang="en-US" sz="1100" dirty="0"/>
-          </a:p>
-        </p:txBody>
-      </p:sp>
-      <p:sp>
-        <p:nvSpPr>
-          <p:cNvPr id="13" name="Shape 11"/>
-          <p:cNvSpPr/>
-          <p:nvPr/>
-        </p:nvSpPr>
-        <p:spPr>
-          <a:xfrm>
-            <a:off x="6126480" y="1188720"/>
-            <a:ext cx="2560320" cy="1828800"/>
-          </a:xfrm>
-          <a:prstGeom prst="rect">
-            <a:avLst/>
-          </a:prstGeom>
-          <a:solidFill>
-            <a:srgbClr val="FFFFFF"/>
-          </a:solidFill>
-          <a:ln w="12700">
-            <a:solidFill>
-              <a:srgbClr val="E5E2DC"/>
-            </a:solidFill>
-            <a:prstDash val="solid"/>
-          </a:ln>
-          <a:effectLst>
-            <a:outerShdw sx="100000" sy="100000" kx="0" ky="0" algn="bl" rotWithShape="0" blurRad="50800" dist="25400" dir="8100000">
-              <a:srgbClr val="000000">
-                <a:alpha val="10000"/>
-              </a:srgbClr>
-            </a:outerShdw>
-          </a:effectLst>
-        </p:spPr>
-      </p:sp>
-      <p:sp>
-        <p:nvSpPr>
-          <p:cNvPr id="14" name="Shape 12"/>
-          <p:cNvSpPr/>
-          <p:nvPr/>
-        </p:nvSpPr>
-        <p:spPr>
-          <a:xfrm>
-            <a:off x="6126480" y="1188720"/>
-            <a:ext cx="2560320" cy="54864"/>
-          </a:xfrm>
-          <a:prstGeom prst="rect">
-            <a:avLst/>
-          </a:prstGeom>
-          <a:solidFill>
-            <a:srgbClr val="2A9D8F"/>
-          </a:solidFill>
-          <a:ln/>
-        </p:spPr>
-      </p:sp>
-      <p:sp>
-        <p:nvSpPr>
-          <p:cNvPr id="15" name="Text 13"/>
-          <p:cNvSpPr/>
-          <p:nvPr/>
-        </p:nvSpPr>
-        <p:spPr>
-          <a:xfrm>
-            <a:off x="6263640" y="1325880"/>
-            <a:ext cx="2286000" cy="365760"/>
-          </a:xfrm>
-          <a:prstGeom prst="rect">
-            <a:avLst/>
-          </a:prstGeom>
-          <a:noFill/>
-          <a:ln/>
-        </p:spPr>
-        <p:txBody>
-          <a:bodyPr wrap="square" rtlCol="0" anchor="ctr"/>
-          <a:lstStyle/>
-          <a:p>
-            <a:pPr indent="0" marL="0">
-              <a:buNone/>
-            </a:pPr>
-            <a:r>
-              <a:rPr lang="en-US" sz="1400" b="1" dirty="0">
-                <a:solidFill>
-                  <a:srgbClr val="1B2A4A"/>
-                </a:solidFill>
-                <a:latin typeface="Calibri" pitchFamily="34" charset="0"/>
-                <a:ea typeface="Calibri" pitchFamily="34" charset="-122"/>
-                <a:cs typeface="Calibri" pitchFamily="34" charset="-120"/>
-              </a:rPr>
-              <a:t>Effects</a:t>
-            </a:r>
-            <a:endParaRPr lang="en-US" sz="1400" dirty="0"/>
-          </a:p>
-        </p:txBody>
-      </p:sp>
-      <p:sp>
-        <p:nvSpPr>
-          <p:cNvPr id="16" name="Text 14"/>
-          <p:cNvSpPr/>
-          <p:nvPr/>
-        </p:nvSpPr>
-        <p:spPr>
-          <a:xfrm>
-            <a:off x="6263640" y="1737360"/>
-            <a:ext cx="2286000" cy="1097280"/>
-          </a:xfrm>
-          <a:prstGeom prst="rect">
-            <a:avLst/>
-          </a:prstGeom>
-          <a:noFill/>
-          <a:ln/>
-        </p:spPr>
-        <p:txBody>
-          <a:bodyPr wrap="square" rtlCol="0" anchor="t"/>
-          <a:lstStyle/>
-          <a:p>
-            <a:pPr indent="0" marL="0">
-              <a:buNone/>
-            </a:pPr>
-            <a:r>
-              <a:rPr lang="en-US" sz="1100" dirty="0">
-                <a:solidFill>
-                  <a:srgbClr val="3D3A36"/>
-                </a:solidFill>
-                <a:latin typeface="Calibri" pitchFamily="34" charset="0"/>
-                <a:ea typeface="Calibri" pitchFamily="34" charset="-122"/>
-                <a:cs typeface="Calibri" pitchFamily="34" charset="-120"/>
-              </a:rPr>
-              <a:t>Shaking, building collapse, landslides, tsunamis, fires from broken gas pipes. More damage in poorer countries (weaker buildings). Aftershocks can follow for days or weeks.</a:t>
-            </a:r>
-            <a:endParaRPr lang="en-US" sz="1100" dirty="0"/>
+              <a:t>The Tan-Lu Fault passes near Nanjing — the city has experienced earthquakes throughout history.</a:t>
+            </a:r>
+            <a:endParaRPr lang="en-US" sz="1300" dirty="0"/>
           </a:p>
         </p:txBody>
       </p:sp>
@@ -2175,7 +2716,27 @@
         <p:spPr>
           <a:xfrm>
             <a:off x="0" y="0"/>
-            <a:ext cx="9144000" cy="54864"/>
+            <a:ext cx="9144000" cy="822960"/>
+          </a:xfrm>
+          <a:prstGeom prst="rect">
+            <a:avLst/>
+          </a:prstGeom>
+          <a:solidFill>
+            <a:srgbClr val="FFFFFF"/>
+          </a:solidFill>
+          <a:ln/>
+        </p:spPr>
+      </p:sp>
+      <p:sp>
+        <p:nvSpPr>
+          <p:cNvPr id="3" name="Shape 1"/>
+          <p:cNvSpPr/>
+          <p:nvPr/>
+        </p:nvSpPr>
+        <p:spPr>
+          <a:xfrm>
+            <a:off x="0" y="795528"/>
+            <a:ext cx="9144000" cy="27432"/>
           </a:xfrm>
           <a:prstGeom prst="rect">
             <a:avLst/>
@@ -2188,14 +2749,14 @@
       </p:sp>
       <p:sp>
         <p:nvSpPr>
-          <p:cNvPr id="3" name="Text 1"/>
-          <p:cNvSpPr/>
-          <p:nvPr/>
-        </p:nvSpPr>
-        <p:spPr>
-          <a:xfrm>
-            <a:off x="7772400" y="4709160"/>
-            <a:ext cx="1097280" cy="320040"/>
+          <p:cNvPr id="4" name="Text 2"/>
+          <p:cNvSpPr/>
+          <p:nvPr/>
+        </p:nvSpPr>
+        <p:spPr>
+          <a:xfrm>
+            <a:off x="640080" y="91440"/>
+            <a:ext cx="7863840" cy="640080"/>
           </a:xfrm>
           <a:prstGeom prst="rect">
             <a:avLst/>
@@ -2204,53 +2765,14 @@
           <a:ln/>
         </p:spPr>
         <p:txBody>
-          <a:bodyPr wrap="square" rtlCol="0" anchor="ctr"/>
-          <a:lstStyle/>
-          <a:p>
-            <a:pPr algn="r" indent="0" marL="0">
-              <a:buNone/>
-            </a:pPr>
-            <a:r>
-              <a:rPr lang="en-US" sz="900" dirty="0">
-                <a:solidFill>
-                  <a:srgbClr val="6B6660"/>
-                </a:solidFill>
-                <a:latin typeface="Calibri" pitchFamily="34" charset="0"/>
-                <a:ea typeface="Calibri" pitchFamily="34" charset="-122"/>
-                <a:cs typeface="Calibri" pitchFamily="34" charset="-120"/>
-              </a:rPr>
-              <a:t>4 / 5</a:t>
-            </a:r>
-            <a:endParaRPr lang="en-US" sz="900" dirty="0"/>
-          </a:p>
-        </p:txBody>
-      </p:sp>
-      <p:sp>
-        <p:nvSpPr>
-          <p:cNvPr id="4" name="Text 2"/>
-          <p:cNvSpPr/>
-          <p:nvPr/>
-        </p:nvSpPr>
-        <p:spPr>
-          <a:xfrm>
-            <a:off x="457200" y="274320"/>
-            <a:ext cx="8229600" cy="640080"/>
-          </a:xfrm>
-          <a:prstGeom prst="rect">
-            <a:avLst/>
-          </a:prstGeom>
-          <a:noFill/>
-          <a:ln/>
-        </p:spPr>
-        <p:txBody>
-          <a:bodyPr wrap="square" rtlCol="0" anchor="ctr"/>
+          <a:bodyPr wrap="square" lIns="0" tIns="0" rIns="0" bIns="0" rtlCol="0" anchor="ctr"/>
           <a:lstStyle/>
           <a:p>
             <a:pPr indent="0" marL="0">
               <a:buNone/>
             </a:pPr>
             <a:r>
-              <a:rPr lang="en-US" sz="2600" b="1" dirty="0">
+              <a:rPr lang="en-US" sz="2200" b="1" dirty="0">
                 <a:solidFill>
                   <a:srgbClr val="1B2A4A"/>
                 </a:solidFill>
@@ -2258,402 +2780,840 @@
                 <a:ea typeface="Georgia" pitchFamily="34" charset="-122"/>
                 <a:cs typeface="Georgia" pitchFamily="34" charset="-120"/>
               </a:rPr>
-              <a:t>Volcanoes</a:t>
-            </a:r>
-            <a:endParaRPr lang="en-US" sz="2600" dirty="0"/>
-          </a:p>
-        </p:txBody>
-      </p:sp>
-      <p:sp>
-        <p:nvSpPr>
-          <p:cNvPr id="5" name="Shape 3"/>
-          <p:cNvSpPr/>
-          <p:nvPr/>
-        </p:nvSpPr>
-        <p:spPr>
-          <a:xfrm>
-            <a:off x="457200" y="1188720"/>
-            <a:ext cx="2560320" cy="1828800"/>
-          </a:xfrm>
-          <a:prstGeom prst="rect">
-            <a:avLst/>
-          </a:prstGeom>
-          <a:solidFill>
-            <a:srgbClr val="FFFFFF"/>
-          </a:solidFill>
-          <a:ln w="12700">
-            <a:solidFill>
-              <a:srgbClr val="E5E2DC"/>
-            </a:solidFill>
-            <a:prstDash val="solid"/>
-          </a:ln>
-          <a:effectLst>
-            <a:outerShdw sx="100000" sy="100000" kx="0" ky="0" algn="bl" rotWithShape="0" blurRad="50800" dist="25400" dir="8100000">
-              <a:srgbClr val="000000">
-                <a:alpha val="10000"/>
-              </a:srgbClr>
-            </a:outerShdw>
-          </a:effectLst>
-        </p:spPr>
-      </p:sp>
-      <p:sp>
-        <p:nvSpPr>
-          <p:cNvPr id="6" name="Shape 4"/>
-          <p:cNvSpPr/>
-          <p:nvPr/>
-        </p:nvSpPr>
-        <p:spPr>
-          <a:xfrm>
-            <a:off x="457200" y="1188720"/>
-            <a:ext cx="2560320" cy="54864"/>
-          </a:xfrm>
-          <a:prstGeom prst="rect">
-            <a:avLst/>
-          </a:prstGeom>
-          <a:solidFill>
-            <a:srgbClr val="2A9D8F"/>
-          </a:solidFill>
-          <a:ln/>
-        </p:spPr>
-      </p:sp>
-      <p:sp>
-        <p:nvSpPr>
-          <p:cNvPr id="7" name="Text 5"/>
-          <p:cNvSpPr/>
-          <p:nvPr/>
-        </p:nvSpPr>
-        <p:spPr>
-          <a:xfrm>
-            <a:off x="594360" y="1325880"/>
-            <a:ext cx="2286000" cy="365760"/>
-          </a:xfrm>
-          <a:prstGeom prst="rect">
-            <a:avLst/>
-          </a:prstGeom>
-          <a:noFill/>
-          <a:ln/>
-        </p:spPr>
-        <p:txBody>
-          <a:bodyPr wrap="square" rtlCol="0" anchor="ctr"/>
-          <a:lstStyle/>
-          <a:p>
-            <a:pPr indent="0" marL="0">
-              <a:buNone/>
-            </a:pPr>
-            <a:r>
-              <a:rPr lang="en-US" sz="1400" b="1" dirty="0">
-                <a:solidFill>
-                  <a:srgbClr val="1B2A4A"/>
-                </a:solidFill>
-                <a:latin typeface="Calibri" pitchFamily="34" charset="0"/>
-                <a:ea typeface="Calibri" pitchFamily="34" charset="-122"/>
-                <a:cs typeface="Calibri" pitchFamily="34" charset="-120"/>
-              </a:rPr>
-              <a:t>How They Form</a:t>
-            </a:r>
-            <a:endParaRPr lang="en-US" sz="1400" dirty="0"/>
-          </a:p>
-        </p:txBody>
-      </p:sp>
-      <p:sp>
-        <p:nvSpPr>
-          <p:cNvPr id="8" name="Text 6"/>
-          <p:cNvSpPr/>
-          <p:nvPr/>
-        </p:nvSpPr>
-        <p:spPr>
-          <a:xfrm>
-            <a:off x="594360" y="1737360"/>
-            <a:ext cx="2286000" cy="1097280"/>
-          </a:xfrm>
-          <a:prstGeom prst="rect">
-            <a:avLst/>
-          </a:prstGeom>
-          <a:noFill/>
-          <a:ln/>
-        </p:spPr>
-        <p:txBody>
-          <a:bodyPr wrap="square" rtlCol="0" anchor="t"/>
-          <a:lstStyle/>
-          <a:p>
-            <a:pPr indent="0" marL="0">
-              <a:buNone/>
-            </a:pPr>
-            <a:r>
-              <a:rPr lang="en-US" sz="1100" dirty="0">
-                <a:solidFill>
-                  <a:srgbClr val="3D3A36"/>
-                </a:solidFill>
-                <a:latin typeface="Calibri" pitchFamily="34" charset="0"/>
-                <a:ea typeface="Calibri" pitchFamily="34" charset="-122"/>
-                <a:cs typeface="Calibri" pitchFamily="34" charset="-120"/>
-              </a:rPr>
-              <a:t>At convergent boundaries: subducting plate melts → magma rises. At divergent boundaries: magma fills the gap. At hotspots: magma burns through the plate (e.g. Hawaii).</a:t>
-            </a:r>
-            <a:endParaRPr lang="en-US" sz="1100" dirty="0"/>
-          </a:p>
-        </p:txBody>
-      </p:sp>
-      <p:sp>
-        <p:nvSpPr>
-          <p:cNvPr id="9" name="Shape 7"/>
-          <p:cNvSpPr/>
-          <p:nvPr/>
-        </p:nvSpPr>
-        <p:spPr>
-          <a:xfrm>
-            <a:off x="3291840" y="1188720"/>
-            <a:ext cx="2560320" cy="1828800"/>
-          </a:xfrm>
-          <a:prstGeom prst="rect">
-            <a:avLst/>
-          </a:prstGeom>
-          <a:solidFill>
-            <a:srgbClr val="FFFFFF"/>
-          </a:solidFill>
-          <a:ln w="12700">
-            <a:solidFill>
-              <a:srgbClr val="E5E2DC"/>
-            </a:solidFill>
-            <a:prstDash val="solid"/>
-          </a:ln>
-          <a:effectLst>
-            <a:outerShdw sx="100000" sy="100000" kx="0" ky="0" algn="bl" rotWithShape="0" blurRad="50800" dist="25400" dir="8100000">
-              <a:srgbClr val="000000">
-                <a:alpha val="10000"/>
-              </a:srgbClr>
-            </a:outerShdw>
-          </a:effectLst>
-        </p:spPr>
-      </p:sp>
-      <p:sp>
-        <p:nvSpPr>
-          <p:cNvPr id="10" name="Shape 8"/>
-          <p:cNvSpPr/>
-          <p:nvPr/>
-        </p:nvSpPr>
-        <p:spPr>
-          <a:xfrm>
-            <a:off x="3291840" y="1188720"/>
-            <a:ext cx="2560320" cy="54864"/>
-          </a:xfrm>
-          <a:prstGeom prst="rect">
-            <a:avLst/>
-          </a:prstGeom>
-          <a:solidFill>
-            <a:srgbClr val="2A9D8F"/>
-          </a:solidFill>
-          <a:ln/>
-        </p:spPr>
-      </p:sp>
-      <p:sp>
-        <p:nvSpPr>
-          <p:cNvPr id="11" name="Text 9"/>
-          <p:cNvSpPr/>
-          <p:nvPr/>
-        </p:nvSpPr>
-        <p:spPr>
-          <a:xfrm>
-            <a:off x="3429000" y="1325880"/>
-            <a:ext cx="2286000" cy="365760"/>
-          </a:xfrm>
-          <a:prstGeom prst="rect">
-            <a:avLst/>
-          </a:prstGeom>
-          <a:noFill/>
-          <a:ln/>
-        </p:spPr>
-        <p:txBody>
-          <a:bodyPr wrap="square" rtlCol="0" anchor="ctr"/>
-          <a:lstStyle/>
-          <a:p>
-            <a:pPr indent="0" marL="0">
-              <a:buNone/>
-            </a:pPr>
-            <a:r>
-              <a:rPr lang="en-US" sz="1400" b="1" dirty="0">
-                <a:solidFill>
-                  <a:srgbClr val="1B2A4A"/>
-                </a:solidFill>
-                <a:latin typeface="Calibri" pitchFamily="34" charset="0"/>
-                <a:ea typeface="Calibri" pitchFamily="34" charset="-122"/>
-                <a:cs typeface="Calibri" pitchFamily="34" charset="-120"/>
-              </a:rPr>
-              <a:t>Types of Eruption</a:t>
-            </a:r>
-            <a:endParaRPr lang="en-US" sz="1400" dirty="0"/>
-          </a:p>
-        </p:txBody>
-      </p:sp>
-      <p:sp>
-        <p:nvSpPr>
-          <p:cNvPr id="12" name="Text 10"/>
-          <p:cNvSpPr/>
-          <p:nvPr/>
-        </p:nvSpPr>
-        <p:spPr>
-          <a:xfrm>
-            <a:off x="3429000" y="1737360"/>
-            <a:ext cx="2286000" cy="1097280"/>
-          </a:xfrm>
-          <a:prstGeom prst="rect">
-            <a:avLst/>
-          </a:prstGeom>
-          <a:noFill/>
-          <a:ln/>
-        </p:spPr>
-        <p:txBody>
-          <a:bodyPr wrap="square" rtlCol="0" anchor="t"/>
-          <a:lstStyle/>
-          <a:p>
-            <a:pPr indent="0" marL="0">
-              <a:buNone/>
-            </a:pPr>
-            <a:r>
-              <a:rPr lang="en-US" sz="1100" dirty="0">
-                <a:solidFill>
-                  <a:srgbClr val="3D3A36"/>
-                </a:solidFill>
-                <a:latin typeface="Calibri" pitchFamily="34" charset="0"/>
-                <a:ea typeface="Calibri" pitchFamily="34" charset="-122"/>
-                <a:cs typeface="Calibri" pitchFamily="34" charset="-120"/>
-              </a:rPr>
-              <a:t>Explosive: thick, sticky lava. Violent eruptions, ash clouds, pyroclastic flows. Example: Mount St. Helens. Effusive: thin, runny lava. Gentle lava flows. Example: Kilauea, Hawaii.</a:t>
-            </a:r>
-            <a:endParaRPr lang="en-US" sz="1100" dirty="0"/>
-          </a:p>
-        </p:txBody>
-      </p:sp>
-      <p:sp>
-        <p:nvSpPr>
-          <p:cNvPr id="13" name="Shape 11"/>
-          <p:cNvSpPr/>
-          <p:nvPr/>
-        </p:nvSpPr>
-        <p:spPr>
-          <a:xfrm>
-            <a:off x="6126480" y="1188720"/>
-            <a:ext cx="2560320" cy="1828800"/>
-          </a:xfrm>
-          <a:prstGeom prst="rect">
-            <a:avLst/>
-          </a:prstGeom>
-          <a:solidFill>
-            <a:srgbClr val="FFFFFF"/>
-          </a:solidFill>
-          <a:ln w="12700">
-            <a:solidFill>
-              <a:srgbClr val="E5E2DC"/>
-            </a:solidFill>
-            <a:prstDash val="solid"/>
-          </a:ln>
-          <a:effectLst>
-            <a:outerShdw sx="100000" sy="100000" kx="0" ky="0" algn="bl" rotWithShape="0" blurRad="50800" dist="25400" dir="8100000">
-              <a:srgbClr val="000000">
-                <a:alpha val="10000"/>
-              </a:srgbClr>
-            </a:outerShdw>
-          </a:effectLst>
-        </p:spPr>
-      </p:sp>
-      <p:sp>
-        <p:nvSpPr>
-          <p:cNvPr id="14" name="Shape 12"/>
-          <p:cNvSpPr/>
-          <p:nvPr/>
-        </p:nvSpPr>
-        <p:spPr>
-          <a:xfrm>
-            <a:off x="6126480" y="1188720"/>
-            <a:ext cx="2560320" cy="54864"/>
-          </a:xfrm>
-          <a:prstGeom prst="rect">
-            <a:avLst/>
-          </a:prstGeom>
-          <a:solidFill>
-            <a:srgbClr val="2A9D8F"/>
-          </a:solidFill>
-          <a:ln/>
-        </p:spPr>
-      </p:sp>
-      <p:sp>
-        <p:nvSpPr>
-          <p:cNvPr id="15" name="Text 13"/>
-          <p:cNvSpPr/>
-          <p:nvPr/>
-        </p:nvSpPr>
-        <p:spPr>
-          <a:xfrm>
-            <a:off x="6263640" y="1325880"/>
-            <a:ext cx="2286000" cy="365760"/>
-          </a:xfrm>
-          <a:prstGeom prst="rect">
-            <a:avLst/>
-          </a:prstGeom>
-          <a:noFill/>
-          <a:ln/>
-        </p:spPr>
-        <p:txBody>
-          <a:bodyPr wrap="square" rtlCol="0" anchor="ctr"/>
-          <a:lstStyle/>
-          <a:p>
-            <a:pPr indent="0" marL="0">
-              <a:buNone/>
-            </a:pPr>
-            <a:r>
-              <a:rPr lang="en-US" sz="1400" b="1" dirty="0">
-                <a:solidFill>
-                  <a:srgbClr val="1B2A4A"/>
-                </a:solidFill>
-                <a:latin typeface="Calibri" pitchFamily="34" charset="0"/>
-                <a:ea typeface="Calibri" pitchFamily="34" charset="-122"/>
-                <a:cs typeface="Calibri" pitchFamily="34" charset="-120"/>
-              </a:rPr>
-              <a:t>Benefits</a:t>
-            </a:r>
-            <a:endParaRPr lang="en-US" sz="1400" dirty="0"/>
-          </a:p>
-        </p:txBody>
-      </p:sp>
-      <p:sp>
-        <p:nvSpPr>
-          <p:cNvPr id="16" name="Text 14"/>
-          <p:cNvSpPr/>
-          <p:nvPr/>
-        </p:nvSpPr>
-        <p:spPr>
-          <a:xfrm>
-            <a:off x="6263640" y="1737360"/>
-            <a:ext cx="2286000" cy="1097280"/>
-          </a:xfrm>
-          <a:prstGeom prst="rect">
-            <a:avLst/>
-          </a:prstGeom>
-          <a:noFill/>
-          <a:ln/>
-        </p:spPr>
-        <p:txBody>
-          <a:bodyPr wrap="square" rtlCol="0" anchor="t"/>
-          <a:lstStyle/>
-          <a:p>
-            <a:pPr indent="0" marL="0">
-              <a:buNone/>
-            </a:pPr>
-            <a:r>
-              <a:rPr lang="en-US" sz="1100" dirty="0">
-                <a:solidFill>
-                  <a:srgbClr val="3D3A36"/>
-                </a:solidFill>
-                <a:latin typeface="Calibri" pitchFamily="34" charset="0"/>
-                <a:ea typeface="Calibri" pitchFamily="34" charset="-122"/>
-                <a:cs typeface="Calibri" pitchFamily="34" charset="-120"/>
-              </a:rPr>
-              <a:t>Fertile volcanic soil for farming. Geothermal energy. Minerals and gemstones. Tourism. New land formed.</a:t>
-            </a:r>
-            <a:endParaRPr lang="en-US" sz="1100" dirty="0"/>
-          </a:p>
-        </p:txBody>
-      </p:sp>
+              <a:t>Key Vocabulary</a:t>
+            </a:r>
+            <a:endParaRPr lang="en-US" sz="2200" dirty="0"/>
+          </a:p>
+        </p:txBody>
+      </p:sp>
+      <p:graphicFrame>
+        <p:nvGraphicFramePr>
+          <p:cNvPr id="5" name="Table 0"/>
+          <p:cNvGraphicFramePr>
+            <a:graphicFrameLocks noGrp="1"/>
+          </p:cNvGraphicFramePr>
+          <p:nvPr>
+            <p:extLst>
+              <p:ext uri="{D42A27DB-BD31-4B8C-83A1-F6EECF244321}">
+                <p14:modId xmlns:p14="http://schemas.microsoft.com/office/powerpoint/2010/main" val="1579011935"/>
+              </p:ext>
+            </p:extLst>
+          </p:nvPr>
+        </p:nvGraphicFramePr>
+        <p:xfrm>
+          <a:off x="640080" y="1005840"/>
+          <a:ext cx="7863840" cy="914400"/>
+        </p:xfrm>
+        <a:graphic>
+          <a:graphicData uri="http://schemas.openxmlformats.org/drawingml/2006/table">
+            <a:tbl>
+              <a:tblPr/>
+              <a:tblGrid>
+                <a:gridCol w="2286000"/>
+                <a:gridCol w="5577840"/>
+              </a:tblGrid>
+              <a:tr h="457200">
+                <a:tc>
+                  <a:txBody>
+                    <a:bodyPr/>
+                    <a:lstStyle/>
+                    <a:p>
+                      <a:pPr indent="0" marL="0">
+                        <a:buNone/>
+                      </a:pPr>
+                      <a:r>
+                        <a:rPr lang="en-US" sz="1300" b="1" dirty="0">
+                          <a:solidFill>
+                            <a:srgbClr val="FFFFFF"/>
+                          </a:solidFill>
+                          <a:latin typeface="Calibri" pitchFamily="34" charset="0"/>
+                          <a:ea typeface="Calibri" pitchFamily="34" charset="-122"/>
+                          <a:cs typeface="Calibri" pitchFamily="34" charset="-120"/>
+                        </a:rPr>
+                        <a:t>Term</a:t>
+                      </a:r>
+                      <a:endParaRPr lang="en-US" sz="1300" dirty="0">
+                        <a:latin typeface="Calibri" charset="0"/>
+                        <a:ea typeface="Calibri" charset="0"/>
+                        <a:cs typeface="Calibri" charset="0"/>
+                      </a:endParaRPr>
+                    </a:p>
+                  </a:txBody>
+                  <a:tcPr marL="91440" marR="91440" marT="45720" marB="45720">
+                    <a:lnL w="6350" cap="flat" cmpd="sng" algn="ctr">
+                      <a:solidFill>
+                        <a:srgbClr val="E5E2DC"/>
+                      </a:solidFill>
+                      <a:prstDash val="solid"/>
+                      <a:round/>
+                      <a:headEnd type="none" w="med" len="med"/>
+                      <a:tailEnd type="none" w="med" len="med"/>
+                    </a:lnL>
+                    <a:lnR w="6350" cap="flat" cmpd="sng" algn="ctr">
+                      <a:solidFill>
+                        <a:srgbClr val="E5E2DC"/>
+                      </a:solidFill>
+                      <a:prstDash val="solid"/>
+                      <a:round/>
+                      <a:headEnd type="none" w="med" len="med"/>
+                      <a:tailEnd type="none" w="med" len="med"/>
+                    </a:lnR>
+                    <a:lnT w="6350" cap="flat" cmpd="sng" algn="ctr">
+                      <a:solidFill>
+                        <a:srgbClr val="E5E2DC"/>
+                      </a:solidFill>
+                      <a:prstDash val="solid"/>
+                      <a:round/>
+                      <a:headEnd type="none" w="med" len="med"/>
+                      <a:tailEnd type="none" w="med" len="med"/>
+                    </a:lnT>
+                    <a:lnB w="6350" cap="flat" cmpd="sng" algn="ctr">
+                      <a:solidFill>
+                        <a:srgbClr val="E5E2DC"/>
+                      </a:solidFill>
+                      <a:prstDash val="solid"/>
+                      <a:round/>
+                      <a:headEnd type="none" w="med" len="med"/>
+                      <a:tailEnd type="none" w="med" len="med"/>
+                    </a:lnB>
+                    <a:solidFill>
+                      <a:srgbClr val="2A9D8F"/>
+                    </a:solidFill>
+                  </a:tcPr>
+                </a:tc>
+                <a:tc>
+                  <a:txBody>
+                    <a:bodyPr/>
+                    <a:lstStyle/>
+                    <a:p>
+                      <a:pPr indent="0" marL="0">
+                        <a:buNone/>
+                      </a:pPr>
+                      <a:r>
+                        <a:rPr lang="en-US" sz="1300" b="1" dirty="0">
+                          <a:solidFill>
+                            <a:srgbClr val="FFFFFF"/>
+                          </a:solidFill>
+                          <a:latin typeface="Calibri" pitchFamily="34" charset="0"/>
+                          <a:ea typeface="Calibri" pitchFamily="34" charset="-122"/>
+                          <a:cs typeface="Calibri" pitchFamily="34" charset="-120"/>
+                        </a:rPr>
+                        <a:t>Definition</a:t>
+                      </a:r>
+                      <a:endParaRPr lang="en-US" sz="1300" dirty="0">
+                        <a:latin typeface="Calibri" charset="0"/>
+                        <a:ea typeface="Calibri" charset="0"/>
+                        <a:cs typeface="Calibri" charset="0"/>
+                      </a:endParaRPr>
+                    </a:p>
+                  </a:txBody>
+                  <a:tcPr marL="91440" marR="91440" marT="45720" marB="45720">
+                    <a:lnL w="6350" cap="flat" cmpd="sng" algn="ctr">
+                      <a:solidFill>
+                        <a:srgbClr val="E5E2DC"/>
+                      </a:solidFill>
+                      <a:prstDash val="solid"/>
+                      <a:round/>
+                      <a:headEnd type="none" w="med" len="med"/>
+                      <a:tailEnd type="none" w="med" len="med"/>
+                    </a:lnL>
+                    <a:lnR w="6350" cap="flat" cmpd="sng" algn="ctr">
+                      <a:solidFill>
+                        <a:srgbClr val="E5E2DC"/>
+                      </a:solidFill>
+                      <a:prstDash val="solid"/>
+                      <a:round/>
+                      <a:headEnd type="none" w="med" len="med"/>
+                      <a:tailEnd type="none" w="med" len="med"/>
+                    </a:lnR>
+                    <a:lnT w="6350" cap="flat" cmpd="sng" algn="ctr">
+                      <a:solidFill>
+                        <a:srgbClr val="E5E2DC"/>
+                      </a:solidFill>
+                      <a:prstDash val="solid"/>
+                      <a:round/>
+                      <a:headEnd type="none" w="med" len="med"/>
+                      <a:tailEnd type="none" w="med" len="med"/>
+                    </a:lnT>
+                    <a:lnB w="6350" cap="flat" cmpd="sng" algn="ctr">
+                      <a:solidFill>
+                        <a:srgbClr val="E5E2DC"/>
+                      </a:solidFill>
+                      <a:prstDash val="solid"/>
+                      <a:round/>
+                      <a:headEnd type="none" w="med" len="med"/>
+                      <a:tailEnd type="none" w="med" len="med"/>
+                    </a:lnB>
+                    <a:solidFill>
+                      <a:srgbClr val="2A9D8F"/>
+                    </a:solidFill>
+                  </a:tcPr>
+                </a:tc>
+              </a:tr>
+              <a:tr h="457200">
+                <a:tc>
+                  <a:txBody>
+                    <a:bodyPr/>
+                    <a:lstStyle/>
+                    <a:p>
+                      <a:pPr indent="0" marL="0">
+                        <a:buNone/>
+                      </a:pPr>
+                      <a:r>
+                        <a:rPr lang="en-US" sz="1400" b="1" dirty="0">
+                          <a:solidFill>
+                            <a:srgbClr val="1B2A4A"/>
+                          </a:solidFill>
+                          <a:latin typeface="Calibri" pitchFamily="34" charset="0"/>
+                          <a:ea typeface="Calibri" pitchFamily="34" charset="-122"/>
+                          <a:cs typeface="Calibri" pitchFamily="34" charset="-120"/>
+                        </a:rPr>
+                        <a:t>Focus</a:t>
+                      </a:r>
+                      <a:endParaRPr lang="en-US" sz="1400" dirty="0">
+                        <a:latin typeface="Calibri" charset="0"/>
+                        <a:ea typeface="Calibri" charset="0"/>
+                        <a:cs typeface="Calibri" charset="0"/>
+                      </a:endParaRPr>
+                    </a:p>
+                  </a:txBody>
+                  <a:tcPr marL="91440" marR="91440" marT="45720" marB="45720">
+                    <a:lnL w="6350" cap="flat" cmpd="sng" algn="ctr">
+                      <a:solidFill>
+                        <a:srgbClr val="E5E2DC"/>
+                      </a:solidFill>
+                      <a:prstDash val="solid"/>
+                      <a:round/>
+                      <a:headEnd type="none" w="med" len="med"/>
+                      <a:tailEnd type="none" w="med" len="med"/>
+                    </a:lnL>
+                    <a:lnR w="6350" cap="flat" cmpd="sng" algn="ctr">
+                      <a:solidFill>
+                        <a:srgbClr val="E5E2DC"/>
+                      </a:solidFill>
+                      <a:prstDash val="solid"/>
+                      <a:round/>
+                      <a:headEnd type="none" w="med" len="med"/>
+                      <a:tailEnd type="none" w="med" len="med"/>
+                    </a:lnR>
+                    <a:lnT w="6350" cap="flat" cmpd="sng" algn="ctr">
+                      <a:solidFill>
+                        <a:srgbClr val="E5E2DC"/>
+                      </a:solidFill>
+                      <a:prstDash val="solid"/>
+                      <a:round/>
+                      <a:headEnd type="none" w="med" len="med"/>
+                      <a:tailEnd type="none" w="med" len="med"/>
+                    </a:lnT>
+                    <a:lnB w="6350" cap="flat" cmpd="sng" algn="ctr">
+                      <a:solidFill>
+                        <a:srgbClr val="E5E2DC"/>
+                      </a:solidFill>
+                      <a:prstDash val="solid"/>
+                      <a:round/>
+                      <a:headEnd type="none" w="med" len="med"/>
+                      <a:tailEnd type="none" w="med" len="med"/>
+                    </a:lnB>
+                  </a:tcPr>
+                </a:tc>
+                <a:tc>
+                  <a:txBody>
+                    <a:bodyPr/>
+                    <a:lstStyle/>
+                    <a:p>
+                      <a:pPr indent="0" marL="0">
+                        <a:buNone/>
+                      </a:pPr>
+                      <a:r>
+                        <a:rPr lang="en-US" sz="1400" dirty="0">
+                          <a:solidFill>
+                            <a:srgbClr val="3D3A36"/>
+                          </a:solidFill>
+                          <a:latin typeface="Calibri" pitchFamily="34" charset="0"/>
+                          <a:ea typeface="Calibri" pitchFamily="34" charset="-122"/>
+                          <a:cs typeface="Calibri" pitchFamily="34" charset="-120"/>
+                        </a:rPr>
+                        <a:t>Point underground where an earthquake starts.</a:t>
+                      </a:r>
+                      <a:endParaRPr lang="en-US" sz="1400" dirty="0">
+                        <a:latin typeface="Calibri" charset="0"/>
+                        <a:ea typeface="Calibri" charset="0"/>
+                        <a:cs typeface="Calibri" charset="0"/>
+                      </a:endParaRPr>
+                    </a:p>
+                  </a:txBody>
+                  <a:tcPr marL="91440" marR="91440" marT="45720" marB="45720">
+                    <a:lnL w="6350" cap="flat" cmpd="sng" algn="ctr">
+                      <a:solidFill>
+                        <a:srgbClr val="E5E2DC"/>
+                      </a:solidFill>
+                      <a:prstDash val="solid"/>
+                      <a:round/>
+                      <a:headEnd type="none" w="med" len="med"/>
+                      <a:tailEnd type="none" w="med" len="med"/>
+                    </a:lnL>
+                    <a:lnR w="6350" cap="flat" cmpd="sng" algn="ctr">
+                      <a:solidFill>
+                        <a:srgbClr val="E5E2DC"/>
+                      </a:solidFill>
+                      <a:prstDash val="solid"/>
+                      <a:round/>
+                      <a:headEnd type="none" w="med" len="med"/>
+                      <a:tailEnd type="none" w="med" len="med"/>
+                    </a:lnR>
+                    <a:lnT w="6350" cap="flat" cmpd="sng" algn="ctr">
+                      <a:solidFill>
+                        <a:srgbClr val="E5E2DC"/>
+                      </a:solidFill>
+                      <a:prstDash val="solid"/>
+                      <a:round/>
+                      <a:headEnd type="none" w="med" len="med"/>
+                      <a:tailEnd type="none" w="med" len="med"/>
+                    </a:lnT>
+                    <a:lnB w="6350" cap="flat" cmpd="sng" algn="ctr">
+                      <a:solidFill>
+                        <a:srgbClr val="E5E2DC"/>
+                      </a:solidFill>
+                      <a:prstDash val="solid"/>
+                      <a:round/>
+                      <a:headEnd type="none" w="med" len="med"/>
+                      <a:tailEnd type="none" w="med" len="med"/>
+                    </a:lnB>
+                  </a:tcPr>
+                </a:tc>
+              </a:tr>
+              <a:tr h="457200">
+                <a:tc>
+                  <a:txBody>
+                    <a:bodyPr/>
+                    <a:lstStyle/>
+                    <a:p>
+                      <a:pPr indent="0" marL="0">
+                        <a:buNone/>
+                      </a:pPr>
+                      <a:r>
+                        <a:rPr lang="en-US" sz="1400" b="1" dirty="0">
+                          <a:solidFill>
+                            <a:srgbClr val="1B2A4A"/>
+                          </a:solidFill>
+                          <a:latin typeface="Calibri" pitchFamily="34" charset="0"/>
+                          <a:ea typeface="Calibri" pitchFamily="34" charset="-122"/>
+                          <a:cs typeface="Calibri" pitchFamily="34" charset="-120"/>
+                        </a:rPr>
+                        <a:t>Epicentre</a:t>
+                      </a:r>
+                      <a:endParaRPr lang="en-US" sz="1400" dirty="0">
+                        <a:latin typeface="Calibri" charset="0"/>
+                        <a:ea typeface="Calibri" charset="0"/>
+                        <a:cs typeface="Calibri" charset="0"/>
+                      </a:endParaRPr>
+                    </a:p>
+                  </a:txBody>
+                  <a:tcPr marL="91440" marR="91440" marT="45720" marB="45720">
+                    <a:lnL w="6350" cap="flat" cmpd="sng" algn="ctr">
+                      <a:solidFill>
+                        <a:srgbClr val="E5E2DC"/>
+                      </a:solidFill>
+                      <a:prstDash val="solid"/>
+                      <a:round/>
+                      <a:headEnd type="none" w="med" len="med"/>
+                      <a:tailEnd type="none" w="med" len="med"/>
+                    </a:lnL>
+                    <a:lnR w="6350" cap="flat" cmpd="sng" algn="ctr">
+                      <a:solidFill>
+                        <a:srgbClr val="E5E2DC"/>
+                      </a:solidFill>
+                      <a:prstDash val="solid"/>
+                      <a:round/>
+                      <a:headEnd type="none" w="med" len="med"/>
+                      <a:tailEnd type="none" w="med" len="med"/>
+                    </a:lnR>
+                    <a:lnT w="6350" cap="flat" cmpd="sng" algn="ctr">
+                      <a:solidFill>
+                        <a:srgbClr val="E5E2DC"/>
+                      </a:solidFill>
+                      <a:prstDash val="solid"/>
+                      <a:round/>
+                      <a:headEnd type="none" w="med" len="med"/>
+                      <a:tailEnd type="none" w="med" len="med"/>
+                    </a:lnT>
+                    <a:lnB w="6350" cap="flat" cmpd="sng" algn="ctr">
+                      <a:solidFill>
+                        <a:srgbClr val="E5E2DC"/>
+                      </a:solidFill>
+                      <a:prstDash val="solid"/>
+                      <a:round/>
+                      <a:headEnd type="none" w="med" len="med"/>
+                      <a:tailEnd type="none" w="med" len="med"/>
+                    </a:lnB>
+                  </a:tcPr>
+                </a:tc>
+                <a:tc>
+                  <a:txBody>
+                    <a:bodyPr/>
+                    <a:lstStyle/>
+                    <a:p>
+                      <a:pPr indent="0" marL="0">
+                        <a:buNone/>
+                      </a:pPr>
+                      <a:r>
+                        <a:rPr lang="en-US" sz="1400" dirty="0">
+                          <a:solidFill>
+                            <a:srgbClr val="3D3A36"/>
+                          </a:solidFill>
+                          <a:latin typeface="Calibri" pitchFamily="34" charset="0"/>
+                          <a:ea typeface="Calibri" pitchFamily="34" charset="-122"/>
+                          <a:cs typeface="Calibri" pitchFamily="34" charset="-120"/>
+                        </a:rPr>
+                        <a:t>Point on surface directly above the focus.</a:t>
+                      </a:r>
+                      <a:endParaRPr lang="en-US" sz="1400" dirty="0">
+                        <a:latin typeface="Calibri" charset="0"/>
+                        <a:ea typeface="Calibri" charset="0"/>
+                        <a:cs typeface="Calibri" charset="0"/>
+                      </a:endParaRPr>
+                    </a:p>
+                  </a:txBody>
+                  <a:tcPr marL="91440" marR="91440" marT="45720" marB="45720">
+                    <a:lnL w="6350" cap="flat" cmpd="sng" algn="ctr">
+                      <a:solidFill>
+                        <a:srgbClr val="E5E2DC"/>
+                      </a:solidFill>
+                      <a:prstDash val="solid"/>
+                      <a:round/>
+                      <a:headEnd type="none" w="med" len="med"/>
+                      <a:tailEnd type="none" w="med" len="med"/>
+                    </a:lnL>
+                    <a:lnR w="6350" cap="flat" cmpd="sng" algn="ctr">
+                      <a:solidFill>
+                        <a:srgbClr val="E5E2DC"/>
+                      </a:solidFill>
+                      <a:prstDash val="solid"/>
+                      <a:round/>
+                      <a:headEnd type="none" w="med" len="med"/>
+                      <a:tailEnd type="none" w="med" len="med"/>
+                    </a:lnR>
+                    <a:lnT w="6350" cap="flat" cmpd="sng" algn="ctr">
+                      <a:solidFill>
+                        <a:srgbClr val="E5E2DC"/>
+                      </a:solidFill>
+                      <a:prstDash val="solid"/>
+                      <a:round/>
+                      <a:headEnd type="none" w="med" len="med"/>
+                      <a:tailEnd type="none" w="med" len="med"/>
+                    </a:lnT>
+                    <a:lnB w="6350" cap="flat" cmpd="sng" algn="ctr">
+                      <a:solidFill>
+                        <a:srgbClr val="E5E2DC"/>
+                      </a:solidFill>
+                      <a:prstDash val="solid"/>
+                      <a:round/>
+                      <a:headEnd type="none" w="med" len="med"/>
+                      <a:tailEnd type="none" w="med" len="med"/>
+                    </a:lnB>
+                  </a:tcPr>
+                </a:tc>
+              </a:tr>
+              <a:tr h="457200">
+                <a:tc>
+                  <a:txBody>
+                    <a:bodyPr/>
+                    <a:lstStyle/>
+                    <a:p>
+                      <a:pPr indent="0" marL="0">
+                        <a:buNone/>
+                      </a:pPr>
+                      <a:r>
+                        <a:rPr lang="en-US" sz="1400" b="1" dirty="0">
+                          <a:solidFill>
+                            <a:srgbClr val="1B2A4A"/>
+                          </a:solidFill>
+                          <a:latin typeface="Calibri" pitchFamily="34" charset="0"/>
+                          <a:ea typeface="Calibri" pitchFamily="34" charset="-122"/>
+                          <a:cs typeface="Calibri" pitchFamily="34" charset="-120"/>
+                        </a:rPr>
+                        <a:t>Seismometer</a:t>
+                      </a:r>
+                      <a:endParaRPr lang="en-US" sz="1400" dirty="0">
+                        <a:latin typeface="Calibri" charset="0"/>
+                        <a:ea typeface="Calibri" charset="0"/>
+                        <a:cs typeface="Calibri" charset="0"/>
+                      </a:endParaRPr>
+                    </a:p>
+                  </a:txBody>
+                  <a:tcPr marL="91440" marR="91440" marT="45720" marB="45720">
+                    <a:lnL w="6350" cap="flat" cmpd="sng" algn="ctr">
+                      <a:solidFill>
+                        <a:srgbClr val="E5E2DC"/>
+                      </a:solidFill>
+                      <a:prstDash val="solid"/>
+                      <a:round/>
+                      <a:headEnd type="none" w="med" len="med"/>
+                      <a:tailEnd type="none" w="med" len="med"/>
+                    </a:lnL>
+                    <a:lnR w="6350" cap="flat" cmpd="sng" algn="ctr">
+                      <a:solidFill>
+                        <a:srgbClr val="E5E2DC"/>
+                      </a:solidFill>
+                      <a:prstDash val="solid"/>
+                      <a:round/>
+                      <a:headEnd type="none" w="med" len="med"/>
+                      <a:tailEnd type="none" w="med" len="med"/>
+                    </a:lnR>
+                    <a:lnT w="6350" cap="flat" cmpd="sng" algn="ctr">
+                      <a:solidFill>
+                        <a:srgbClr val="E5E2DC"/>
+                      </a:solidFill>
+                      <a:prstDash val="solid"/>
+                      <a:round/>
+                      <a:headEnd type="none" w="med" len="med"/>
+                      <a:tailEnd type="none" w="med" len="med"/>
+                    </a:lnT>
+                    <a:lnB w="6350" cap="flat" cmpd="sng" algn="ctr">
+                      <a:solidFill>
+                        <a:srgbClr val="E5E2DC"/>
+                      </a:solidFill>
+                      <a:prstDash val="solid"/>
+                      <a:round/>
+                      <a:headEnd type="none" w="med" len="med"/>
+                      <a:tailEnd type="none" w="med" len="med"/>
+                    </a:lnB>
+                  </a:tcPr>
+                </a:tc>
+                <a:tc>
+                  <a:txBody>
+                    <a:bodyPr/>
+                    <a:lstStyle/>
+                    <a:p>
+                      <a:pPr indent="0" marL="0">
+                        <a:buNone/>
+                      </a:pPr>
+                      <a:r>
+                        <a:rPr lang="en-US" sz="1400" dirty="0">
+                          <a:solidFill>
+                            <a:srgbClr val="3D3A36"/>
+                          </a:solidFill>
+                          <a:latin typeface="Calibri" pitchFamily="34" charset="0"/>
+                          <a:ea typeface="Calibri" pitchFamily="34" charset="-122"/>
+                          <a:cs typeface="Calibri" pitchFamily="34" charset="-120"/>
+                        </a:rPr>
+                        <a:t>Instrument measuring earthquake vibrations.</a:t>
+                      </a:r>
+                      <a:endParaRPr lang="en-US" sz="1400" dirty="0">
+                        <a:latin typeface="Calibri" charset="0"/>
+                        <a:ea typeface="Calibri" charset="0"/>
+                        <a:cs typeface="Calibri" charset="0"/>
+                      </a:endParaRPr>
+                    </a:p>
+                  </a:txBody>
+                  <a:tcPr marL="91440" marR="91440" marT="45720" marB="45720">
+                    <a:lnL w="6350" cap="flat" cmpd="sng" algn="ctr">
+                      <a:solidFill>
+                        <a:srgbClr val="E5E2DC"/>
+                      </a:solidFill>
+                      <a:prstDash val="solid"/>
+                      <a:round/>
+                      <a:headEnd type="none" w="med" len="med"/>
+                      <a:tailEnd type="none" w="med" len="med"/>
+                    </a:lnL>
+                    <a:lnR w="6350" cap="flat" cmpd="sng" algn="ctr">
+                      <a:solidFill>
+                        <a:srgbClr val="E5E2DC"/>
+                      </a:solidFill>
+                      <a:prstDash val="solid"/>
+                      <a:round/>
+                      <a:headEnd type="none" w="med" len="med"/>
+                      <a:tailEnd type="none" w="med" len="med"/>
+                    </a:lnR>
+                    <a:lnT w="6350" cap="flat" cmpd="sng" algn="ctr">
+                      <a:solidFill>
+                        <a:srgbClr val="E5E2DC"/>
+                      </a:solidFill>
+                      <a:prstDash val="solid"/>
+                      <a:round/>
+                      <a:headEnd type="none" w="med" len="med"/>
+                      <a:tailEnd type="none" w="med" len="med"/>
+                    </a:lnT>
+                    <a:lnB w="6350" cap="flat" cmpd="sng" algn="ctr">
+                      <a:solidFill>
+                        <a:srgbClr val="E5E2DC"/>
+                      </a:solidFill>
+                      <a:prstDash val="solid"/>
+                      <a:round/>
+                      <a:headEnd type="none" w="med" len="med"/>
+                      <a:tailEnd type="none" w="med" len="med"/>
+                    </a:lnB>
+                  </a:tcPr>
+                </a:tc>
+              </a:tr>
+              <a:tr h="457200">
+                <a:tc>
+                  <a:txBody>
+                    <a:bodyPr/>
+                    <a:lstStyle/>
+                    <a:p>
+                      <a:pPr indent="0" marL="0">
+                        <a:buNone/>
+                      </a:pPr>
+                      <a:r>
+                        <a:rPr lang="en-US" sz="1400" b="1" dirty="0">
+                          <a:solidFill>
+                            <a:srgbClr val="1B2A4A"/>
+                          </a:solidFill>
+                          <a:latin typeface="Calibri" pitchFamily="34" charset="0"/>
+                          <a:ea typeface="Calibri" pitchFamily="34" charset="-122"/>
+                          <a:cs typeface="Calibri" pitchFamily="34" charset="-120"/>
+                        </a:rPr>
+                        <a:t>Richter Scale</a:t>
+                      </a:r>
+                      <a:endParaRPr lang="en-US" sz="1400" dirty="0">
+                        <a:latin typeface="Calibri" charset="0"/>
+                        <a:ea typeface="Calibri" charset="0"/>
+                        <a:cs typeface="Calibri" charset="0"/>
+                      </a:endParaRPr>
+                    </a:p>
+                  </a:txBody>
+                  <a:tcPr marL="91440" marR="91440" marT="45720" marB="45720">
+                    <a:lnL w="6350" cap="flat" cmpd="sng" algn="ctr">
+                      <a:solidFill>
+                        <a:srgbClr val="E5E2DC"/>
+                      </a:solidFill>
+                      <a:prstDash val="solid"/>
+                      <a:round/>
+                      <a:headEnd type="none" w="med" len="med"/>
+                      <a:tailEnd type="none" w="med" len="med"/>
+                    </a:lnL>
+                    <a:lnR w="6350" cap="flat" cmpd="sng" algn="ctr">
+                      <a:solidFill>
+                        <a:srgbClr val="E5E2DC"/>
+                      </a:solidFill>
+                      <a:prstDash val="solid"/>
+                      <a:round/>
+                      <a:headEnd type="none" w="med" len="med"/>
+                      <a:tailEnd type="none" w="med" len="med"/>
+                    </a:lnR>
+                    <a:lnT w="6350" cap="flat" cmpd="sng" algn="ctr">
+                      <a:solidFill>
+                        <a:srgbClr val="E5E2DC"/>
+                      </a:solidFill>
+                      <a:prstDash val="solid"/>
+                      <a:round/>
+                      <a:headEnd type="none" w="med" len="med"/>
+                      <a:tailEnd type="none" w="med" len="med"/>
+                    </a:lnT>
+                    <a:lnB w="6350" cap="flat" cmpd="sng" algn="ctr">
+                      <a:solidFill>
+                        <a:srgbClr val="E5E2DC"/>
+                      </a:solidFill>
+                      <a:prstDash val="solid"/>
+                      <a:round/>
+                      <a:headEnd type="none" w="med" len="med"/>
+                      <a:tailEnd type="none" w="med" len="med"/>
+                    </a:lnB>
+                  </a:tcPr>
+                </a:tc>
+                <a:tc>
+                  <a:txBody>
+                    <a:bodyPr/>
+                    <a:lstStyle/>
+                    <a:p>
+                      <a:pPr indent="0" marL="0">
+                        <a:buNone/>
+                      </a:pPr>
+                      <a:r>
+                        <a:rPr lang="en-US" sz="1400" dirty="0">
+                          <a:solidFill>
+                            <a:srgbClr val="3D3A36"/>
+                          </a:solidFill>
+                          <a:latin typeface="Calibri" pitchFamily="34" charset="0"/>
+                          <a:ea typeface="Calibri" pitchFamily="34" charset="-122"/>
+                          <a:cs typeface="Calibri" pitchFamily="34" charset="-120"/>
+                        </a:rPr>
+                        <a:t>Measures earthquake magnitude.</a:t>
+                      </a:r>
+                      <a:endParaRPr lang="en-US" sz="1400" dirty="0">
+                        <a:latin typeface="Calibri" charset="0"/>
+                        <a:ea typeface="Calibri" charset="0"/>
+                        <a:cs typeface="Calibri" charset="0"/>
+                      </a:endParaRPr>
+                    </a:p>
+                  </a:txBody>
+                  <a:tcPr marL="91440" marR="91440" marT="45720" marB="45720">
+                    <a:lnL w="6350" cap="flat" cmpd="sng" algn="ctr">
+                      <a:solidFill>
+                        <a:srgbClr val="E5E2DC"/>
+                      </a:solidFill>
+                      <a:prstDash val="solid"/>
+                      <a:round/>
+                      <a:headEnd type="none" w="med" len="med"/>
+                      <a:tailEnd type="none" w="med" len="med"/>
+                    </a:lnL>
+                    <a:lnR w="6350" cap="flat" cmpd="sng" algn="ctr">
+                      <a:solidFill>
+                        <a:srgbClr val="E5E2DC"/>
+                      </a:solidFill>
+                      <a:prstDash val="solid"/>
+                      <a:round/>
+                      <a:headEnd type="none" w="med" len="med"/>
+                      <a:tailEnd type="none" w="med" len="med"/>
+                    </a:lnR>
+                    <a:lnT w="6350" cap="flat" cmpd="sng" algn="ctr">
+                      <a:solidFill>
+                        <a:srgbClr val="E5E2DC"/>
+                      </a:solidFill>
+                      <a:prstDash val="solid"/>
+                      <a:round/>
+                      <a:headEnd type="none" w="med" len="med"/>
+                      <a:tailEnd type="none" w="med" len="med"/>
+                    </a:lnT>
+                    <a:lnB w="6350" cap="flat" cmpd="sng" algn="ctr">
+                      <a:solidFill>
+                        <a:srgbClr val="E5E2DC"/>
+                      </a:solidFill>
+                      <a:prstDash val="solid"/>
+                      <a:round/>
+                      <a:headEnd type="none" w="med" len="med"/>
+                      <a:tailEnd type="none" w="med" len="med"/>
+                    </a:lnB>
+                  </a:tcPr>
+                </a:tc>
+              </a:tr>
+              <a:tr h="457200">
+                <a:tc>
+                  <a:txBody>
+                    <a:bodyPr/>
+                    <a:lstStyle/>
+                    <a:p>
+                      <a:pPr indent="0" marL="0">
+                        <a:buNone/>
+                      </a:pPr>
+                      <a:r>
+                        <a:rPr lang="en-US" sz="1400" b="1" dirty="0">
+                          <a:solidFill>
+                            <a:srgbClr val="1B2A4A"/>
+                          </a:solidFill>
+                          <a:latin typeface="Calibri" pitchFamily="34" charset="0"/>
+                          <a:ea typeface="Calibri" pitchFamily="34" charset="-122"/>
+                          <a:cs typeface="Calibri" pitchFamily="34" charset="-120"/>
+                        </a:rPr>
+                        <a:t>Magma / Lava</a:t>
+                      </a:r>
+                      <a:endParaRPr lang="en-US" sz="1400" dirty="0">
+                        <a:latin typeface="Calibri" charset="0"/>
+                        <a:ea typeface="Calibri" charset="0"/>
+                        <a:cs typeface="Calibri" charset="0"/>
+                      </a:endParaRPr>
+                    </a:p>
+                  </a:txBody>
+                  <a:tcPr marL="91440" marR="91440" marT="45720" marB="45720">
+                    <a:lnL w="6350" cap="flat" cmpd="sng" algn="ctr">
+                      <a:solidFill>
+                        <a:srgbClr val="E5E2DC"/>
+                      </a:solidFill>
+                      <a:prstDash val="solid"/>
+                      <a:round/>
+                      <a:headEnd type="none" w="med" len="med"/>
+                      <a:tailEnd type="none" w="med" len="med"/>
+                    </a:lnL>
+                    <a:lnR w="6350" cap="flat" cmpd="sng" algn="ctr">
+                      <a:solidFill>
+                        <a:srgbClr val="E5E2DC"/>
+                      </a:solidFill>
+                      <a:prstDash val="solid"/>
+                      <a:round/>
+                      <a:headEnd type="none" w="med" len="med"/>
+                      <a:tailEnd type="none" w="med" len="med"/>
+                    </a:lnR>
+                    <a:lnT w="6350" cap="flat" cmpd="sng" algn="ctr">
+                      <a:solidFill>
+                        <a:srgbClr val="E5E2DC"/>
+                      </a:solidFill>
+                      <a:prstDash val="solid"/>
+                      <a:round/>
+                      <a:headEnd type="none" w="med" len="med"/>
+                      <a:tailEnd type="none" w="med" len="med"/>
+                    </a:lnT>
+                    <a:lnB w="6350" cap="flat" cmpd="sng" algn="ctr">
+                      <a:solidFill>
+                        <a:srgbClr val="E5E2DC"/>
+                      </a:solidFill>
+                      <a:prstDash val="solid"/>
+                      <a:round/>
+                      <a:headEnd type="none" w="med" len="med"/>
+                      <a:tailEnd type="none" w="med" len="med"/>
+                    </a:lnB>
+                  </a:tcPr>
+                </a:tc>
+                <a:tc>
+                  <a:txBody>
+                    <a:bodyPr/>
+                    <a:lstStyle/>
+                    <a:p>
+                      <a:pPr indent="0" marL="0">
+                        <a:buNone/>
+                      </a:pPr>
+                      <a:r>
+                        <a:rPr lang="en-US" sz="1400" dirty="0">
+                          <a:solidFill>
+                            <a:srgbClr val="3D3A36"/>
+                          </a:solidFill>
+                          <a:latin typeface="Calibri" pitchFamily="34" charset="0"/>
+                          <a:ea typeface="Calibri" pitchFamily="34" charset="-122"/>
+                          <a:cs typeface="Calibri" pitchFamily="34" charset="-120"/>
+                        </a:rPr>
+                        <a:t>Melted rock below (magma) or above (lava) surface.</a:t>
+                      </a:r>
+                      <a:endParaRPr lang="en-US" sz="1400" dirty="0">
+                        <a:latin typeface="Calibri" charset="0"/>
+                        <a:ea typeface="Calibri" charset="0"/>
+                        <a:cs typeface="Calibri" charset="0"/>
+                      </a:endParaRPr>
+                    </a:p>
+                  </a:txBody>
+                  <a:tcPr marL="91440" marR="91440" marT="45720" marB="45720">
+                    <a:lnL w="6350" cap="flat" cmpd="sng" algn="ctr">
+                      <a:solidFill>
+                        <a:srgbClr val="E5E2DC"/>
+                      </a:solidFill>
+                      <a:prstDash val="solid"/>
+                      <a:round/>
+                      <a:headEnd type="none" w="med" len="med"/>
+                      <a:tailEnd type="none" w="med" len="med"/>
+                    </a:lnL>
+                    <a:lnR w="6350" cap="flat" cmpd="sng" algn="ctr">
+                      <a:solidFill>
+                        <a:srgbClr val="E5E2DC"/>
+                      </a:solidFill>
+                      <a:prstDash val="solid"/>
+                      <a:round/>
+                      <a:headEnd type="none" w="med" len="med"/>
+                      <a:tailEnd type="none" w="med" len="med"/>
+                    </a:lnR>
+                    <a:lnT w="6350" cap="flat" cmpd="sng" algn="ctr">
+                      <a:solidFill>
+                        <a:srgbClr val="E5E2DC"/>
+                      </a:solidFill>
+                      <a:prstDash val="solid"/>
+                      <a:round/>
+                      <a:headEnd type="none" w="med" len="med"/>
+                      <a:tailEnd type="none" w="med" len="med"/>
+                    </a:lnT>
+                    <a:lnB w="6350" cap="flat" cmpd="sng" algn="ctr">
+                      <a:solidFill>
+                        <a:srgbClr val="E5E2DC"/>
+                      </a:solidFill>
+                      <a:prstDash val="solid"/>
+                      <a:round/>
+                      <a:headEnd type="none" w="med" len="med"/>
+                      <a:tailEnd type="none" w="med" len="med"/>
+                    </a:lnB>
+                  </a:tcPr>
+                </a:tc>
+              </a:tr>
+            </a:tbl>
+          </a:graphicData>
+        </a:graphic>
+      </p:graphicFrame>
     </p:spTree>
   </p:cSld>
   <p:clrMapOvr>
@@ -2668,7 +3628,7 @@
     <p:bg>
       <p:bgPr>
         <a:solidFill>
-          <a:srgbClr val="1B2A4A"/>
+          <a:srgbClr val="FAF8F5"/>
         </a:solidFill>
       </p:bgPr>
     </p:bg>
@@ -2695,7 +3655,284 @@
         <p:spPr>
           <a:xfrm>
             <a:off x="0" y="0"/>
-            <a:ext cx="109728" cy="5143500"/>
+            <a:ext cx="9144000" cy="822960"/>
+          </a:xfrm>
+          <a:prstGeom prst="rect">
+            <a:avLst/>
+          </a:prstGeom>
+          <a:solidFill>
+            <a:srgbClr val="FFFFFF"/>
+          </a:solidFill>
+          <a:ln/>
+        </p:spPr>
+      </p:sp>
+      <p:sp>
+        <p:nvSpPr>
+          <p:cNvPr id="3" name="Shape 1"/>
+          <p:cNvSpPr/>
+          <p:nvPr/>
+        </p:nvSpPr>
+        <p:spPr>
+          <a:xfrm>
+            <a:off x="0" y="795528"/>
+            <a:ext cx="9144000" cy="27432"/>
+          </a:xfrm>
+          <a:prstGeom prst="rect">
+            <a:avLst/>
+          </a:prstGeom>
+          <a:solidFill>
+            <a:srgbClr val="2A9D8F"/>
+          </a:solidFill>
+          <a:ln/>
+        </p:spPr>
+      </p:sp>
+      <p:sp>
+        <p:nvSpPr>
+          <p:cNvPr id="4" name="Text 2"/>
+          <p:cNvSpPr/>
+          <p:nvPr/>
+        </p:nvSpPr>
+        <p:spPr>
+          <a:xfrm>
+            <a:off x="640080" y="91440"/>
+            <a:ext cx="7863840" cy="640080"/>
+          </a:xfrm>
+          <a:prstGeom prst="rect">
+            <a:avLst/>
+          </a:prstGeom>
+          <a:noFill/>
+          <a:ln/>
+        </p:spPr>
+        <p:txBody>
+          <a:bodyPr wrap="square" lIns="0" tIns="0" rIns="0" bIns="0" rtlCol="0" anchor="ctr"/>
+          <a:lstStyle/>
+          <a:p>
+            <a:pPr indent="0" marL="0">
+              <a:buNone/>
+            </a:pPr>
+            <a:r>
+              <a:rPr lang="en-US" sz="2200" b="1" dirty="0">
+                <a:solidFill>
+                  <a:srgbClr val="1B2A4A"/>
+                </a:solidFill>
+                <a:latin typeface="Georgia" pitchFamily="34" charset="0"/>
+                <a:ea typeface="Georgia" pitchFamily="34" charset="-122"/>
+                <a:cs typeface="Georgia" pitchFamily="34" charset="-120"/>
+              </a:rPr>
+              <a:t>Types of Volcano</a:t>
+            </a:r>
+            <a:endParaRPr lang="en-US" sz="2200" dirty="0"/>
+          </a:p>
+        </p:txBody>
+      </p:sp>
+      <p:sp>
+        <p:nvSpPr>
+          <p:cNvPr id="5" name="Shape 3"/>
+          <p:cNvSpPr/>
+          <p:nvPr/>
+        </p:nvSpPr>
+        <p:spPr>
+          <a:xfrm>
+            <a:off x="457200" y="1005840"/>
+            <a:ext cx="3931920" cy="3657600"/>
+          </a:xfrm>
+          <a:prstGeom prst="rect">
+            <a:avLst/>
+          </a:prstGeom>
+          <a:solidFill>
+            <a:srgbClr val="FFFFFF"/>
+          </a:solidFill>
+          <a:ln/>
+          <a:effectLst>
+            <a:outerShdw sx="100000" sy="100000" kx="0" ky="0" algn="bl" rotWithShape="0" blurRad="76200" dist="25400" dir="8100000">
+              <a:srgbClr val="000000">
+                <a:alpha val="12000"/>
+              </a:srgbClr>
+            </a:outerShdw>
+          </a:effectLst>
+        </p:spPr>
+      </p:sp>
+      <p:sp>
+        <p:nvSpPr>
+          <p:cNvPr id="6" name="Shape 4"/>
+          <p:cNvSpPr/>
+          <p:nvPr/>
+        </p:nvSpPr>
+        <p:spPr>
+          <a:xfrm>
+            <a:off x="457200" y="1005840"/>
+            <a:ext cx="3931920" cy="64008"/>
+          </a:xfrm>
+          <a:prstGeom prst="rect">
+            <a:avLst/>
+          </a:prstGeom>
+          <a:solidFill>
+            <a:srgbClr val="2A9D8F"/>
+          </a:solidFill>
+          <a:ln/>
+        </p:spPr>
+      </p:sp>
+      <p:sp>
+        <p:nvSpPr>
+          <p:cNvPr id="7" name="Text 5"/>
+          <p:cNvSpPr/>
+          <p:nvPr/>
+        </p:nvSpPr>
+        <p:spPr>
+          <a:xfrm>
+            <a:off x="640080" y="1188720"/>
+            <a:ext cx="3566160" cy="457200"/>
+          </a:xfrm>
+          <a:prstGeom prst="rect">
+            <a:avLst/>
+          </a:prstGeom>
+          <a:noFill/>
+          <a:ln/>
+        </p:spPr>
+        <p:txBody>
+          <a:bodyPr wrap="square" rtlCol="0" anchor="ctr"/>
+          <a:lstStyle/>
+          <a:p>
+            <a:pPr indent="0" marL="0">
+              <a:buNone/>
+            </a:pPr>
+            <a:r>
+              <a:rPr lang="en-US" sz="1600" b="1" dirty="0">
+                <a:solidFill>
+                  <a:srgbClr val="2A9D8F"/>
+                </a:solidFill>
+                <a:latin typeface="Calibri" pitchFamily="34" charset="0"/>
+                <a:ea typeface="Calibri" pitchFamily="34" charset="-122"/>
+                <a:cs typeface="Calibri" pitchFamily="34" charset="-120"/>
+              </a:rPr>
+              <a:t>Shield Volcano</a:t>
+            </a:r>
+            <a:endParaRPr lang="en-US" sz="1600" dirty="0"/>
+          </a:p>
+        </p:txBody>
+      </p:sp>
+      <p:sp>
+        <p:nvSpPr>
+          <p:cNvPr id="8" name="Text 6"/>
+          <p:cNvSpPr/>
+          <p:nvPr/>
+        </p:nvSpPr>
+        <p:spPr>
+          <a:xfrm>
+            <a:off x="640080" y="1691640"/>
+            <a:ext cx="3566160" cy="2743200"/>
+          </a:xfrm>
+          <a:prstGeom prst="rect">
+            <a:avLst/>
+          </a:prstGeom>
+          <a:noFill/>
+          <a:ln/>
+        </p:spPr>
+        <p:txBody>
+          <a:bodyPr wrap="square" rtlCol="0" anchor="ctr"/>
+          <a:lstStyle/>
+          <a:p>
+            <a:pPr marL="342900" indent="-342900">
+              <a:spcAft>
+                <a:spcPts val="600"/>
+              </a:spcAft>
+              <a:buSzPct val="100000"/>
+              <a:buChar char="•"/>
+            </a:pPr>
+            <a:r>
+              <a:rPr lang="en-US" sz="1400" dirty="0">
+                <a:solidFill>
+                  <a:srgbClr val="3D3A36"/>
+                </a:solidFill>
+                <a:latin typeface="Calibri" pitchFamily="34" charset="0"/>
+                <a:ea typeface="Calibri" pitchFamily="34" charset="-122"/>
+                <a:cs typeface="Calibri" pitchFamily="34" charset="-120"/>
+              </a:rPr>
+              <a:t>Gentle slopes, wide base.</a:t>
+            </a:r>
+            <a:endParaRPr lang="en-US" sz="1400" dirty="0"/>
+          </a:p>
+          <a:p>
+            <a:pPr marL="342900" indent="-342900">
+              <a:spcAft>
+                <a:spcPts val="600"/>
+              </a:spcAft>
+              <a:buSzPct val="100000"/>
+              <a:buChar char="•"/>
+            </a:pPr>
+            <a:r>
+              <a:rPr lang="en-US" sz="1400" dirty="0">
+                <a:solidFill>
+                  <a:srgbClr val="3D3A36"/>
+                </a:solidFill>
+                <a:latin typeface="Calibri" pitchFamily="34" charset="0"/>
+                <a:ea typeface="Calibri" pitchFamily="34" charset="-122"/>
+                <a:cs typeface="Calibri" pitchFamily="34" charset="-120"/>
+              </a:rPr>
+              <a:t>Runny lava, less explosive.</a:t>
+            </a:r>
+            <a:endParaRPr lang="en-US" sz="1400" dirty="0"/>
+          </a:p>
+          <a:p>
+            <a:pPr marL="342900" indent="-342900">
+              <a:spcAft>
+                <a:spcPts val="600"/>
+              </a:spcAft>
+              <a:buSzPct val="100000"/>
+              <a:buChar char="•"/>
+            </a:pPr>
+            <a:r>
+              <a:rPr lang="en-US" sz="1400" dirty="0">
+                <a:solidFill>
+                  <a:srgbClr val="3D3A36"/>
+                </a:solidFill>
+                <a:latin typeface="Calibri" pitchFamily="34" charset="0"/>
+                <a:ea typeface="Calibri" pitchFamily="34" charset="-122"/>
+                <a:cs typeface="Calibri" pitchFamily="34" charset="-120"/>
+              </a:rPr>
+              <a:t>Example: Mauna Loa, Hawaii.</a:t>
+            </a:r>
+            <a:endParaRPr lang="en-US" sz="1400" dirty="0"/>
+          </a:p>
+        </p:txBody>
+      </p:sp>
+      <p:sp>
+        <p:nvSpPr>
+          <p:cNvPr id="9" name="Shape 7"/>
+          <p:cNvSpPr/>
+          <p:nvPr/>
+        </p:nvSpPr>
+        <p:spPr>
+          <a:xfrm>
+            <a:off x="4754880" y="1005840"/>
+            <a:ext cx="3931920" cy="3657600"/>
+          </a:xfrm>
+          <a:prstGeom prst="rect">
+            <a:avLst/>
+          </a:prstGeom>
+          <a:solidFill>
+            <a:srgbClr val="FFFFFF"/>
+          </a:solidFill>
+          <a:ln/>
+          <a:effectLst>
+            <a:outerShdw sx="100000" sy="100000" kx="0" ky="0" algn="bl" rotWithShape="0" blurRad="76200" dist="25400" dir="8100000">
+              <a:srgbClr val="000000">
+                <a:alpha val="12000"/>
+              </a:srgbClr>
+            </a:outerShdw>
+          </a:effectLst>
+        </p:spPr>
+      </p:sp>
+      <p:sp>
+        <p:nvSpPr>
+          <p:cNvPr id="10" name="Shape 8"/>
+          <p:cNvSpPr/>
+          <p:nvPr/>
+        </p:nvSpPr>
+        <p:spPr>
+          <a:xfrm>
+            <a:off x="4754880" y="1005840"/>
+            <a:ext cx="3931920" cy="64008"/>
           </a:xfrm>
           <a:prstGeom prst="rect">
             <a:avLst/>
@@ -2708,14 +3945,14 @@
       </p:sp>
       <p:sp>
         <p:nvSpPr>
-          <p:cNvPr id="3" name="Text 1"/>
-          <p:cNvSpPr/>
-          <p:nvPr/>
-        </p:nvSpPr>
-        <p:spPr>
-          <a:xfrm>
-            <a:off x="731520" y="457200"/>
-            <a:ext cx="7772400" cy="731520"/>
+          <p:cNvPr id="11" name="Text 9"/>
+          <p:cNvSpPr/>
+          <p:nvPr/>
+        </p:nvSpPr>
+        <p:spPr>
+          <a:xfrm>
+            <a:off x="4937760" y="1188720"/>
+            <a:ext cx="3566160" cy="457200"/>
           </a:xfrm>
           <a:prstGeom prst="rect">
             <a:avLst/>
@@ -2731,30 +3968,226 @@
               <a:buNone/>
             </a:pPr>
             <a:r>
-              <a:rPr lang="en-US" sz="3200" b="1" dirty="0">
-                <a:solidFill>
-                  <a:srgbClr val="FFFFFF"/>
+              <a:rPr lang="en-US" sz="1600" b="1" dirty="0">
+                <a:solidFill>
+                  <a:srgbClr val="E9C46A"/>
+                </a:solidFill>
+                <a:latin typeface="Calibri" pitchFamily="34" charset="0"/>
+                <a:ea typeface="Calibri" pitchFamily="34" charset="-122"/>
+                <a:cs typeface="Calibri" pitchFamily="34" charset="-120"/>
+              </a:rPr>
+              <a:t>Composite Volcano</a:t>
+            </a:r>
+            <a:endParaRPr lang="en-US" sz="1600" dirty="0"/>
+          </a:p>
+        </p:txBody>
+      </p:sp>
+      <p:sp>
+        <p:nvSpPr>
+          <p:cNvPr id="12" name="Text 10"/>
+          <p:cNvSpPr/>
+          <p:nvPr/>
+        </p:nvSpPr>
+        <p:spPr>
+          <a:xfrm>
+            <a:off x="4937760" y="1691640"/>
+            <a:ext cx="3566160" cy="2743200"/>
+          </a:xfrm>
+          <a:prstGeom prst="rect">
+            <a:avLst/>
+          </a:prstGeom>
+          <a:noFill/>
+          <a:ln/>
+        </p:spPr>
+        <p:txBody>
+          <a:bodyPr wrap="square" rtlCol="0" anchor="ctr"/>
+          <a:lstStyle/>
+          <a:p>
+            <a:pPr marL="342900" indent="-342900">
+              <a:spcAft>
+                <a:spcPts val="600"/>
+              </a:spcAft>
+              <a:buSzPct val="100000"/>
+              <a:buChar char="•"/>
+            </a:pPr>
+            <a:r>
+              <a:rPr lang="en-US" sz="1400" dirty="0">
+                <a:solidFill>
+                  <a:srgbClr val="3D3A36"/>
+                </a:solidFill>
+                <a:latin typeface="Calibri" pitchFamily="34" charset="0"/>
+                <a:ea typeface="Calibri" pitchFamily="34" charset="-122"/>
+                <a:cs typeface="Calibri" pitchFamily="34" charset="-120"/>
+              </a:rPr>
+              <a:t>Steep slopes, cone shape.</a:t>
+            </a:r>
+            <a:endParaRPr lang="en-US" sz="1400" dirty="0"/>
+          </a:p>
+          <a:p>
+            <a:pPr marL="342900" indent="-342900">
+              <a:spcAft>
+                <a:spcPts val="600"/>
+              </a:spcAft>
+              <a:buSzPct val="100000"/>
+              <a:buChar char="•"/>
+            </a:pPr>
+            <a:r>
+              <a:rPr lang="en-US" sz="1400" dirty="0">
+                <a:solidFill>
+                  <a:srgbClr val="3D3A36"/>
+                </a:solidFill>
+                <a:latin typeface="Calibri" pitchFamily="34" charset="0"/>
+                <a:ea typeface="Calibri" pitchFamily="34" charset="-122"/>
+                <a:cs typeface="Calibri" pitchFamily="34" charset="-120"/>
+              </a:rPr>
+              <a:t>Thick lava, very explosive.</a:t>
+            </a:r>
+            <a:endParaRPr lang="en-US" sz="1400" dirty="0"/>
+          </a:p>
+          <a:p>
+            <a:pPr marL="342900" indent="-342900">
+              <a:spcAft>
+                <a:spcPts val="600"/>
+              </a:spcAft>
+              <a:buSzPct val="100000"/>
+              <a:buChar char="•"/>
+            </a:pPr>
+            <a:r>
+              <a:rPr lang="en-US" sz="1400" dirty="0">
+                <a:solidFill>
+                  <a:srgbClr val="3D3A36"/>
+                </a:solidFill>
+                <a:latin typeface="Calibri" pitchFamily="34" charset="0"/>
+                <a:ea typeface="Calibri" pitchFamily="34" charset="-122"/>
+                <a:cs typeface="Calibri" pitchFamily="34" charset="-120"/>
+              </a:rPr>
+              <a:t>Mt. Fuji (Japan), Mt. Hallasan (Korea).</a:t>
+            </a:r>
+            <a:endParaRPr lang="en-US" sz="1400" dirty="0"/>
+          </a:p>
+        </p:txBody>
+      </p:sp>
+    </p:spTree>
+  </p:cSld>
+  <p:clrMapOvr>
+    <a:masterClrMapping/>
+  </p:clrMapOvr>
+</p:sld>
+</file>
+
+<file path=ppt/slides/slide6.xml><?xml version="1.0" encoding="utf-8"?>
+<p:sld xmlns:a="http://schemas.openxmlformats.org/drawingml/2006/main" xmlns:r="http://schemas.openxmlformats.org/officeDocument/2006/relationships" xmlns:p="http://schemas.openxmlformats.org/presentationml/2006/main">
+  <p:cSld name="Slide 6">
+    <p:bg>
+      <p:bgPr>
+        <a:solidFill>
+          <a:srgbClr val="FAF8F5"/>
+        </a:solidFill>
+      </p:bgPr>
+    </p:bg>
+    <p:spTree>
+      <p:nvGrpSpPr>
+        <p:cNvPr id="1" name=""/>
+        <p:cNvGrpSpPr/>
+        <p:nvPr/>
+      </p:nvGrpSpPr>
+      <p:grpSpPr>
+        <a:xfrm>
+          <a:off x="0" y="0"/>
+          <a:ext cx="0" cy="0"/>
+          <a:chOff x="0" y="0"/>
+          <a:chExt cx="0" cy="0"/>
+        </a:xfrm>
+      </p:grpSpPr>
+      <p:sp>
+        <p:nvSpPr>
+          <p:cNvPr id="2" name="Shape 0"/>
+          <p:cNvSpPr/>
+          <p:nvPr/>
+        </p:nvSpPr>
+        <p:spPr>
+          <a:xfrm>
+            <a:off x="0" y="0"/>
+            <a:ext cx="9144000" cy="822960"/>
+          </a:xfrm>
+          <a:prstGeom prst="rect">
+            <a:avLst/>
+          </a:prstGeom>
+          <a:solidFill>
+            <a:srgbClr val="FFFFFF"/>
+          </a:solidFill>
+          <a:ln/>
+        </p:spPr>
+      </p:sp>
+      <p:sp>
+        <p:nvSpPr>
+          <p:cNvPr id="3" name="Shape 1"/>
+          <p:cNvSpPr/>
+          <p:nvPr/>
+        </p:nvSpPr>
+        <p:spPr>
+          <a:xfrm>
+            <a:off x="0" y="795528"/>
+            <a:ext cx="9144000" cy="27432"/>
+          </a:xfrm>
+          <a:prstGeom prst="rect">
+            <a:avLst/>
+          </a:prstGeom>
+          <a:solidFill>
+            <a:srgbClr val="2A9D8F"/>
+          </a:solidFill>
+          <a:ln/>
+        </p:spPr>
+      </p:sp>
+      <p:sp>
+        <p:nvSpPr>
+          <p:cNvPr id="4" name="Text 2"/>
+          <p:cNvSpPr/>
+          <p:nvPr/>
+        </p:nvSpPr>
+        <p:spPr>
+          <a:xfrm>
+            <a:off x="640080" y="91440"/>
+            <a:ext cx="7863840" cy="640080"/>
+          </a:xfrm>
+          <a:prstGeom prst="rect">
+            <a:avLst/>
+          </a:prstGeom>
+          <a:noFill/>
+          <a:ln/>
+        </p:spPr>
+        <p:txBody>
+          <a:bodyPr wrap="square" lIns="0" tIns="0" rIns="0" bIns="0" rtlCol="0" anchor="ctr"/>
+          <a:lstStyle/>
+          <a:p>
+            <a:pPr indent="0" marL="0">
+              <a:buNone/>
+            </a:pPr>
+            <a:r>
+              <a:rPr lang="en-US" sz="2200" b="1" dirty="0">
+                <a:solidFill>
+                  <a:srgbClr val="1B2A4A"/>
                 </a:solidFill>
                 <a:latin typeface="Georgia" pitchFamily="34" charset="0"/>
                 <a:ea typeface="Georgia" pitchFamily="34" charset="-122"/>
                 <a:cs typeface="Georgia" pitchFamily="34" charset="-120"/>
               </a:rPr>
-              <a:t>Key Takeaways</a:t>
-            </a:r>
-            <a:endParaRPr lang="en-US" sz="3200" dirty="0"/>
-          </a:p>
-        </p:txBody>
-      </p:sp>
-      <p:sp>
-        <p:nvSpPr>
-          <p:cNvPr id="4" name="Text 2"/>
-          <p:cNvSpPr/>
-          <p:nvPr/>
-        </p:nvSpPr>
-        <p:spPr>
-          <a:xfrm>
-            <a:off x="731520" y="1463040"/>
-            <a:ext cx="7772400" cy="3200400"/>
+              <a:t>The Ring of Fire</a:t>
+            </a:r>
+            <a:endParaRPr lang="en-US" sz="2200" dirty="0"/>
+          </a:p>
+        </p:txBody>
+      </p:sp>
+      <p:sp>
+        <p:nvSpPr>
+          <p:cNvPr id="5" name="Text 3"/>
+          <p:cNvSpPr/>
+          <p:nvPr/>
+        </p:nvSpPr>
+        <p:spPr>
+          <a:xfrm>
+            <a:off x="640080" y="1005840"/>
+            <a:ext cx="7863840" cy="2926080"/>
           </a:xfrm>
           <a:prstGeom prst="rect">
             <a:avLst/>
@@ -2763,125 +4196,172 @@
           <a:ln/>
         </p:spPr>
         <p:txBody>
-          <a:bodyPr wrap="square" rtlCol="0" anchor="t"/>
+          <a:bodyPr wrap="square" rtlCol="0" anchor="ctr"/>
           <a:lstStyle/>
           <a:p>
             <a:pPr marL="342900" indent="-342900">
               <a:spcAft>
-                <a:spcPts val="1000"/>
+                <a:spcPts val="800"/>
               </a:spcAft>
               <a:buSzPct val="100000"/>
               <a:buChar char="•"/>
             </a:pPr>
             <a:r>
-              <a:rPr lang="en-US" sz="1500" dirty="0">
-                <a:solidFill>
-                  <a:srgbClr val="CADCFC"/>
+              <a:rPr lang="en-US" sz="1600" dirty="0">
+                <a:solidFill>
+                  <a:srgbClr val="3D3A36"/>
                 </a:solidFill>
                 <a:latin typeface="Calibri" pitchFamily="34" charset="0"/>
                 <a:ea typeface="Calibri" pitchFamily="34" charset="-122"/>
                 <a:cs typeface="Calibri" pitchFamily="34" charset="-120"/>
               </a:rPr>
-              <a:t>Earthquakes: plates stick → pressure builds → sudden release of seismic waves</a:t>
-            </a:r>
-            <a:endParaRPr lang="en-US" sz="1500" dirty="0"/>
+              <a:t>Horseshoe-shaped zone around the Pacific Ocean.</a:t>
+            </a:r>
+            <a:endParaRPr lang="en-US" sz="1600" dirty="0"/>
           </a:p>
           <a:p>
             <a:pPr marL="342900" indent="-342900">
               <a:spcAft>
-                <a:spcPts val="1000"/>
+                <a:spcPts val="800"/>
               </a:spcAft>
               <a:buSzPct val="100000"/>
               <a:buChar char="•"/>
             </a:pPr>
             <a:r>
-              <a:rPr lang="en-US" sz="1500" dirty="0">
-                <a:solidFill>
-                  <a:srgbClr val="CADCFC"/>
+              <a:rPr lang="en-US" sz="1600" dirty="0">
+                <a:solidFill>
+                  <a:srgbClr val="3D3A36"/>
                 </a:solidFill>
                 <a:latin typeface="Calibri" pitchFamily="34" charset="0"/>
                 <a:ea typeface="Calibri" pitchFamily="34" charset="-122"/>
                 <a:cs typeface="Calibri" pitchFamily="34" charset="-120"/>
               </a:rPr>
-              <a:t>Focus = underground origin; epicentre = surface point above</a:t>
-            </a:r>
-            <a:endParaRPr lang="en-US" sz="1500" dirty="0"/>
+              <a:t>Contains 75% of the world's active volcanoes.</a:t>
+            </a:r>
+            <a:endParaRPr lang="en-US" sz="1600" dirty="0"/>
           </a:p>
           <a:p>
             <a:pPr marL="342900" indent="-342900">
               <a:spcAft>
-                <a:spcPts val="1000"/>
+                <a:spcPts val="800"/>
               </a:spcAft>
               <a:buSzPct val="100000"/>
               <a:buChar char="•"/>
             </a:pPr>
             <a:r>
-              <a:rPr lang="en-US" sz="1500" dirty="0">
-                <a:solidFill>
-                  <a:srgbClr val="CADCFC"/>
+              <a:rPr lang="en-US" sz="1600" dirty="0">
+                <a:solidFill>
+                  <a:srgbClr val="3D3A36"/>
                 </a:solidFill>
                 <a:latin typeface="Calibri" pitchFamily="34" charset="0"/>
                 <a:ea typeface="Calibri" pitchFamily="34" charset="-122"/>
                 <a:cs typeface="Calibri" pitchFamily="34" charset="-120"/>
               </a:rPr>
-              <a:t>Richter scale: each number = ~30× more energy</a:t>
-            </a:r>
-            <a:endParaRPr lang="en-US" sz="1500" dirty="0"/>
+              <a:t>About 90% of all earthquakes happen here.</a:t>
+            </a:r>
+            <a:endParaRPr lang="en-US" sz="1600" dirty="0"/>
           </a:p>
           <a:p>
             <a:pPr marL="342900" indent="-342900">
               <a:spcAft>
-                <a:spcPts val="1000"/>
+                <a:spcPts val="800"/>
               </a:spcAft>
               <a:buSzPct val="100000"/>
               <a:buChar char="•"/>
             </a:pPr>
             <a:r>
-              <a:rPr lang="en-US" sz="1500" dirty="0">
-                <a:solidFill>
-                  <a:srgbClr val="CADCFC"/>
+              <a:rPr lang="en-US" sz="1600" dirty="0">
+                <a:solidFill>
+                  <a:srgbClr val="3D3A36"/>
                 </a:solidFill>
                 <a:latin typeface="Calibri" pitchFamily="34" charset="0"/>
                 <a:ea typeface="Calibri" pitchFamily="34" charset="-122"/>
                 <a:cs typeface="Calibri" pitchFamily="34" charset="-120"/>
               </a:rPr>
-              <a:t>Volcanoes form at convergent, divergent, and hotspot locations</a:t>
-            </a:r>
-            <a:endParaRPr lang="en-US" sz="1500" dirty="0"/>
+              <a:t>Countries affected: Japan, South Korea, Philippines, Indonesia, New Zealand.</a:t>
+            </a:r>
+            <a:endParaRPr lang="en-US" sz="1600" dirty="0"/>
           </a:p>
           <a:p>
             <a:pPr marL="342900" indent="-342900">
               <a:spcAft>
-                <a:spcPts val="1000"/>
+                <a:spcPts val="800"/>
               </a:spcAft>
               <a:buSzPct val="100000"/>
               <a:buChar char="•"/>
             </a:pPr>
             <a:r>
-              <a:rPr lang="en-US" sz="1500" dirty="0">
-                <a:solidFill>
-                  <a:srgbClr val="CADCFC"/>
+              <a:rPr lang="en-US" sz="1600" dirty="0">
+                <a:solidFill>
+                  <a:srgbClr val="3D3A36"/>
                 </a:solidFill>
                 <a:latin typeface="Calibri" pitchFamily="34" charset="0"/>
                 <a:ea typeface="Calibri" pitchFamily="34" charset="-122"/>
                 <a:cs typeface="Calibri" pitchFamily="34" charset="-120"/>
               </a:rPr>
-              <a:t>Explosive (thick lava, violent) vs effusive (thin lava, gentle)</a:t>
-            </a:r>
-            <a:endParaRPr lang="en-US" sz="1500" dirty="0"/>
-          </a:p>
-        </p:txBody>
-      </p:sp>
-      <p:sp>
-        <p:nvSpPr>
-          <p:cNvPr id="5" name="Text 3"/>
-          <p:cNvSpPr/>
-          <p:nvPr/>
-        </p:nvSpPr>
-        <p:spPr>
-          <a:xfrm>
-            <a:off x="731520" y="4572000"/>
-            <a:ext cx="7772400" cy="365760"/>
+              <a:t>China's east coast is influenced by this zone.</a:t>
+            </a:r>
+            <a:endParaRPr lang="en-US" sz="1600" dirty="0"/>
+          </a:p>
+        </p:txBody>
+      </p:sp>
+      <p:sp>
+        <p:nvSpPr>
+          <p:cNvPr id="6" name="Shape 4"/>
+          <p:cNvSpPr/>
+          <p:nvPr/>
+        </p:nvSpPr>
+        <p:spPr>
+          <a:xfrm>
+            <a:off x="640080" y="4114800"/>
+            <a:ext cx="7863840" cy="731520"/>
+          </a:xfrm>
+          <a:prstGeom prst="rect">
+            <a:avLst/>
+          </a:prstGeom>
+          <a:solidFill>
+            <a:srgbClr val="E8F5F3"/>
+          </a:solidFill>
+          <a:ln/>
+          <a:effectLst>
+            <a:outerShdw sx="100000" sy="100000" kx="0" ky="0" algn="bl" rotWithShape="0" blurRad="76200" dist="25400" dir="8100000">
+              <a:srgbClr val="000000">
+                <a:alpha val="12000"/>
+              </a:srgbClr>
+            </a:outerShdw>
+          </a:effectLst>
+        </p:spPr>
+      </p:sp>
+      <p:sp>
+        <p:nvSpPr>
+          <p:cNvPr id="7" name="Shape 5"/>
+          <p:cNvSpPr/>
+          <p:nvPr/>
+        </p:nvSpPr>
+        <p:spPr>
+          <a:xfrm>
+            <a:off x="640080" y="4114800"/>
+            <a:ext cx="64008" cy="731520"/>
+          </a:xfrm>
+          <a:prstGeom prst="rect">
+            <a:avLst/>
+          </a:prstGeom>
+          <a:solidFill>
+            <a:srgbClr val="2A9D8F"/>
+          </a:solidFill>
+          <a:ln/>
+        </p:spPr>
+      </p:sp>
+      <p:sp>
+        <p:nvSpPr>
+          <p:cNvPr id="8" name="Text 6"/>
+          <p:cNvSpPr/>
+          <p:nvPr/>
+        </p:nvSpPr>
+        <p:spPr>
+          <a:xfrm>
+            <a:off x="914400" y="4160520"/>
+            <a:ext cx="7406640" cy="640080"/>
           </a:xfrm>
           <a:prstGeom prst="rect">
             <a:avLst/>
@@ -2897,15 +4377,1640 @@
               <a:buNone/>
             </a:pPr>
             <a:r>
-              <a:rPr lang="en-US" sz="1100" dirty="0">
-                <a:solidFill>
-                  <a:srgbClr val="E9C46A"/>
+              <a:rPr lang="en-US" sz="1300" i="1" dirty="0">
+                <a:solidFill>
+                  <a:srgbClr val="3D3A36"/>
                 </a:solidFill>
                 <a:latin typeface="Calibri" pitchFamily="34" charset="0"/>
                 <a:ea typeface="Calibri" pitchFamily="34" charset="-122"/>
                 <a:cs typeface="Calibri" pitchFamily="34" charset="-120"/>
               </a:rPr>
-              <a:t>mrzocchi.com</a:t>
+              <a:t>Jeju Island (제주도) was formed by volcanic activity — Mt. Hallasan is a shield volcano.</a:t>
+            </a:r>
+            <a:endParaRPr lang="en-US" sz="1300" dirty="0"/>
+          </a:p>
+        </p:txBody>
+      </p:sp>
+    </p:spTree>
+  </p:cSld>
+  <p:clrMapOvr>
+    <a:masterClrMapping/>
+  </p:clrMapOvr>
+</p:sld>
+</file>
+
+<file path=ppt/slides/slide7.xml><?xml version="1.0" encoding="utf-8"?>
+<p:sld xmlns:a="http://schemas.openxmlformats.org/drawingml/2006/main" xmlns:r="http://schemas.openxmlformats.org/officeDocument/2006/relationships" xmlns:p="http://schemas.openxmlformats.org/presentationml/2006/main">
+  <p:cSld name="Slide 7">
+    <p:bg>
+      <p:bgPr>
+        <a:solidFill>
+          <a:srgbClr val="FAF8F5"/>
+        </a:solidFill>
+      </p:bgPr>
+    </p:bg>
+    <p:spTree>
+      <p:nvGrpSpPr>
+        <p:cNvPr id="1" name=""/>
+        <p:cNvGrpSpPr/>
+        <p:nvPr/>
+      </p:nvGrpSpPr>
+      <p:grpSpPr>
+        <a:xfrm>
+          <a:off x="0" y="0"/>
+          <a:ext cx="0" cy="0"/>
+          <a:chOff x="0" y="0"/>
+          <a:chExt cx="0" cy="0"/>
+        </a:xfrm>
+      </p:grpSpPr>
+      <p:sp>
+        <p:nvSpPr>
+          <p:cNvPr id="2" name="Shape 0"/>
+          <p:cNvSpPr/>
+          <p:nvPr/>
+        </p:nvSpPr>
+        <p:spPr>
+          <a:xfrm>
+            <a:off x="0" y="0"/>
+            <a:ext cx="9144000" cy="822960"/>
+          </a:xfrm>
+          <a:prstGeom prst="rect">
+            <a:avLst/>
+          </a:prstGeom>
+          <a:solidFill>
+            <a:srgbClr val="FFFFFF"/>
+          </a:solidFill>
+          <a:ln/>
+        </p:spPr>
+      </p:sp>
+      <p:sp>
+        <p:nvSpPr>
+          <p:cNvPr id="3" name="Shape 1"/>
+          <p:cNvSpPr/>
+          <p:nvPr/>
+        </p:nvSpPr>
+        <p:spPr>
+          <a:xfrm>
+            <a:off x="0" y="795528"/>
+            <a:ext cx="9144000" cy="27432"/>
+          </a:xfrm>
+          <a:prstGeom prst="rect">
+            <a:avLst/>
+          </a:prstGeom>
+          <a:solidFill>
+            <a:srgbClr val="2A9D8F"/>
+          </a:solidFill>
+          <a:ln/>
+        </p:spPr>
+      </p:sp>
+      <p:sp>
+        <p:nvSpPr>
+          <p:cNvPr id="4" name="Text 2"/>
+          <p:cNvSpPr/>
+          <p:nvPr/>
+        </p:nvSpPr>
+        <p:spPr>
+          <a:xfrm>
+            <a:off x="640080" y="91440"/>
+            <a:ext cx="7863840" cy="640080"/>
+          </a:xfrm>
+          <a:prstGeom prst="rect">
+            <a:avLst/>
+          </a:prstGeom>
+          <a:noFill/>
+          <a:ln/>
+        </p:spPr>
+        <p:txBody>
+          <a:bodyPr wrap="square" lIns="0" tIns="0" rIns="0" bIns="0" rtlCol="0" anchor="ctr"/>
+          <a:lstStyle/>
+          <a:p>
+            <a:pPr indent="0" marL="0">
+              <a:buNone/>
+            </a:pPr>
+            <a:r>
+              <a:rPr lang="en-US" sz="2200" b="1" dirty="0">
+                <a:solidFill>
+                  <a:srgbClr val="1B2A4A"/>
+                </a:solidFill>
+                <a:latin typeface="Georgia" pitchFamily="34" charset="0"/>
+                <a:ea typeface="Georgia" pitchFamily="34" charset="-122"/>
+                <a:cs typeface="Georgia" pitchFamily="34" charset="-120"/>
+              </a:rPr>
+              <a:t>Living with Earthquakes: Regional Approaches</a:t>
+            </a:r>
+            <a:endParaRPr lang="en-US" sz="2200" dirty="0"/>
+          </a:p>
+        </p:txBody>
+      </p:sp>
+      <p:sp>
+        <p:nvSpPr>
+          <p:cNvPr id="5" name="Text 3"/>
+          <p:cNvSpPr/>
+          <p:nvPr/>
+        </p:nvSpPr>
+        <p:spPr>
+          <a:xfrm>
+            <a:off x="640080" y="1005840"/>
+            <a:ext cx="7863840" cy="2926080"/>
+          </a:xfrm>
+          <a:prstGeom prst="rect">
+            <a:avLst/>
+          </a:prstGeom>
+          <a:noFill/>
+          <a:ln/>
+        </p:spPr>
+        <p:txBody>
+          <a:bodyPr wrap="square" rtlCol="0" anchor="ctr"/>
+          <a:lstStyle/>
+          <a:p>
+            <a:pPr marL="342900" indent="-342900">
+              <a:spcAft>
+                <a:spcPts val="800"/>
+              </a:spcAft>
+              <a:buSzPct val="100000"/>
+              <a:buChar char="•"/>
+            </a:pPr>
+            <a:r>
+              <a:rPr lang="en-US" sz="1600" dirty="0">
+                <a:solidFill>
+                  <a:srgbClr val="3D3A36"/>
+                </a:solidFill>
+                <a:latin typeface="Calibri" pitchFamily="34" charset="0"/>
+                <a:ea typeface="Calibri" pitchFamily="34" charset="-122"/>
+                <a:cs typeface="Calibri" pitchFamily="34" charset="-120"/>
+              </a:rPr>
+              <a:t>Japan: earthquake-resistant buildings, tsunami warnings, school drills.</a:t>
+            </a:r>
+            <a:endParaRPr lang="en-US" sz="1600" dirty="0"/>
+          </a:p>
+          <a:p>
+            <a:pPr marL="342900" indent="-342900">
+              <a:spcAft>
+                <a:spcPts val="800"/>
+              </a:spcAft>
+              <a:buSzPct val="100000"/>
+              <a:buChar char="•"/>
+            </a:pPr>
+            <a:r>
+              <a:rPr lang="en-US" sz="1600" dirty="0">
+                <a:solidFill>
+                  <a:srgbClr val="3D3A36"/>
+                </a:solidFill>
+                <a:latin typeface="Calibri" pitchFamily="34" charset="0"/>
+                <a:ea typeface="Calibri" pitchFamily="34" charset="-122"/>
+                <a:cs typeface="Calibri" pitchFamily="34" charset="-120"/>
+              </a:rPr>
+              <a:t>South Korea: strict building codes since 2016 Gyeongju earthquake.</a:t>
+            </a:r>
+            <a:endParaRPr lang="en-US" sz="1600" dirty="0"/>
+          </a:p>
+          <a:p>
+            <a:pPr marL="342900" indent="-342900">
+              <a:spcAft>
+                <a:spcPts val="800"/>
+              </a:spcAft>
+              <a:buSzPct val="100000"/>
+              <a:buChar char="•"/>
+            </a:pPr>
+            <a:r>
+              <a:rPr lang="en-US" sz="1600" dirty="0">
+                <a:solidFill>
+                  <a:srgbClr val="3D3A36"/>
+                </a:solidFill>
+                <a:latin typeface="Calibri" pitchFamily="34" charset="0"/>
+                <a:ea typeface="Calibri" pitchFamily="34" charset="-122"/>
+                <a:cs typeface="Calibri" pitchFamily="34" charset="-120"/>
+              </a:rPr>
+              <a:t>China: rapid-response systems after 2008 Sichuan earthquake.</a:t>
+            </a:r>
+            <a:endParaRPr lang="en-US" sz="1600" dirty="0"/>
+          </a:p>
+          <a:p>
+            <a:pPr marL="342900" indent="-342900">
+              <a:spcAft>
+                <a:spcPts val="800"/>
+              </a:spcAft>
+              <a:buSzPct val="100000"/>
+              <a:buChar char="•"/>
+            </a:pPr>
+            <a:r>
+              <a:rPr lang="en-US" sz="1600" dirty="0">
+                <a:solidFill>
+                  <a:srgbClr val="3D3A36"/>
+                </a:solidFill>
+                <a:latin typeface="Calibri" pitchFamily="34" charset="0"/>
+                <a:ea typeface="Calibri" pitchFamily="34" charset="-122"/>
+                <a:cs typeface="Calibri" pitchFamily="34" charset="-120"/>
+              </a:rPr>
+              <a:t>Germany: very few earthquakes — sits in the middle of the Eurasian plate.</a:t>
+            </a:r>
+            <a:endParaRPr lang="en-US" sz="1600" dirty="0"/>
+          </a:p>
+        </p:txBody>
+      </p:sp>
+      <p:sp>
+        <p:nvSpPr>
+          <p:cNvPr id="6" name="Shape 4"/>
+          <p:cNvSpPr/>
+          <p:nvPr/>
+        </p:nvSpPr>
+        <p:spPr>
+          <a:xfrm>
+            <a:off x="640080" y="4114800"/>
+            <a:ext cx="7863840" cy="731520"/>
+          </a:xfrm>
+          <a:prstGeom prst="rect">
+            <a:avLst/>
+          </a:prstGeom>
+          <a:solidFill>
+            <a:srgbClr val="E8F5F3"/>
+          </a:solidFill>
+          <a:ln/>
+          <a:effectLst>
+            <a:outerShdw sx="100000" sy="100000" kx="0" ky="0" algn="bl" rotWithShape="0" blurRad="76200" dist="25400" dir="8100000">
+              <a:srgbClr val="000000">
+                <a:alpha val="12000"/>
+              </a:srgbClr>
+            </a:outerShdw>
+          </a:effectLst>
+        </p:spPr>
+      </p:sp>
+      <p:sp>
+        <p:nvSpPr>
+          <p:cNvPr id="7" name="Shape 5"/>
+          <p:cNvSpPr/>
+          <p:nvPr/>
+        </p:nvSpPr>
+        <p:spPr>
+          <a:xfrm>
+            <a:off x="640080" y="4114800"/>
+            <a:ext cx="64008" cy="731520"/>
+          </a:xfrm>
+          <a:prstGeom prst="rect">
+            <a:avLst/>
+          </a:prstGeom>
+          <a:solidFill>
+            <a:srgbClr val="2A9D8F"/>
+          </a:solidFill>
+          <a:ln/>
+        </p:spPr>
+      </p:sp>
+      <p:sp>
+        <p:nvSpPr>
+          <p:cNvPr id="8" name="Text 6"/>
+          <p:cNvSpPr/>
+          <p:nvPr/>
+        </p:nvSpPr>
+        <p:spPr>
+          <a:xfrm>
+            <a:off x="914400" y="4160520"/>
+            <a:ext cx="7406640" cy="640080"/>
+          </a:xfrm>
+          <a:prstGeom prst="rect">
+            <a:avLst/>
+          </a:prstGeom>
+          <a:noFill/>
+          <a:ln/>
+        </p:spPr>
+        <p:txBody>
+          <a:bodyPr wrap="square" rtlCol="0" anchor="ctr"/>
+          <a:lstStyle/>
+          <a:p>
+            <a:pPr indent="0" marL="0">
+              <a:buNone/>
+            </a:pPr>
+            <a:r>
+              <a:rPr lang="en-US" sz="1300" i="1" dirty="0">
+                <a:solidFill>
+                  <a:srgbClr val="3D3A36"/>
+                </a:solidFill>
+                <a:latin typeface="Calibri" pitchFamily="34" charset="0"/>
+                <a:ea typeface="Calibri" pitchFamily="34" charset="-122"/>
+                <a:cs typeface="Calibri" pitchFamily="34" charset="-120"/>
+              </a:rPr>
+              <a:t>Nanjing's Zifeng Tower (紫峰大厦) was designed with earthquake resistance.</a:t>
+            </a:r>
+            <a:endParaRPr lang="en-US" sz="1300" dirty="0"/>
+          </a:p>
+        </p:txBody>
+      </p:sp>
+    </p:spTree>
+  </p:cSld>
+  <p:clrMapOvr>
+    <a:masterClrMapping/>
+  </p:clrMapOvr>
+</p:sld>
+</file>
+
+<file path=ppt/slides/slide8.xml><?xml version="1.0" encoding="utf-8"?>
+<p:sld xmlns:a="http://schemas.openxmlformats.org/drawingml/2006/main" xmlns:r="http://schemas.openxmlformats.org/officeDocument/2006/relationships" xmlns:p="http://schemas.openxmlformats.org/presentationml/2006/main">
+  <p:cSld name="Slide 8">
+    <p:spTree>
+      <p:nvGrpSpPr>
+        <p:cNvPr id="1" name=""/>
+        <p:cNvGrpSpPr/>
+        <p:nvPr/>
+      </p:nvGrpSpPr>
+      <p:grpSpPr>
+        <a:xfrm>
+          <a:off x="0" y="0"/>
+          <a:ext cx="0" cy="0"/>
+          <a:chOff x="0" y="0"/>
+          <a:chExt cx="0" cy="0"/>
+        </a:xfrm>
+      </p:grpSpPr>
+      <p:sp>
+        <p:nvSpPr>
+          <p:cNvPr id="2" name="Shape 0"/>
+          <p:cNvSpPr/>
+          <p:nvPr/>
+        </p:nvSpPr>
+        <p:spPr>
+          <a:xfrm>
+            <a:off x="0" y="0"/>
+            <a:ext cx="9144000" cy="5143500"/>
+          </a:xfrm>
+          <a:prstGeom prst="rect">
+            <a:avLst/>
+          </a:prstGeom>
+          <a:solidFill>
+            <a:srgbClr val="1B2A4A"/>
+          </a:solidFill>
+          <a:ln/>
+        </p:spPr>
+      </p:sp>
+      <p:sp>
+        <p:nvSpPr>
+          <p:cNvPr id="3" name="Text 1"/>
+          <p:cNvSpPr/>
+          <p:nvPr/>
+        </p:nvSpPr>
+        <p:spPr>
+          <a:xfrm>
+            <a:off x="640080" y="365760"/>
+            <a:ext cx="7863840" cy="640080"/>
+          </a:xfrm>
+          <a:prstGeom prst="rect">
+            <a:avLst/>
+          </a:prstGeom>
+          <a:noFill/>
+          <a:ln/>
+        </p:spPr>
+        <p:txBody>
+          <a:bodyPr wrap="square" rtlCol="0" anchor="ctr"/>
+          <a:lstStyle/>
+          <a:p>
+            <a:pPr indent="0" marL="0">
+              <a:buNone/>
+            </a:pPr>
+            <a:r>
+              <a:rPr lang="en-US" sz="2200" b="1" dirty="0">
+                <a:solidFill>
+                  <a:srgbClr val="FFFFFF"/>
+                </a:solidFill>
+                <a:latin typeface="Georgia" pitchFamily="34" charset="0"/>
+                <a:ea typeface="Georgia" pitchFamily="34" charset="-122"/>
+                <a:cs typeface="Georgia" pitchFamily="34" charset="-120"/>
+              </a:rPr>
+              <a:t>Ring of Fire by Numbers</a:t>
+            </a:r>
+            <a:endParaRPr lang="en-US" sz="2200" dirty="0"/>
+          </a:p>
+        </p:txBody>
+      </p:sp>
+      <p:sp>
+        <p:nvSpPr>
+          <p:cNvPr id="4" name="Shape 2"/>
+          <p:cNvSpPr/>
+          <p:nvPr/>
+        </p:nvSpPr>
+        <p:spPr>
+          <a:xfrm>
+            <a:off x="640080" y="1280160"/>
+            <a:ext cx="2438400" cy="2926080"/>
+          </a:xfrm>
+          <a:prstGeom prst="rect">
+            <a:avLst/>
+          </a:prstGeom>
+          <a:solidFill>
+            <a:srgbClr val="243660"/>
+          </a:solidFill>
+          <a:ln/>
+          <a:effectLst>
+            <a:outerShdw sx="100000" sy="100000" kx="0" ky="0" algn="bl" rotWithShape="0" blurRad="76200" dist="25400" dir="8100000">
+              <a:srgbClr val="000000">
+                <a:alpha val="12000"/>
+              </a:srgbClr>
+            </a:outerShdw>
+          </a:effectLst>
+        </p:spPr>
+      </p:sp>
+      <p:sp>
+        <p:nvSpPr>
+          <p:cNvPr id="5" name="Text 3"/>
+          <p:cNvSpPr/>
+          <p:nvPr/>
+        </p:nvSpPr>
+        <p:spPr>
+          <a:xfrm>
+            <a:off x="640080" y="1463040"/>
+            <a:ext cx="2438400" cy="1280160"/>
+          </a:xfrm>
+          <a:prstGeom prst="rect">
+            <a:avLst/>
+          </a:prstGeom>
+          <a:noFill/>
+          <a:ln/>
+        </p:spPr>
+        <p:txBody>
+          <a:bodyPr wrap="square" rtlCol="0" anchor="ctr"/>
+          <a:lstStyle/>
+          <a:p>
+            <a:pPr algn="ctr" indent="0" marL="0">
+              <a:buNone/>
+            </a:pPr>
+            <a:r>
+              <a:rPr lang="en-US" sz="4800" b="1" dirty="0">
+                <a:solidFill>
+                  <a:srgbClr val="2A9D8F"/>
+                </a:solidFill>
+                <a:latin typeface="Georgia" pitchFamily="34" charset="0"/>
+                <a:ea typeface="Georgia" pitchFamily="34" charset="-122"/>
+                <a:cs typeface="Georgia" pitchFamily="34" charset="-120"/>
+              </a:rPr>
+              <a:t>75%</a:t>
+            </a:r>
+            <a:endParaRPr lang="en-US" sz="4800" dirty="0"/>
+          </a:p>
+        </p:txBody>
+      </p:sp>
+      <p:sp>
+        <p:nvSpPr>
+          <p:cNvPr id="6" name="Text 4"/>
+          <p:cNvSpPr/>
+          <p:nvPr/>
+        </p:nvSpPr>
+        <p:spPr>
+          <a:xfrm>
+            <a:off x="640080" y="2743200"/>
+            <a:ext cx="2438400" cy="548640"/>
+          </a:xfrm>
+          <a:prstGeom prst="rect">
+            <a:avLst/>
+          </a:prstGeom>
+          <a:noFill/>
+          <a:ln/>
+        </p:spPr>
+        <p:txBody>
+          <a:bodyPr wrap="square" rtlCol="0" anchor="ctr"/>
+          <a:lstStyle/>
+          <a:p>
+            <a:pPr algn="ctr" indent="0" marL="0">
+              <a:buNone/>
+            </a:pPr>
+            <a:r>
+              <a:rPr lang="en-US" sz="1400" b="1" dirty="0">
+                <a:solidFill>
+                  <a:srgbClr val="9B9690"/>
+                </a:solidFill>
+                <a:latin typeface="Calibri" pitchFamily="34" charset="0"/>
+                <a:ea typeface="Calibri" pitchFamily="34" charset="-122"/>
+                <a:cs typeface="Calibri" pitchFamily="34" charset="-120"/>
+              </a:rPr>
+              <a:t>World's Volcanoes</a:t>
+            </a:r>
+            <a:endParaRPr lang="en-US" sz="1400" dirty="0"/>
+          </a:p>
+        </p:txBody>
+      </p:sp>
+      <p:sp>
+        <p:nvSpPr>
+          <p:cNvPr id="7" name="Text 5"/>
+          <p:cNvSpPr/>
+          <p:nvPr/>
+        </p:nvSpPr>
+        <p:spPr>
+          <a:xfrm>
+            <a:off x="822960" y="3291840"/>
+            <a:ext cx="2072640" cy="731520"/>
+          </a:xfrm>
+          <a:prstGeom prst="rect">
+            <a:avLst/>
+          </a:prstGeom>
+          <a:noFill/>
+          <a:ln/>
+        </p:spPr>
+        <p:txBody>
+          <a:bodyPr wrap="square" rtlCol="0" anchor="ctr"/>
+          <a:lstStyle/>
+          <a:p>
+            <a:pPr algn="ctr" indent="0" marL="0">
+              <a:buNone/>
+            </a:pPr>
+            <a:r>
+              <a:rPr lang="en-US" sz="1200" dirty="0">
+                <a:solidFill>
+                  <a:srgbClr val="9B9690"/>
+                </a:solidFill>
+                <a:latin typeface="Calibri" pitchFamily="34" charset="0"/>
+                <a:ea typeface="Calibri" pitchFamily="34" charset="-122"/>
+                <a:cs typeface="Calibri" pitchFamily="34" charset="-120"/>
+              </a:rPr>
+              <a:t>In the Ring of Fire</a:t>
+            </a:r>
+            <a:endParaRPr lang="en-US" sz="1200" dirty="0"/>
+          </a:p>
+        </p:txBody>
+      </p:sp>
+      <p:sp>
+        <p:nvSpPr>
+          <p:cNvPr id="8" name="Shape 6"/>
+          <p:cNvSpPr/>
+          <p:nvPr/>
+        </p:nvSpPr>
+        <p:spPr>
+          <a:xfrm>
+            <a:off x="3352800" y="1280160"/>
+            <a:ext cx="2438400" cy="2926080"/>
+          </a:xfrm>
+          <a:prstGeom prst="rect">
+            <a:avLst/>
+          </a:prstGeom>
+          <a:solidFill>
+            <a:srgbClr val="243660"/>
+          </a:solidFill>
+          <a:ln/>
+          <a:effectLst>
+            <a:outerShdw sx="100000" sy="100000" kx="0" ky="0" algn="bl" rotWithShape="0" blurRad="76200" dist="25400" dir="8100000">
+              <a:srgbClr val="000000">
+                <a:alpha val="12000"/>
+              </a:srgbClr>
+            </a:outerShdw>
+          </a:effectLst>
+        </p:spPr>
+      </p:sp>
+      <p:sp>
+        <p:nvSpPr>
+          <p:cNvPr id="9" name="Text 7"/>
+          <p:cNvSpPr/>
+          <p:nvPr/>
+        </p:nvSpPr>
+        <p:spPr>
+          <a:xfrm>
+            <a:off x="3352800" y="1463040"/>
+            <a:ext cx="2438400" cy="1280160"/>
+          </a:xfrm>
+          <a:prstGeom prst="rect">
+            <a:avLst/>
+          </a:prstGeom>
+          <a:noFill/>
+          <a:ln/>
+        </p:spPr>
+        <p:txBody>
+          <a:bodyPr wrap="square" rtlCol="0" anchor="ctr"/>
+          <a:lstStyle/>
+          <a:p>
+            <a:pPr algn="ctr" indent="0" marL="0">
+              <a:buNone/>
+            </a:pPr>
+            <a:r>
+              <a:rPr lang="en-US" sz="4800" b="1" dirty="0">
+                <a:solidFill>
+                  <a:srgbClr val="2A9D8F"/>
+                </a:solidFill>
+                <a:latin typeface="Georgia" pitchFamily="34" charset="0"/>
+                <a:ea typeface="Georgia" pitchFamily="34" charset="-122"/>
+                <a:cs typeface="Georgia" pitchFamily="34" charset="-120"/>
+              </a:rPr>
+              <a:t>452</a:t>
+            </a:r>
+            <a:endParaRPr lang="en-US" sz="4800" dirty="0"/>
+          </a:p>
+        </p:txBody>
+      </p:sp>
+      <p:sp>
+        <p:nvSpPr>
+          <p:cNvPr id="10" name="Text 8"/>
+          <p:cNvSpPr/>
+          <p:nvPr/>
+        </p:nvSpPr>
+        <p:spPr>
+          <a:xfrm>
+            <a:off x="3352800" y="2743200"/>
+            <a:ext cx="2438400" cy="548640"/>
+          </a:xfrm>
+          <a:prstGeom prst="rect">
+            <a:avLst/>
+          </a:prstGeom>
+          <a:noFill/>
+          <a:ln/>
+        </p:spPr>
+        <p:txBody>
+          <a:bodyPr wrap="square" rtlCol="0" anchor="ctr"/>
+          <a:lstStyle/>
+          <a:p>
+            <a:pPr algn="ctr" indent="0" marL="0">
+              <a:buNone/>
+            </a:pPr>
+            <a:r>
+              <a:rPr lang="en-US" sz="1400" b="1" dirty="0">
+                <a:solidFill>
+                  <a:srgbClr val="9B9690"/>
+                </a:solidFill>
+                <a:latin typeface="Calibri" pitchFamily="34" charset="0"/>
+                <a:ea typeface="Calibri" pitchFamily="34" charset="-122"/>
+                <a:cs typeface="Calibri" pitchFamily="34" charset="-120"/>
+              </a:rPr>
+              <a:t>Active Volcanoes</a:t>
+            </a:r>
+            <a:endParaRPr lang="en-US" sz="1400" dirty="0"/>
+          </a:p>
+        </p:txBody>
+      </p:sp>
+      <p:sp>
+        <p:nvSpPr>
+          <p:cNvPr id="11" name="Text 9"/>
+          <p:cNvSpPr/>
+          <p:nvPr/>
+        </p:nvSpPr>
+        <p:spPr>
+          <a:xfrm>
+            <a:off x="3535680" y="3291840"/>
+            <a:ext cx="2072640" cy="731520"/>
+          </a:xfrm>
+          <a:prstGeom prst="rect">
+            <a:avLst/>
+          </a:prstGeom>
+          <a:noFill/>
+          <a:ln/>
+        </p:spPr>
+        <p:txBody>
+          <a:bodyPr wrap="square" rtlCol="0" anchor="ctr"/>
+          <a:lstStyle/>
+          <a:p>
+            <a:pPr algn="ctr" indent="0" marL="0">
+              <a:buNone/>
+            </a:pPr>
+            <a:r>
+              <a:rPr lang="en-US" sz="1200" dirty="0">
+                <a:solidFill>
+                  <a:srgbClr val="9B9690"/>
+                </a:solidFill>
+                <a:latin typeface="Calibri" pitchFamily="34" charset="0"/>
+                <a:ea typeface="Calibri" pitchFamily="34" charset="-122"/>
+                <a:cs typeface="Calibri" pitchFamily="34" charset="-120"/>
+              </a:rPr>
+              <a:t>Along the 40,000 km belt</a:t>
+            </a:r>
+            <a:endParaRPr lang="en-US" sz="1200" dirty="0"/>
+          </a:p>
+        </p:txBody>
+      </p:sp>
+      <p:sp>
+        <p:nvSpPr>
+          <p:cNvPr id="12" name="Shape 10"/>
+          <p:cNvSpPr/>
+          <p:nvPr/>
+        </p:nvSpPr>
+        <p:spPr>
+          <a:xfrm>
+            <a:off x="6065520" y="1280160"/>
+            <a:ext cx="2438400" cy="2926080"/>
+          </a:xfrm>
+          <a:prstGeom prst="rect">
+            <a:avLst/>
+          </a:prstGeom>
+          <a:solidFill>
+            <a:srgbClr val="243660"/>
+          </a:solidFill>
+          <a:ln/>
+          <a:effectLst>
+            <a:outerShdw sx="100000" sy="100000" kx="0" ky="0" algn="bl" rotWithShape="0" blurRad="76200" dist="25400" dir="8100000">
+              <a:srgbClr val="000000">
+                <a:alpha val="12000"/>
+              </a:srgbClr>
+            </a:outerShdw>
+          </a:effectLst>
+        </p:spPr>
+      </p:sp>
+      <p:sp>
+        <p:nvSpPr>
+          <p:cNvPr id="13" name="Text 11"/>
+          <p:cNvSpPr/>
+          <p:nvPr/>
+        </p:nvSpPr>
+        <p:spPr>
+          <a:xfrm>
+            <a:off x="6065520" y="1463040"/>
+            <a:ext cx="2438400" cy="1280160"/>
+          </a:xfrm>
+          <a:prstGeom prst="rect">
+            <a:avLst/>
+          </a:prstGeom>
+          <a:noFill/>
+          <a:ln/>
+        </p:spPr>
+        <p:txBody>
+          <a:bodyPr wrap="square" rtlCol="0" anchor="ctr"/>
+          <a:lstStyle/>
+          <a:p>
+            <a:pPr algn="ctr" indent="0" marL="0">
+              <a:buNone/>
+            </a:pPr>
+            <a:r>
+              <a:rPr lang="en-US" sz="4800" b="1" dirty="0">
+                <a:solidFill>
+                  <a:srgbClr val="2A9D8F"/>
+                </a:solidFill>
+                <a:latin typeface="Georgia" pitchFamily="34" charset="0"/>
+                <a:ea typeface="Georgia" pitchFamily="34" charset="-122"/>
+                <a:cs typeface="Georgia" pitchFamily="34" charset="-120"/>
+              </a:rPr>
+              <a:t>90%</a:t>
+            </a:r>
+            <a:endParaRPr lang="en-US" sz="4800" dirty="0"/>
+          </a:p>
+        </p:txBody>
+      </p:sp>
+      <p:sp>
+        <p:nvSpPr>
+          <p:cNvPr id="14" name="Text 12"/>
+          <p:cNvSpPr/>
+          <p:nvPr/>
+        </p:nvSpPr>
+        <p:spPr>
+          <a:xfrm>
+            <a:off x="6065520" y="2743200"/>
+            <a:ext cx="2438400" cy="548640"/>
+          </a:xfrm>
+          <a:prstGeom prst="rect">
+            <a:avLst/>
+          </a:prstGeom>
+          <a:noFill/>
+          <a:ln/>
+        </p:spPr>
+        <p:txBody>
+          <a:bodyPr wrap="square" rtlCol="0" anchor="ctr"/>
+          <a:lstStyle/>
+          <a:p>
+            <a:pPr algn="ctr" indent="0" marL="0">
+              <a:buNone/>
+            </a:pPr>
+            <a:r>
+              <a:rPr lang="en-US" sz="1400" b="1" dirty="0">
+                <a:solidFill>
+                  <a:srgbClr val="9B9690"/>
+                </a:solidFill>
+                <a:latin typeface="Calibri" pitchFamily="34" charset="0"/>
+                <a:ea typeface="Calibri" pitchFamily="34" charset="-122"/>
+                <a:cs typeface="Calibri" pitchFamily="34" charset="-120"/>
+              </a:rPr>
+              <a:t>Earthquakes</a:t>
+            </a:r>
+            <a:endParaRPr lang="en-US" sz="1400" dirty="0"/>
+          </a:p>
+        </p:txBody>
+      </p:sp>
+      <p:sp>
+        <p:nvSpPr>
+          <p:cNvPr id="15" name="Text 13"/>
+          <p:cNvSpPr/>
+          <p:nvPr/>
+        </p:nvSpPr>
+        <p:spPr>
+          <a:xfrm>
+            <a:off x="6248400" y="3291840"/>
+            <a:ext cx="2072640" cy="731520"/>
+          </a:xfrm>
+          <a:prstGeom prst="rect">
+            <a:avLst/>
+          </a:prstGeom>
+          <a:noFill/>
+          <a:ln/>
+        </p:spPr>
+        <p:txBody>
+          <a:bodyPr wrap="square" rtlCol="0" anchor="ctr"/>
+          <a:lstStyle/>
+          <a:p>
+            <a:pPr algn="ctr" indent="0" marL="0">
+              <a:buNone/>
+            </a:pPr>
+            <a:r>
+              <a:rPr lang="en-US" sz="1200" dirty="0">
+                <a:solidFill>
+                  <a:srgbClr val="9B9690"/>
+                </a:solidFill>
+                <a:latin typeface="Calibri" pitchFamily="34" charset="0"/>
+                <a:ea typeface="Calibri" pitchFamily="34" charset="-122"/>
+                <a:cs typeface="Calibri" pitchFamily="34" charset="-120"/>
+              </a:rPr>
+              <a:t>Occur in this zone</a:t>
+            </a:r>
+            <a:endParaRPr lang="en-US" sz="1200" dirty="0"/>
+          </a:p>
+        </p:txBody>
+      </p:sp>
+    </p:spTree>
+  </p:cSld>
+  <p:clrMapOvr>
+    <a:masterClrMapping/>
+  </p:clrMapOvr>
+</p:sld>
+</file>
+
+<file path=ppt/slides/slide9.xml><?xml version="1.0" encoding="utf-8"?>
+<p:sld xmlns:a="http://schemas.openxmlformats.org/drawingml/2006/main" xmlns:r="http://schemas.openxmlformats.org/officeDocument/2006/relationships" xmlns:p="http://schemas.openxmlformats.org/presentationml/2006/main">
+  <p:cSld name="Slide 9">
+    <p:bg>
+      <p:bgPr>
+        <a:solidFill>
+          <a:srgbClr val="FAF8F5"/>
+        </a:solidFill>
+      </p:bgPr>
+    </p:bg>
+    <p:spTree>
+      <p:nvGrpSpPr>
+        <p:cNvPr id="1" name=""/>
+        <p:cNvGrpSpPr/>
+        <p:nvPr/>
+      </p:nvGrpSpPr>
+      <p:grpSpPr>
+        <a:xfrm>
+          <a:off x="0" y="0"/>
+          <a:ext cx="0" cy="0"/>
+          <a:chOff x="0" y="0"/>
+          <a:chExt cx="0" cy="0"/>
+        </a:xfrm>
+      </p:grpSpPr>
+      <p:sp>
+        <p:nvSpPr>
+          <p:cNvPr id="2" name="Shape 0"/>
+          <p:cNvSpPr/>
+          <p:nvPr/>
+        </p:nvSpPr>
+        <p:spPr>
+          <a:xfrm>
+            <a:off x="0" y="0"/>
+            <a:ext cx="9144000" cy="822960"/>
+          </a:xfrm>
+          <a:prstGeom prst="rect">
+            <a:avLst/>
+          </a:prstGeom>
+          <a:solidFill>
+            <a:srgbClr val="FFFFFF"/>
+          </a:solidFill>
+          <a:ln/>
+        </p:spPr>
+      </p:sp>
+      <p:sp>
+        <p:nvSpPr>
+          <p:cNvPr id="3" name="Shape 1"/>
+          <p:cNvSpPr/>
+          <p:nvPr/>
+        </p:nvSpPr>
+        <p:spPr>
+          <a:xfrm>
+            <a:off x="0" y="795528"/>
+            <a:ext cx="9144000" cy="27432"/>
+          </a:xfrm>
+          <a:prstGeom prst="rect">
+            <a:avLst/>
+          </a:prstGeom>
+          <a:solidFill>
+            <a:srgbClr val="2A9D8F"/>
+          </a:solidFill>
+          <a:ln/>
+        </p:spPr>
+      </p:sp>
+      <p:sp>
+        <p:nvSpPr>
+          <p:cNvPr id="4" name="Text 2"/>
+          <p:cNvSpPr/>
+          <p:nvPr/>
+        </p:nvSpPr>
+        <p:spPr>
+          <a:xfrm>
+            <a:off x="640080" y="91440"/>
+            <a:ext cx="7863840" cy="640080"/>
+          </a:xfrm>
+          <a:prstGeom prst="rect">
+            <a:avLst/>
+          </a:prstGeom>
+          <a:noFill/>
+          <a:ln/>
+        </p:spPr>
+        <p:txBody>
+          <a:bodyPr wrap="square" lIns="0" tIns="0" rIns="0" bIns="0" rtlCol="0" anchor="ctr"/>
+          <a:lstStyle/>
+          <a:p>
+            <a:pPr indent="0" marL="0">
+              <a:buNone/>
+            </a:pPr>
+            <a:r>
+              <a:rPr lang="en-US" sz="2200" b="1" dirty="0">
+                <a:solidFill>
+                  <a:srgbClr val="1B2A4A"/>
+                </a:solidFill>
+                <a:latin typeface="Georgia" pitchFamily="34" charset="0"/>
+                <a:ea typeface="Georgia" pitchFamily="34" charset="-122"/>
+                <a:cs typeface="Georgia" pitchFamily="34" charset="-120"/>
+              </a:rPr>
+              <a:t>Recommended Videos</a:t>
+            </a:r>
+            <a:endParaRPr lang="en-US" sz="2200" dirty="0"/>
+          </a:p>
+        </p:txBody>
+      </p:sp>
+      <p:sp>
+        <p:nvSpPr>
+          <p:cNvPr id="5" name="Text 3"/>
+          <p:cNvSpPr/>
+          <p:nvPr/>
+        </p:nvSpPr>
+        <p:spPr>
+          <a:xfrm>
+            <a:off x="640080" y="868680"/>
+            <a:ext cx="7863840" cy="274320"/>
+          </a:xfrm>
+          <a:prstGeom prst="rect">
+            <a:avLst/>
+          </a:prstGeom>
+          <a:noFill/>
+          <a:ln/>
+        </p:spPr>
+        <p:txBody>
+          <a:bodyPr wrap="square" rtlCol="0" anchor="ctr"/>
+          <a:lstStyle/>
+          <a:p>
+            <a:pPr indent="0" marL="0">
+              <a:buNone/>
+            </a:pPr>
+            <a:r>
+              <a:rPr lang="en-US" sz="1200" i="1" dirty="0">
+                <a:solidFill>
+                  <a:srgbClr val="6B6660"/>
+                </a:solidFill>
+                <a:latin typeface="Calibri" pitchFamily="34" charset="0"/>
+                <a:ea typeface="Calibri" pitchFamily="34" charset="-122"/>
+                <a:cs typeface="Calibri" pitchFamily="34" charset="-120"/>
+              </a:rPr>
+              <a:t>Search these on YouTube to learn more.</a:t>
+            </a:r>
+            <a:endParaRPr lang="en-US" sz="1200" dirty="0"/>
+          </a:p>
+        </p:txBody>
+      </p:sp>
+      <p:sp>
+        <p:nvSpPr>
+          <p:cNvPr id="6" name="Shape 4"/>
+          <p:cNvSpPr/>
+          <p:nvPr/>
+        </p:nvSpPr>
+        <p:spPr>
+          <a:xfrm>
+            <a:off x="457200" y="1234440"/>
+            <a:ext cx="8229600" cy="841248"/>
+          </a:xfrm>
+          <a:prstGeom prst="rect">
+            <a:avLst/>
+          </a:prstGeom>
+          <a:solidFill>
+            <a:srgbClr val="FFFFFF"/>
+          </a:solidFill>
+          <a:ln/>
+          <a:effectLst>
+            <a:outerShdw sx="100000" sy="100000" kx="0" ky="0" algn="bl" rotWithShape="0" blurRad="76200" dist="25400" dir="8100000">
+              <a:srgbClr val="000000">
+                <a:alpha val="12000"/>
+              </a:srgbClr>
+            </a:outerShdw>
+          </a:effectLst>
+        </p:spPr>
+      </p:sp>
+      <p:sp>
+        <p:nvSpPr>
+          <p:cNvPr id="7" name="Shape 5"/>
+          <p:cNvSpPr/>
+          <p:nvPr/>
+        </p:nvSpPr>
+        <p:spPr>
+          <a:xfrm>
+            <a:off x="457200" y="1234440"/>
+            <a:ext cx="64008" cy="841248"/>
+          </a:xfrm>
+          <a:prstGeom prst="rect">
+            <a:avLst/>
+          </a:prstGeom>
+          <a:solidFill>
+            <a:srgbClr val="2A9D8F"/>
+          </a:solidFill>
+          <a:ln/>
+        </p:spPr>
+      </p:sp>
+      <p:sp>
+        <p:nvSpPr>
+          <p:cNvPr id="8" name="Text 6"/>
+          <p:cNvSpPr/>
+          <p:nvPr/>
+        </p:nvSpPr>
+        <p:spPr>
+          <a:xfrm>
+            <a:off x="640080" y="1325880"/>
+            <a:ext cx="457200" cy="457200"/>
+          </a:xfrm>
+          <a:prstGeom prst="rect">
+            <a:avLst/>
+          </a:prstGeom>
+          <a:noFill/>
+          <a:ln/>
+        </p:spPr>
+        <p:txBody>
+          <a:bodyPr wrap="square" rtlCol="0" anchor="ctr"/>
+          <a:lstStyle/>
+          <a:p>
+            <a:pPr algn="ctr" indent="0" marL="0">
+              <a:buNone/>
+            </a:pPr>
+            <a:r>
+              <a:rPr lang="en-US" sz="2000" dirty="0">
+                <a:solidFill>
+                  <a:srgbClr val="2A9D8F"/>
+                </a:solidFill>
+                <a:latin typeface="Calibri" pitchFamily="34" charset="0"/>
+                <a:ea typeface="Calibri" pitchFamily="34" charset="-122"/>
+                <a:cs typeface="Calibri" pitchFamily="34" charset="-120"/>
+              </a:rPr>
+              <a:t>▶</a:t>
+            </a:r>
+            <a:endParaRPr lang="en-US" sz="2000" dirty="0"/>
+          </a:p>
+        </p:txBody>
+      </p:sp>
+      <p:sp>
+        <p:nvSpPr>
+          <p:cNvPr id="9" name="Text 7"/>
+          <p:cNvSpPr/>
+          <p:nvPr/>
+        </p:nvSpPr>
+        <p:spPr>
+          <a:xfrm>
+            <a:off x="1188720" y="1307592"/>
+            <a:ext cx="7132320" cy="411480"/>
+          </a:xfrm>
+          <a:prstGeom prst="rect">
+            <a:avLst/>
+          </a:prstGeom>
+          <a:noFill/>
+          <a:ln/>
+        </p:spPr>
+        <p:txBody>
+          <a:bodyPr wrap="square" rtlCol="0" anchor="ctr"/>
+          <a:lstStyle/>
+          <a:p>
+            <a:pPr indent="0" marL="0">
+              <a:buNone/>
+            </a:pPr>
+            <a:r>
+              <a:rPr lang="en-US" sz="1400" b="1" dirty="0">
+                <a:solidFill>
+                  <a:srgbClr val="1B2A4A"/>
+                </a:solidFill>
+                <a:latin typeface="Calibri" pitchFamily="34" charset="0"/>
+                <a:ea typeface="Calibri" pitchFamily="34" charset="-122"/>
+                <a:cs typeface="Calibri" pitchFamily="34" charset="-120"/>
+              </a:rPr>
+              <a:t>How Do Earthquakes Work?</a:t>
+            </a:r>
+            <a:endParaRPr lang="en-US" sz="1400" dirty="0"/>
+          </a:p>
+        </p:txBody>
+      </p:sp>
+      <p:sp>
+        <p:nvSpPr>
+          <p:cNvPr id="10" name="Text 8"/>
+          <p:cNvSpPr/>
+          <p:nvPr/>
+        </p:nvSpPr>
+        <p:spPr>
+          <a:xfrm>
+            <a:off x="1188720" y="1691640"/>
+            <a:ext cx="7132320" cy="320040"/>
+          </a:xfrm>
+          <a:prstGeom prst="rect">
+            <a:avLst/>
+          </a:prstGeom>
+          <a:noFill/>
+          <a:ln/>
+        </p:spPr>
+        <p:txBody>
+          <a:bodyPr wrap="square" rtlCol="0" anchor="ctr"/>
+          <a:lstStyle/>
+          <a:p>
+            <a:pPr indent="0" marL="0">
+              <a:buNone/>
+            </a:pPr>
+            <a:r>
+              <a:rPr lang="en-US" sz="1100" dirty="0">
+                <a:solidFill>
+                  <a:srgbClr val="6B6660"/>
+                </a:solidFill>
+                <a:latin typeface="Calibri" pitchFamily="34" charset="0"/>
+                <a:ea typeface="Calibri" pitchFamily="34" charset="-122"/>
+                <a:cs typeface="Calibri" pitchFamily="34" charset="-120"/>
+              </a:rPr>
+              <a:t>TED-Ed  •  5 min</a:t>
+            </a:r>
+            <a:endParaRPr lang="en-US" sz="1100" dirty="0"/>
+          </a:p>
+        </p:txBody>
+      </p:sp>
+      <p:sp>
+        <p:nvSpPr>
+          <p:cNvPr id="11" name="Shape 9"/>
+          <p:cNvSpPr/>
+          <p:nvPr/>
+        </p:nvSpPr>
+        <p:spPr>
+          <a:xfrm>
+            <a:off x="457200" y="2212848"/>
+            <a:ext cx="8229600" cy="841248"/>
+          </a:xfrm>
+          <a:prstGeom prst="rect">
+            <a:avLst/>
+          </a:prstGeom>
+          <a:solidFill>
+            <a:srgbClr val="FFFFFF"/>
+          </a:solidFill>
+          <a:ln/>
+          <a:effectLst>
+            <a:outerShdw sx="100000" sy="100000" kx="0" ky="0" algn="bl" rotWithShape="0" blurRad="76200" dist="25400" dir="8100000">
+              <a:srgbClr val="000000">
+                <a:alpha val="12000"/>
+              </a:srgbClr>
+            </a:outerShdw>
+          </a:effectLst>
+        </p:spPr>
+      </p:sp>
+      <p:sp>
+        <p:nvSpPr>
+          <p:cNvPr id="12" name="Shape 10"/>
+          <p:cNvSpPr/>
+          <p:nvPr/>
+        </p:nvSpPr>
+        <p:spPr>
+          <a:xfrm>
+            <a:off x="457200" y="2212848"/>
+            <a:ext cx="64008" cy="841248"/>
+          </a:xfrm>
+          <a:prstGeom prst="rect">
+            <a:avLst/>
+          </a:prstGeom>
+          <a:solidFill>
+            <a:srgbClr val="2A9D8F"/>
+          </a:solidFill>
+          <a:ln/>
+        </p:spPr>
+      </p:sp>
+      <p:sp>
+        <p:nvSpPr>
+          <p:cNvPr id="13" name="Text 11"/>
+          <p:cNvSpPr/>
+          <p:nvPr/>
+        </p:nvSpPr>
+        <p:spPr>
+          <a:xfrm>
+            <a:off x="640080" y="2304288"/>
+            <a:ext cx="457200" cy="457200"/>
+          </a:xfrm>
+          <a:prstGeom prst="rect">
+            <a:avLst/>
+          </a:prstGeom>
+          <a:noFill/>
+          <a:ln/>
+        </p:spPr>
+        <p:txBody>
+          <a:bodyPr wrap="square" rtlCol="0" anchor="ctr"/>
+          <a:lstStyle/>
+          <a:p>
+            <a:pPr algn="ctr" indent="0" marL="0">
+              <a:buNone/>
+            </a:pPr>
+            <a:r>
+              <a:rPr lang="en-US" sz="2000" dirty="0">
+                <a:solidFill>
+                  <a:srgbClr val="2A9D8F"/>
+                </a:solidFill>
+                <a:latin typeface="Calibri" pitchFamily="34" charset="0"/>
+                <a:ea typeface="Calibri" pitchFamily="34" charset="-122"/>
+                <a:cs typeface="Calibri" pitchFamily="34" charset="-120"/>
+              </a:rPr>
+              <a:t>▶</a:t>
+            </a:r>
+            <a:endParaRPr lang="en-US" sz="2000" dirty="0"/>
+          </a:p>
+        </p:txBody>
+      </p:sp>
+      <p:sp>
+        <p:nvSpPr>
+          <p:cNvPr id="14" name="Text 12"/>
+          <p:cNvSpPr/>
+          <p:nvPr/>
+        </p:nvSpPr>
+        <p:spPr>
+          <a:xfrm>
+            <a:off x="1188720" y="2286000"/>
+            <a:ext cx="7132320" cy="411480"/>
+          </a:xfrm>
+          <a:prstGeom prst="rect">
+            <a:avLst/>
+          </a:prstGeom>
+          <a:noFill/>
+          <a:ln/>
+        </p:spPr>
+        <p:txBody>
+          <a:bodyPr wrap="square" rtlCol="0" anchor="ctr"/>
+          <a:lstStyle/>
+          <a:p>
+            <a:pPr indent="0" marL="0">
+              <a:buNone/>
+            </a:pPr>
+            <a:r>
+              <a:rPr lang="en-US" sz="1400" b="1" dirty="0">
+                <a:solidFill>
+                  <a:srgbClr val="1B2A4A"/>
+                </a:solidFill>
+                <a:latin typeface="Calibri" pitchFamily="34" charset="0"/>
+                <a:ea typeface="Calibri" pitchFamily="34" charset="-122"/>
+                <a:cs typeface="Calibri" pitchFamily="34" charset="-120"/>
+              </a:rPr>
+              <a:t>Volcanoes — Formation, Eruption, Types</a:t>
+            </a:r>
+            <a:endParaRPr lang="en-US" sz="1400" dirty="0"/>
+          </a:p>
+        </p:txBody>
+      </p:sp>
+      <p:sp>
+        <p:nvSpPr>
+          <p:cNvPr id="15" name="Text 13"/>
+          <p:cNvSpPr/>
+          <p:nvPr/>
+        </p:nvSpPr>
+        <p:spPr>
+          <a:xfrm>
+            <a:off x="1188720" y="2670048"/>
+            <a:ext cx="7132320" cy="320040"/>
+          </a:xfrm>
+          <a:prstGeom prst="rect">
+            <a:avLst/>
+          </a:prstGeom>
+          <a:noFill/>
+          <a:ln/>
+        </p:spPr>
+        <p:txBody>
+          <a:bodyPr wrap="square" rtlCol="0" anchor="ctr"/>
+          <a:lstStyle/>
+          <a:p>
+            <a:pPr indent="0" marL="0">
+              <a:buNone/>
+            </a:pPr>
+            <a:r>
+              <a:rPr lang="en-US" sz="1100" dirty="0">
+                <a:solidFill>
+                  <a:srgbClr val="6B6660"/>
+                </a:solidFill>
+                <a:latin typeface="Calibri" pitchFamily="34" charset="0"/>
+                <a:ea typeface="Calibri" pitchFamily="34" charset="-122"/>
+                <a:cs typeface="Calibri" pitchFamily="34" charset="-120"/>
+              </a:rPr>
+              <a:t>FuseSchool  •  5 min</a:t>
+            </a:r>
+            <a:endParaRPr lang="en-US" sz="1100" dirty="0"/>
+          </a:p>
+        </p:txBody>
+      </p:sp>
+      <p:sp>
+        <p:nvSpPr>
+          <p:cNvPr id="16" name="Shape 14"/>
+          <p:cNvSpPr/>
+          <p:nvPr/>
+        </p:nvSpPr>
+        <p:spPr>
+          <a:xfrm>
+            <a:off x="457200" y="3191256"/>
+            <a:ext cx="8229600" cy="841248"/>
+          </a:xfrm>
+          <a:prstGeom prst="rect">
+            <a:avLst/>
+          </a:prstGeom>
+          <a:solidFill>
+            <a:srgbClr val="FFFFFF"/>
+          </a:solidFill>
+          <a:ln/>
+          <a:effectLst>
+            <a:outerShdw sx="100000" sy="100000" kx="0" ky="0" algn="bl" rotWithShape="0" blurRad="76200" dist="25400" dir="8100000">
+              <a:srgbClr val="000000">
+                <a:alpha val="12000"/>
+              </a:srgbClr>
+            </a:outerShdw>
+          </a:effectLst>
+        </p:spPr>
+      </p:sp>
+      <p:sp>
+        <p:nvSpPr>
+          <p:cNvPr id="17" name="Shape 15"/>
+          <p:cNvSpPr/>
+          <p:nvPr/>
+        </p:nvSpPr>
+        <p:spPr>
+          <a:xfrm>
+            <a:off x="457200" y="3191256"/>
+            <a:ext cx="64008" cy="841248"/>
+          </a:xfrm>
+          <a:prstGeom prst="rect">
+            <a:avLst/>
+          </a:prstGeom>
+          <a:solidFill>
+            <a:srgbClr val="2A9D8F"/>
+          </a:solidFill>
+          <a:ln/>
+        </p:spPr>
+      </p:sp>
+      <p:sp>
+        <p:nvSpPr>
+          <p:cNvPr id="18" name="Text 16"/>
+          <p:cNvSpPr/>
+          <p:nvPr/>
+        </p:nvSpPr>
+        <p:spPr>
+          <a:xfrm>
+            <a:off x="640080" y="3282696"/>
+            <a:ext cx="457200" cy="457200"/>
+          </a:xfrm>
+          <a:prstGeom prst="rect">
+            <a:avLst/>
+          </a:prstGeom>
+          <a:noFill/>
+          <a:ln/>
+        </p:spPr>
+        <p:txBody>
+          <a:bodyPr wrap="square" rtlCol="0" anchor="ctr"/>
+          <a:lstStyle/>
+          <a:p>
+            <a:pPr algn="ctr" indent="0" marL="0">
+              <a:buNone/>
+            </a:pPr>
+            <a:r>
+              <a:rPr lang="en-US" sz="2000" dirty="0">
+                <a:solidFill>
+                  <a:srgbClr val="2A9D8F"/>
+                </a:solidFill>
+                <a:latin typeface="Calibri" pitchFamily="34" charset="0"/>
+                <a:ea typeface="Calibri" pitchFamily="34" charset="-122"/>
+                <a:cs typeface="Calibri" pitchFamily="34" charset="-120"/>
+              </a:rPr>
+              <a:t>▶</a:t>
+            </a:r>
+            <a:endParaRPr lang="en-US" sz="2000" dirty="0"/>
+          </a:p>
+        </p:txBody>
+      </p:sp>
+      <p:sp>
+        <p:nvSpPr>
+          <p:cNvPr id="19" name="Text 17"/>
+          <p:cNvSpPr/>
+          <p:nvPr/>
+        </p:nvSpPr>
+        <p:spPr>
+          <a:xfrm>
+            <a:off x="1188720" y="3264408"/>
+            <a:ext cx="7132320" cy="411480"/>
+          </a:xfrm>
+          <a:prstGeom prst="rect">
+            <a:avLst/>
+          </a:prstGeom>
+          <a:noFill/>
+          <a:ln/>
+        </p:spPr>
+        <p:txBody>
+          <a:bodyPr wrap="square" rtlCol="0" anchor="ctr"/>
+          <a:lstStyle/>
+          <a:p>
+            <a:pPr indent="0" marL="0">
+              <a:buNone/>
+            </a:pPr>
+            <a:r>
+              <a:rPr lang="en-US" sz="1400" b="1" dirty="0">
+                <a:solidFill>
+                  <a:srgbClr val="1B2A4A"/>
+                </a:solidFill>
+                <a:latin typeface="Calibri" pitchFamily="34" charset="0"/>
+                <a:ea typeface="Calibri" pitchFamily="34" charset="-122"/>
+                <a:cs typeface="Calibri" pitchFamily="34" charset="-120"/>
+              </a:rPr>
+              <a:t>Ring of Fire Explained</a:t>
+            </a:r>
+            <a:endParaRPr lang="en-US" sz="1400" dirty="0"/>
+          </a:p>
+        </p:txBody>
+      </p:sp>
+      <p:sp>
+        <p:nvSpPr>
+          <p:cNvPr id="20" name="Text 18"/>
+          <p:cNvSpPr/>
+          <p:nvPr/>
+        </p:nvSpPr>
+        <p:spPr>
+          <a:xfrm>
+            <a:off x="1188720" y="3648456"/>
+            <a:ext cx="7132320" cy="320040"/>
+          </a:xfrm>
+          <a:prstGeom prst="rect">
+            <a:avLst/>
+          </a:prstGeom>
+          <a:noFill/>
+          <a:ln/>
+        </p:spPr>
+        <p:txBody>
+          <a:bodyPr wrap="square" rtlCol="0" anchor="ctr"/>
+          <a:lstStyle/>
+          <a:p>
+            <a:pPr indent="0" marL="0">
+              <a:buNone/>
+            </a:pPr>
+            <a:r>
+              <a:rPr lang="en-US" sz="1100" dirty="0">
+                <a:solidFill>
+                  <a:srgbClr val="6B6660"/>
+                </a:solidFill>
+                <a:latin typeface="Calibri" pitchFamily="34" charset="0"/>
+                <a:ea typeface="Calibri" pitchFamily="34" charset="-122"/>
+                <a:cs typeface="Calibri" pitchFamily="34" charset="-120"/>
+              </a:rPr>
+              <a:t>National Geographic  •  3 min</a:t>
+            </a:r>
+            <a:endParaRPr lang="en-US" sz="1100" dirty="0"/>
+          </a:p>
+        </p:txBody>
+      </p:sp>
+      <p:sp>
+        <p:nvSpPr>
+          <p:cNvPr id="21" name="Shape 19"/>
+          <p:cNvSpPr/>
+          <p:nvPr/>
+        </p:nvSpPr>
+        <p:spPr>
+          <a:xfrm>
+            <a:off x="457200" y="4169664"/>
+            <a:ext cx="8229600" cy="841248"/>
+          </a:xfrm>
+          <a:prstGeom prst="rect">
+            <a:avLst/>
+          </a:prstGeom>
+          <a:solidFill>
+            <a:srgbClr val="FFFFFF"/>
+          </a:solidFill>
+          <a:ln/>
+          <a:effectLst>
+            <a:outerShdw sx="100000" sy="100000" kx="0" ky="0" algn="bl" rotWithShape="0" blurRad="76200" dist="25400" dir="8100000">
+              <a:srgbClr val="000000">
+                <a:alpha val="12000"/>
+              </a:srgbClr>
+            </a:outerShdw>
+          </a:effectLst>
+        </p:spPr>
+      </p:sp>
+      <p:sp>
+        <p:nvSpPr>
+          <p:cNvPr id="22" name="Shape 20"/>
+          <p:cNvSpPr/>
+          <p:nvPr/>
+        </p:nvSpPr>
+        <p:spPr>
+          <a:xfrm>
+            <a:off x="457200" y="4169664"/>
+            <a:ext cx="64008" cy="841248"/>
+          </a:xfrm>
+          <a:prstGeom prst="rect">
+            <a:avLst/>
+          </a:prstGeom>
+          <a:solidFill>
+            <a:srgbClr val="2A9D8F"/>
+          </a:solidFill>
+          <a:ln/>
+        </p:spPr>
+      </p:sp>
+      <p:sp>
+        <p:nvSpPr>
+          <p:cNvPr id="23" name="Text 21"/>
+          <p:cNvSpPr/>
+          <p:nvPr/>
+        </p:nvSpPr>
+        <p:spPr>
+          <a:xfrm>
+            <a:off x="640080" y="4261104"/>
+            <a:ext cx="457200" cy="457200"/>
+          </a:xfrm>
+          <a:prstGeom prst="rect">
+            <a:avLst/>
+          </a:prstGeom>
+          <a:noFill/>
+          <a:ln/>
+        </p:spPr>
+        <p:txBody>
+          <a:bodyPr wrap="square" rtlCol="0" anchor="ctr"/>
+          <a:lstStyle/>
+          <a:p>
+            <a:pPr algn="ctr" indent="0" marL="0">
+              <a:buNone/>
+            </a:pPr>
+            <a:r>
+              <a:rPr lang="en-US" sz="2000" dirty="0">
+                <a:solidFill>
+                  <a:srgbClr val="2A9D8F"/>
+                </a:solidFill>
+                <a:latin typeface="Calibri" pitchFamily="34" charset="0"/>
+                <a:ea typeface="Calibri" pitchFamily="34" charset="-122"/>
+                <a:cs typeface="Calibri" pitchFamily="34" charset="-120"/>
+              </a:rPr>
+              <a:t>▶</a:t>
+            </a:r>
+            <a:endParaRPr lang="en-US" sz="2000" dirty="0"/>
+          </a:p>
+        </p:txBody>
+      </p:sp>
+      <p:sp>
+        <p:nvSpPr>
+          <p:cNvPr id="24" name="Text 22"/>
+          <p:cNvSpPr/>
+          <p:nvPr/>
+        </p:nvSpPr>
+        <p:spPr>
+          <a:xfrm>
+            <a:off x="1188720" y="4242816"/>
+            <a:ext cx="7132320" cy="411480"/>
+          </a:xfrm>
+          <a:prstGeom prst="rect">
+            <a:avLst/>
+          </a:prstGeom>
+          <a:noFill/>
+          <a:ln/>
+        </p:spPr>
+        <p:txBody>
+          <a:bodyPr wrap="square" rtlCol="0" anchor="ctr"/>
+          <a:lstStyle/>
+          <a:p>
+            <a:pPr indent="0" marL="0">
+              <a:buNone/>
+            </a:pPr>
+            <a:r>
+              <a:rPr lang="en-US" sz="1400" b="1" dirty="0">
+                <a:solidFill>
+                  <a:srgbClr val="1B2A4A"/>
+                </a:solidFill>
+                <a:latin typeface="Calibri" pitchFamily="34" charset="0"/>
+                <a:ea typeface="Calibri" pitchFamily="34" charset="-122"/>
+                <a:cs typeface="Calibri" pitchFamily="34" charset="-120"/>
+              </a:rPr>
+              <a:t>Japan Earthquake 2011 — How It Happened</a:t>
+            </a:r>
+            <a:endParaRPr lang="en-US" sz="1400" dirty="0"/>
+          </a:p>
+        </p:txBody>
+      </p:sp>
+      <p:sp>
+        <p:nvSpPr>
+          <p:cNvPr id="25" name="Text 23"/>
+          <p:cNvSpPr/>
+          <p:nvPr/>
+        </p:nvSpPr>
+        <p:spPr>
+          <a:xfrm>
+            <a:off x="1188720" y="4626864"/>
+            <a:ext cx="7132320" cy="320040"/>
+          </a:xfrm>
+          <a:prstGeom prst="rect">
+            <a:avLst/>
+          </a:prstGeom>
+          <a:noFill/>
+          <a:ln/>
+        </p:spPr>
+        <p:txBody>
+          <a:bodyPr wrap="square" rtlCol="0" anchor="ctr"/>
+          <a:lstStyle/>
+          <a:p>
+            <a:pPr indent="0" marL="0">
+              <a:buNone/>
+            </a:pPr>
+            <a:r>
+              <a:rPr lang="en-US" sz="1100" dirty="0">
+                <a:solidFill>
+                  <a:srgbClr val="6B6660"/>
+                </a:solidFill>
+                <a:latin typeface="Calibri" pitchFamily="34" charset="0"/>
+                <a:ea typeface="Calibri" pitchFamily="34" charset="-122"/>
+                <a:cs typeface="Calibri" pitchFamily="34" charset="-120"/>
+              </a:rPr>
+              <a:t>BBC  •  4 min</a:t>
             </a:r>
             <a:endParaRPr lang="en-US" sz="1100" dirty="0"/>
           </a:p>
